--- a/Planning docs/Slides/lesson-28-2-teacher-slides.pptx
+++ b/Planning docs/Slides/lesson-28-2-teacher-slides.pptx
@@ -18,9 +18,10 @@
     <p:sldId id="266" r:id="rId12"/>
     <p:sldId id="267" r:id="rId13"/>
     <p:sldId id="268" r:id="rId14"/>
+    <p:sldId id="269" r:id="rId15"/>
   </p:sldIdLst>
   <p:notesMasterIdLst>
-    <p:notesMasterId r:id="rId15"/>
+    <p:notesMasterId r:id="rId16"/>
   </p:notesMasterIdLst>
   <p:sldSz cx="9144000" cy="5143500"/>
   <p:notesSz cx="5143500" cy="9144000"/>
@@ -514,7 +515,7 @@
           <a:p>
             <a:r>
               <a:rPr lang="en-US" dirty="0"/>
-              <a:t>Title slide for Week 28 Day 2. The Lion, the Witch and the Wardrobe.</a:t>
+              <a:t>Lesson 28.2. Reading: Reading: Ch. 10–12.</a:t>
             </a:r>
             <a:endParaRPr lang="en-US" dirty="0"/>
           </a:p>
@@ -602,7 +603,7 @@
           <a:p>
             <a:r>
               <a:rPr lang="en-US" dirty="0"/>
-              <a:t>Review morphology focus. Have students identify the base word and affix in each example.</a:t>
+              <a:t>Break the word into base + word part. Ask what the part adds to the meaning.</a:t>
             </a:r>
             <a:endParaRPr lang="en-US" dirty="0"/>
           </a:p>
@@ -690,7 +691,7 @@
           <a:p>
             <a:r>
               <a:rPr lang="en-US" dirty="0"/>
-              <a:t>Go through each vocabulary word. For flip cards, have students guess the definition before revealing.</a:t>
+              <a:t>Each word appears in the chapters read this week, in the author’s own sentence.</a:t>
             </a:r>
             <a:endParaRPr lang="en-US" dirty="0"/>
           </a:p>
@@ -778,7 +779,7 @@
           <a:p>
             <a:r>
               <a:rPr lang="en-US" dirty="0"/>
-              <a:t>Reading focus slide. Use pause-and-think questions during reading. Copywork can be done after reading.</a:t>
+              <a:t>Answers: contraction and possessive, possessive and contraction, contraction, possessive</a:t>
             </a:r>
             <a:endParaRPr lang="en-US" dirty="0"/>
           </a:p>
@@ -866,7 +867,7 @@
           <a:p>
             <a:r>
               <a:rPr lang="en-US" dirty="0"/>
-              <a:t>Transition to the writing workshop assignment in Canvas.</a:t>
+              <a:t>Answers: contraction and possessive, possessive and contraction, contraction, possessive</a:t>
             </a:r>
             <a:endParaRPr lang="en-US" dirty="0"/>
           </a:p>
@@ -890,6 +891,94 @@
             <a:fld id="{F7021451-1387-4CA6-816F-3879F97B5CBC}" type="slidenum">
               <a:rPr lang="en-US"/>
               <a:t>13</a:t>
+            </a:fld>
+            <a:endParaRPr lang="en-US"/>
+          </a:p>
+        </p:txBody>
+      </p:sp>
+    </p:spTree>
+    <p:extLst>
+      <p:ext uri="{BB962C8B-B14F-4D97-AF65-F5344CB8AC3E}">
+        <p14:creationId xmlns:p14="http://schemas.microsoft.com/office/powerpoint/2010/main" val="1024086991"/>
+      </p:ext>
+    </p:extLst>
+  </p:cSld>
+  <p:clrMapOvr>
+    <a:masterClrMapping/>
+  </p:clrMapOvr>
+</p:notes>
+</file>
+
+<file path=ppt/notesSlides/notesSlide14.xml><?xml version="1.0" encoding="utf-8"?>
+<p:notes xmlns:a="http://schemas.openxmlformats.org/drawingml/2006/main" xmlns:r="http://schemas.openxmlformats.org/officeDocument/2006/relationships" xmlns:p="http://schemas.openxmlformats.org/presentationml/2006/main">
+  <p:cSld>
+    <p:spTree>
+      <p:nvGrpSpPr>
+        <p:cNvPr id="1" name=""/>
+        <p:cNvGrpSpPr/>
+        <p:nvPr/>
+      </p:nvGrpSpPr>
+      <p:grpSpPr>
+        <a:xfrm>
+          <a:off x="0" y="0"/>
+          <a:ext cx="0" cy="0"/>
+          <a:chOff x="0" y="0"/>
+          <a:chExt cx="0" cy="0"/>
+        </a:xfrm>
+      </p:grpSpPr>
+      <p:sp>
+        <p:nvSpPr>
+          <p:cNvPr id="2" name="Slide Image Placeholder 1"/>
+          <p:cNvSpPr>
+            <a:spLocks noGrp="1" noRot="1" noChangeAspect="1"/>
+          </p:cNvSpPr>
+          <p:nvPr>
+            <p:ph type="sldImg"/>
+          </p:nvPr>
+        </p:nvSpPr>
+        <p:spPr/>
+      </p:sp>
+      <p:sp>
+        <p:nvSpPr>
+          <p:cNvPr id="3" name="Notes Placeholder 2"/>
+          <p:cNvSpPr>
+            <a:spLocks noGrp="1"/>
+          </p:cNvSpPr>
+          <p:nvPr>
+            <p:ph type="body" idx="1"/>
+          </p:nvPr>
+        </p:nvSpPr>
+        <p:spPr/>
+        <p:txBody>
+          <a:bodyPr/>
+          <a:lstStyle/>
+          <a:p>
+            <a:r>
+              <a:rPr lang="en-US" dirty="0"/>
+              <a:t>Read the chapters, then return to the pause questions.</a:t>
+            </a:r>
+            <a:endParaRPr lang="en-US" dirty="0"/>
+          </a:p>
+        </p:txBody>
+      </p:sp>
+      <p:sp>
+        <p:nvSpPr>
+          <p:cNvPr id="4" name="Slide Number Placeholder 3"/>
+          <p:cNvSpPr>
+            <a:spLocks noGrp="1"/>
+          </p:cNvSpPr>
+          <p:nvPr>
+            <p:ph type="sldNum" sz="quarter" idx="10"/>
+          </p:nvPr>
+        </p:nvSpPr>
+        <p:spPr/>
+        <p:txBody>
+          <a:bodyPr/>
+          <a:lstStyle/>
+          <a:p>
+            <a:fld id="{F7021451-1387-4CA6-816F-3879F97B5CBC}" type="slidenum">
+              <a:rPr lang="en-US"/>
+              <a:t>14</a:t>
             </a:fld>
             <a:endParaRPr lang="en-US"/>
           </a:p>
@@ -954,7 +1043,7 @@
           <a:p>
             <a:r>
               <a:rPr lang="en-US" dirty="0"/>
-              <a:t>Read the prompt aloud once. Give students about 1 minute to read it again silently and think. Remind them: there is no wrong answer — just write what comes to mind. Advance to the writing slide when ready.</a:t>
+              <a:t>Read the prompt aloud. Give students a moment to think before writing.</a:t>
             </a:r>
             <a:endParaRPr lang="en-US" dirty="0"/>
           </a:p>
@@ -1042,7 +1131,7 @@
           <a:p>
             <a:r>
               <a:rPr lang="en-US" dirty="0"/>
-              <a:t>Set a 5-minute timer. Walk the room quietly. If a student stops, gently encourage them: "Keep writing — even one more sentence." The goal is sustained writing, not perfection. Do not interrupt to correct spelling or grammar during this time.</a:t>
+              <a:t>Five minutes of sustained writing. Stamina over polish. Do not correct spelling now.</a:t>
             </a:r>
             <a:endParaRPr lang="en-US" dirty="0"/>
           </a:p>
@@ -1130,7 +1219,7 @@
           <a:p>
             <a:r>
               <a:rPr lang="en-US" dirty="0"/>
-              <a:t>Set a 1-minute timer. Remind students: we are only fixing ONE thing today — Did I explain what I think the words mean?. They should also do a quick conventions check (capitals, punctuation, spelling). They do NOT need to rewrite — just fix and improve. Revision = improving ideas; Editing = fixing conventions. Keep them separate in your language.</a:t>
+              <a:t>One fix only. Editing is conventions; revision is ideas. Name which one you are asking for.</a:t>
             </a:r>
             <a:endParaRPr lang="en-US" dirty="0"/>
           </a:p>
@@ -1218,7 +1307,7 @@
           <a:p>
             <a:r>
               <a:rPr lang="en-US" dirty="0"/>
-              <a:t>Call on 3-5 students to share. Respond with genuine interest: "I love how you described that" or "That's a really interesting idea." Avoid correcting grammar or spelling during share time — this is about celebrating writing. If time is short, have 2-3 students share in chat instead.</a:t>
+              <a:t>Two or three volunteers. Praise something specific in each.</a:t>
             </a:r>
             <a:endParaRPr lang="en-US" dirty="0"/>
           </a:p>
@@ -1306,7 +1395,7 @@
           <a:p>
             <a:r>
               <a:rPr lang="en-US" dirty="0"/>
-              <a:t>Review the big question and reading lens with students before reading.</a:t>
+              <a:t>Reading lens: Good readers in a fantasy story slow down and pay attention to how the author builds the world . Details of setting, character, and pattern all work together to create meaning.</a:t>
             </a:r>
             <a:endParaRPr lang="en-US" dirty="0"/>
           </a:p>
@@ -1394,7 +1483,8 @@
           <a:p>
             <a:r>
               <a:rPr lang="en-US" dirty="0"/>
-              <a:t>Read the model sentence aloud. Ask students: what do you notice about the punctuation and capitalization?</a:t>
+              <a:t>Model sentence in the lesson: Aslan's wasn't Edmund expected.
+Tap through each highlighted word in the lesson and name what it does right before moving to the fix-it.</a:t>
             </a:r>
             <a:endParaRPr lang="en-US" dirty="0"/>
           </a:p>
@@ -1482,7 +1572,8 @@
           <a:p>
             <a:r>
               <a:rPr lang="en-US" dirty="0"/>
-              <a:t>Give students 1-2 minutes to fix the sentence. Walk the room and check.</a:t>
+              <a:t>Corrected: Corrected: The Witch's sledge couldn't move because the snow had melted, and her reindeer's hooves sank in the mud. 
+Look for: Witch's = possessive; couldn't = contraction (could not); comma before and; reindeer's = possessive; period ends.</a:t>
             </a:r>
             <a:endParaRPr lang="en-US" dirty="0"/>
           </a:p>
@@ -1570,7 +1661,8 @@
           <a:p>
             <a:r>
               <a:rPr lang="en-US" dirty="0"/>
-              <a:t>Reveal the corrected version. Point out each fix: capitalization, punctuation, spelling.</a:t>
+              <a:t>Corrected: Corrected: The Witch's sledge couldn't move because the snow had melted, and her reindeer's hooves sank in the mud. 
+Look for: Witch's = possessive; couldn't = contraction (could not); comma before and; reindeer's = possessive; period ends.</a:t>
             </a:r>
             <a:endParaRPr lang="en-US" dirty="0"/>
           </a:p>
@@ -1951,8 +2043,8 @@
         </p:nvSpPr>
         <p:spPr>
           <a:xfrm>
-            <a:off x="457200" y="914400"/>
-            <a:ext cx="8229600" cy="1097280"/>
+            <a:off x="0" y="822960"/>
+            <a:ext cx="9144000" cy="822960"/>
           </a:xfrm>
           <a:prstGeom prst="rect">
             <a:avLst/>
@@ -1968,7 +2060,43 @@
               <a:buNone/>
             </a:pPr>
             <a:r>
-              <a:rPr lang="en-US" sz="4000" b="1" dirty="0">
+              <a:rPr lang="en-US" sz="5200" dirty="0">
+                <a:solidFill>
+                  <a:srgbClr val="000000"/>
+                </a:solidFill>
+              </a:rPr>
+              <a:t>🦁</a:t>
+            </a:r>
+            <a:endParaRPr lang="en-US" sz="5200" dirty="0"/>
+          </a:p>
+        </p:txBody>
+      </p:sp>
+      <p:sp>
+        <p:nvSpPr>
+          <p:cNvPr id="3" name="Text 1"/>
+          <p:cNvSpPr/>
+          <p:nvPr/>
+        </p:nvSpPr>
+        <p:spPr>
+          <a:xfrm>
+            <a:off x="457200" y="1691640"/>
+            <a:ext cx="8229600" cy="566928"/>
+          </a:xfrm>
+          <a:prstGeom prst="rect">
+            <a:avLst/>
+          </a:prstGeom>
+          <a:noFill/>
+          <a:ln/>
+        </p:spPr>
+        <p:txBody>
+          <a:bodyPr wrap="square" lIns="0" tIns="0" rIns="0" bIns="0" rtlCol="0" anchor="ctr"/>
+          <a:lstStyle/>
+          <a:p>
+            <a:pPr algn="ctr" indent="0" marL="0">
+              <a:buNone/>
+            </a:pPr>
+            <a:r>
+              <a:rPr lang="en-US" sz="2600" b="1" dirty="0">
                 <a:solidFill>
                   <a:srgbClr val="FFFFFF"/>
                 </a:solidFill>
@@ -1976,22 +2104,22 @@
                 <a:ea typeface="Calibri" pitchFamily="34" charset="-122"/>
                 <a:cs typeface="Calibri" pitchFamily="34" charset="-120"/>
               </a:rPr>
-              <a:t>🦁  Week 28 · Day 2</a:t>
-            </a:r>
-            <a:endParaRPr lang="en-US" sz="4000" dirty="0"/>
-          </a:p>
-        </p:txBody>
-      </p:sp>
-      <p:sp>
-        <p:nvSpPr>
-          <p:cNvPr id="3" name="Text 1"/>
-          <p:cNvSpPr/>
-          <p:nvPr/>
-        </p:nvSpPr>
-        <p:spPr>
-          <a:xfrm>
-            <a:off x="457200" y="2103120"/>
-            <a:ext cx="8229600" cy="731520"/>
+              <a:t>The Lion, the Witch and the Wardrobe</a:t>
+            </a:r>
+            <a:endParaRPr lang="en-US" sz="2600" dirty="0"/>
+          </a:p>
+        </p:txBody>
+      </p:sp>
+      <p:sp>
+        <p:nvSpPr>
+          <p:cNvPr id="4" name="Text 2"/>
+          <p:cNvSpPr/>
+          <p:nvPr/>
+        </p:nvSpPr>
+        <p:spPr>
+          <a:xfrm>
+            <a:off x="457200" y="2331720"/>
+            <a:ext cx="8229600" cy="411480"/>
           </a:xfrm>
           <a:prstGeom prst="rect">
             <a:avLst/>
@@ -2007,7 +2135,7 @@
               <a:buNone/>
             </a:pPr>
             <a:r>
-              <a:rPr lang="en-US" sz="1800" dirty="0">
+              <a:rPr lang="en-US" sz="2000" dirty="0">
                 <a:solidFill>
                   <a:srgbClr val="4A90D9"/>
                 </a:solidFill>
@@ -2015,22 +2143,22 @@
                 <a:ea typeface="Calibri" pitchFamily="34" charset="-122"/>
                 <a:cs typeface="Calibri" pitchFamily="34" charset="-120"/>
               </a:rPr>
-              <a:t>The Lion, the Witch and the Wardrobe — Lesson 28.2</a:t>
-            </a:r>
-            <a:endParaRPr lang="en-US" sz="1800" dirty="0"/>
-          </a:p>
-        </p:txBody>
-      </p:sp>
-      <p:sp>
-        <p:nvSpPr>
-          <p:cNvPr id="4" name="Text 2"/>
-          <p:cNvSpPr/>
-          <p:nvPr/>
-        </p:nvSpPr>
-        <p:spPr>
-          <a:xfrm>
-            <a:off x="457200" y="4114800"/>
-            <a:ext cx="8229600" cy="457200"/>
+              <a:t>Lesson 28.2  ·  Reading: Ch. 10–12</a:t>
+            </a:r>
+            <a:endParaRPr lang="en-US" sz="2000" dirty="0"/>
+          </a:p>
+        </p:txBody>
+      </p:sp>
+      <p:sp>
+        <p:nvSpPr>
+          <p:cNvPr id="5" name="Text 3"/>
+          <p:cNvSpPr/>
+          <p:nvPr/>
+        </p:nvSpPr>
+        <p:spPr>
+          <a:xfrm>
+            <a:off x="457200" y="2880360"/>
+            <a:ext cx="8229600" cy="320040"/>
           </a:xfrm>
           <a:prstGeom prst="rect">
             <a:avLst/>
@@ -2046,17 +2174,17 @@
               <a:buNone/>
             </a:pPr>
             <a:r>
-              <a:rPr lang="en-US" sz="1300" dirty="0">
-                <a:solidFill>
-                  <a:srgbClr val="AAAAAA"/>
-                </a:solidFill>
-                <a:latin typeface="Calibri" pitchFamily="34" charset="0"/>
-                <a:ea typeface="Calibri" pitchFamily="34" charset="-122"/>
-                <a:cs typeface="Calibri" pitchFamily="34" charset="-120"/>
-              </a:rPr>
-              <a:t>Optima Academy Online · 3rd Grade ELA</a:t>
-            </a:r>
-            <a:endParaRPr lang="en-US" sz="1300" dirty="0"/>
+              <a:rPr lang="en-US" sz="1400" dirty="0">
+                <a:solidFill>
+                  <a:srgbClr val="C9BCE4"/>
+                </a:solidFill>
+                <a:latin typeface="Calibri" pitchFamily="34" charset="0"/>
+                <a:ea typeface="Calibri" pitchFamily="34" charset="-122"/>
+                <a:cs typeface="Calibri" pitchFamily="34" charset="-120"/>
+              </a:rPr>
+              <a:t>Grade 3 ELA  ·  Virtue: Loyalty</a:t>
+            </a:r>
+            <a:endParaRPr lang="en-US" sz="1400" dirty="0"/>
           </a:p>
         </p:txBody>
       </p:sp>
@@ -2094,65 +2222,62 @@
       </p:grpSpPr>
       <p:sp>
         <p:nvSpPr>
-          <p:cNvPr id="2" name="Text 0"/>
-          <p:cNvSpPr/>
-          <p:nvPr/>
-        </p:nvSpPr>
-        <p:spPr>
-          <a:xfrm>
-            <a:off x="365760" y="164592"/>
-            <a:ext cx="8412480" cy="566928"/>
-          </a:xfrm>
-          <a:prstGeom prst="rect">
-            <a:avLst/>
-          </a:prstGeom>
-          <a:noFill/>
-          <a:ln/>
-        </p:spPr>
-        <p:txBody>
-          <a:bodyPr wrap="square" lIns="0" tIns="0" rIns="0" bIns="0" rtlCol="0" anchor="ctr"/>
-          <a:lstStyle/>
-          <a:p>
-            <a:pPr algn="l" indent="0" marL="0">
-              <a:buNone/>
-            </a:pPr>
-            <a:r>
-              <a:rPr lang="en-US" sz="2800" b="1" dirty="0">
-                <a:solidFill>
-                  <a:srgbClr val="0E1C42"/>
-                </a:solidFill>
-                <a:latin typeface="Calibri" pitchFamily="34" charset="0"/>
-                <a:ea typeface="Calibri" pitchFamily="34" charset="-122"/>
-                <a:cs typeface="Calibri" pitchFamily="34" charset="-120"/>
-              </a:rPr>
-              <a:t>🌱 Morphology: Root/base: script/scribe means write</a:t>
-            </a:r>
-            <a:endParaRPr lang="en-US" sz="2800" dirty="0"/>
-          </a:p>
-        </p:txBody>
-      </p:sp>
-      <p:sp>
-        <p:nvSpPr>
-          <p:cNvPr id="3" name="Shape 1"/>
-          <p:cNvSpPr/>
-          <p:nvPr/>
-        </p:nvSpPr>
-        <p:spPr>
-          <a:xfrm>
-            <a:off x="365760" y="749808"/>
-            <a:ext cx="8412480" cy="0"/>
-          </a:xfrm>
-          <a:prstGeom prst="line">
-            <a:avLst/>
-          </a:prstGeom>
-          <a:noFill/>
-          <a:ln w="19050">
-            <a:solidFill>
-              <a:srgbClr val="8B6FC0"/>
-            </a:solidFill>
-            <a:prstDash val="solid"/>
-          </a:ln>
-        </p:spPr>
+          <p:cNvPr id="2" name="Shape 0"/>
+          <p:cNvSpPr/>
+          <p:nvPr/>
+        </p:nvSpPr>
+        <p:spPr>
+          <a:xfrm>
+            <a:off x="0" y="0"/>
+            <a:ext cx="9144000" cy="566928"/>
+          </a:xfrm>
+          <a:prstGeom prst="rect">
+            <a:avLst/>
+          </a:prstGeom>
+          <a:solidFill>
+            <a:srgbClr val="4A90D9"/>
+          </a:solidFill>
+          <a:ln/>
+        </p:spPr>
+      </p:sp>
+      <p:sp>
+        <p:nvSpPr>
+          <p:cNvPr id="3" name="Text 1"/>
+          <p:cNvSpPr/>
+          <p:nvPr/>
+        </p:nvSpPr>
+        <p:spPr>
+          <a:xfrm>
+            <a:off x="365760" y="54864"/>
+            <a:ext cx="8412480" cy="457200"/>
+          </a:xfrm>
+          <a:prstGeom prst="rect">
+            <a:avLst/>
+          </a:prstGeom>
+          <a:noFill/>
+          <a:ln/>
+        </p:spPr>
+        <p:txBody>
+          <a:bodyPr wrap="square" lIns="0" tIns="0" rIns="0" bIns="0" rtlCol="0" anchor="ctr"/>
+          <a:lstStyle/>
+          <a:p>
+            <a:pPr indent="0" marL="0">
+              <a:buNone/>
+            </a:pPr>
+            <a:r>
+              <a:rPr lang="en-US" sz="2200" b="1" dirty="0">
+                <a:solidFill>
+                  <a:srgbClr val="FFFFFF"/>
+                </a:solidFill>
+                <a:latin typeface="Calibri" pitchFamily="34" charset="0"/>
+                <a:ea typeface="Calibri" pitchFamily="34" charset="-122"/>
+                <a:cs typeface="Calibri" pitchFamily="34" charset="-120"/>
+              </a:rPr>
+              <a:t>🌱  Morphology</a:t>
+            </a:r>
+            <a:endParaRPr lang="en-US" sz="2200" dirty="0"/>
+          </a:p>
+        </p:txBody>
       </p:sp>
       <p:sp>
         <p:nvSpPr>
@@ -2162,32 +2287,32 @@
         </p:nvSpPr>
         <p:spPr>
           <a:xfrm>
-            <a:off x="457200" y="1005840"/>
-            <a:ext cx="8046720" cy="292608"/>
-          </a:xfrm>
-          <a:prstGeom prst="rect">
-            <a:avLst/>
-          </a:prstGeom>
-          <a:noFill/>
-          <a:ln/>
-        </p:spPr>
-        <p:txBody>
-          <a:bodyPr wrap="square" lIns="0" tIns="0" rIns="0" bIns="0" rtlCol="0" anchor="ctr"/>
-          <a:lstStyle/>
-          <a:p>
-            <a:pPr indent="0" marL="0">
-              <a:buNone/>
-            </a:pPr>
-            <a:r>
-              <a:rPr lang="en-US" sz="1100" b="1" spc="200" kern="0" dirty="0">
-                <a:solidFill>
-                  <a:srgbClr val="64748B"/>
-                </a:solidFill>
-                <a:latin typeface="Calibri" pitchFamily="34" charset="0"/>
-                <a:ea typeface="Calibri" pitchFamily="34" charset="-122"/>
-                <a:cs typeface="Calibri" pitchFamily="34" charset="-120"/>
-              </a:rPr>
-              <a:t>CONCEPT EXAMPLES</a:t>
+            <a:off x="365760" y="804672"/>
+            <a:ext cx="8229600" cy="237744"/>
+          </a:xfrm>
+          <a:prstGeom prst="rect">
+            <a:avLst/>
+          </a:prstGeom>
+          <a:noFill/>
+          <a:ln/>
+        </p:spPr>
+        <p:txBody>
+          <a:bodyPr wrap="square" lIns="0" tIns="0" rIns="0" bIns="0" rtlCol="0" anchor="ctr"/>
+          <a:lstStyle/>
+          <a:p>
+            <a:pPr indent="0" marL="0">
+              <a:buNone/>
+            </a:pPr>
+            <a:r>
+              <a:rPr lang="en-US" sz="1100" b="1" spc="100" kern="0" dirty="0">
+                <a:solidFill>
+                  <a:srgbClr val="8B6FC0"/>
+                </a:solidFill>
+                <a:latin typeface="Calibri" pitchFamily="34" charset="0"/>
+                <a:ea typeface="Calibri" pitchFamily="34" charset="-122"/>
+                <a:cs typeface="Calibri" pitchFamily="34" charset="-120"/>
+              </a:rPr>
+              <a:t>ROOT/BASE: SCRIPT/SCRIBE MEANS WRITE</a:t>
             </a:r>
             <a:endParaRPr lang="en-US" sz="1100" dirty="0"/>
           </a:p>
@@ -2195,30 +2320,59 @@
       </p:sp>
       <p:sp>
         <p:nvSpPr>
-          <p:cNvPr id="5" name="Text 3"/>
-          <p:cNvSpPr/>
-          <p:nvPr/>
-        </p:nvSpPr>
-        <p:spPr>
-          <a:xfrm>
-            <a:off x="640080" y="1325880"/>
-            <a:ext cx="7863840" cy="320040"/>
-          </a:xfrm>
-          <a:prstGeom prst="rect">
-            <a:avLst/>
-          </a:prstGeom>
-          <a:noFill/>
-          <a:ln/>
-        </p:spPr>
-        <p:txBody>
-          <a:bodyPr wrap="square" lIns="0" tIns="0" rIns="0" bIns="0" rtlCol="0" anchor="ctr"/>
-          <a:lstStyle/>
-          <a:p>
-            <a:pPr indent="0" marL="0">
-              <a:buNone/>
-            </a:pPr>
-            <a:r>
-              <a:rPr lang="en-US" sz="1300" dirty="0">
+          <p:cNvPr id="5" name="Shape 3"/>
+          <p:cNvSpPr/>
+          <p:nvPr/>
+        </p:nvSpPr>
+        <p:spPr>
+          <a:xfrm>
+            <a:off x="365760" y="1097280"/>
+            <a:ext cx="8412480" cy="621792"/>
+          </a:xfrm>
+          <a:prstGeom prst="roundRect">
+            <a:avLst>
+              <a:gd name="adj" fmla="val 14706"/>
+            </a:avLst>
+          </a:prstGeom>
+          <a:solidFill>
+            <a:srgbClr val="F0E8FF"/>
+          </a:solidFill>
+          <a:ln/>
+          <a:effectLst>
+            <a:outerShdw sx="100000" sy="100000" kx="0" ky="0" algn="bl" rotWithShape="0" blurRad="101600" dist="38100" dir="2700000">
+              <a:srgbClr val="000000">
+                <a:alpha val="12000"/>
+              </a:srgbClr>
+            </a:outerShdw>
+          </a:effectLst>
+        </p:spPr>
+      </p:sp>
+      <p:sp>
+        <p:nvSpPr>
+          <p:cNvPr id="6" name="Text 4"/>
+          <p:cNvSpPr/>
+          <p:nvPr/>
+        </p:nvSpPr>
+        <p:spPr>
+          <a:xfrm>
+            <a:off x="594360" y="1216152"/>
+            <a:ext cx="7863840" cy="384048"/>
+          </a:xfrm>
+          <a:prstGeom prst="rect">
+            <a:avLst/>
+          </a:prstGeom>
+          <a:noFill/>
+          <a:ln/>
+        </p:spPr>
+        <p:txBody>
+          <a:bodyPr wrap="square" lIns="0" tIns="0" rIns="0" bIns="0" rtlCol="0" anchor="ctr"/>
+          <a:lstStyle/>
+          <a:p>
+            <a:pPr indent="0" marL="0">
+              <a:buNone/>
+            </a:pPr>
+            <a:r>
+              <a:rPr lang="en-US" sz="1500" dirty="0">
                 <a:solidFill>
                   <a:srgbClr val="1E293B"/>
                 </a:solidFill>
@@ -2226,9 +2380,9 @@
                 <a:ea typeface="Calibri" pitchFamily="34" charset="-122"/>
                 <a:cs typeface="Calibri" pitchFamily="34" charset="-120"/>
               </a:rPr>
-              <a:t>• 📌 Identify: Does this word use script/scribe ?</a:t>
-            </a:r>
-            <a:endParaRPr lang="en-US" sz="1300" dirty="0"/>
+              <a:t>🌱  Root/base: script/scribe means write. Look at each word carefully.</a:t>
+            </a:r>
+            <a:endParaRPr lang="en-US" sz="1500" dirty="0"/>
           </a:p>
         </p:txBody>
       </p:sp>
@@ -2266,84 +2420,120 @@
       </p:grpSpPr>
       <p:sp>
         <p:nvSpPr>
-          <p:cNvPr id="2" name="Text 0"/>
-          <p:cNvSpPr/>
-          <p:nvPr/>
-        </p:nvSpPr>
-        <p:spPr>
-          <a:xfrm>
-            <a:off x="365760" y="164592"/>
-            <a:ext cx="8412480" cy="566928"/>
-          </a:xfrm>
-          <a:prstGeom prst="rect">
-            <a:avLst/>
-          </a:prstGeom>
-          <a:noFill/>
-          <a:ln/>
-        </p:spPr>
-        <p:txBody>
-          <a:bodyPr wrap="square" lIns="0" tIns="0" rIns="0" bIns="0" rtlCol="0" anchor="ctr"/>
-          <a:lstStyle/>
-          <a:p>
-            <a:pPr algn="l" indent="0" marL="0">
-              <a:buNone/>
-            </a:pPr>
-            <a:r>
-              <a:rPr lang="en-US" sz="2800" b="1" dirty="0">
-                <a:solidFill>
-                  <a:srgbClr val="0E1C42"/>
-                </a:solidFill>
-                <a:latin typeface="Calibri" pitchFamily="34" charset="0"/>
-                <a:ea typeface="Calibri" pitchFamily="34" charset="-122"/>
-                <a:cs typeface="Calibri" pitchFamily="34" charset="-120"/>
-              </a:rPr>
-              <a:t>🔤 Vocabulary</a:t>
-            </a:r>
-            <a:endParaRPr lang="en-US" sz="2800" dirty="0"/>
-          </a:p>
-        </p:txBody>
-      </p:sp>
-      <p:sp>
-        <p:nvSpPr>
-          <p:cNvPr id="3" name="Shape 1"/>
-          <p:cNvSpPr/>
-          <p:nvPr/>
-        </p:nvSpPr>
-        <p:spPr>
-          <a:xfrm>
-            <a:off x="365760" y="749808"/>
-            <a:ext cx="8412480" cy="0"/>
-          </a:xfrm>
-          <a:prstGeom prst="line">
-            <a:avLst/>
-          </a:prstGeom>
-          <a:noFill/>
-          <a:ln w="19050">
-            <a:solidFill>
-              <a:srgbClr val="55C8E8"/>
-            </a:solidFill>
-            <a:prstDash val="solid"/>
-          </a:ln>
-        </p:spPr>
-      </p:sp>
-      <p:sp>
-        <p:nvSpPr>
-          <p:cNvPr id="4" name="Shape 2"/>
-          <p:cNvSpPr/>
-          <p:nvPr/>
-        </p:nvSpPr>
-        <p:spPr>
-          <a:xfrm>
-            <a:off x="457200" y="1005840"/>
-            <a:ext cx="3840480" cy="640080"/>
+          <p:cNvPr id="2" name="Shape 0"/>
+          <p:cNvSpPr/>
+          <p:nvPr/>
+        </p:nvSpPr>
+        <p:spPr>
+          <a:xfrm>
+            <a:off x="0" y="0"/>
+            <a:ext cx="9144000" cy="566928"/>
+          </a:xfrm>
+          <a:prstGeom prst="rect">
+            <a:avLst/>
+          </a:prstGeom>
+          <a:solidFill>
+            <a:srgbClr val="55C8E8"/>
+          </a:solidFill>
+          <a:ln/>
+        </p:spPr>
+      </p:sp>
+      <p:sp>
+        <p:nvSpPr>
+          <p:cNvPr id="3" name="Text 1"/>
+          <p:cNvSpPr/>
+          <p:nvPr/>
+        </p:nvSpPr>
+        <p:spPr>
+          <a:xfrm>
+            <a:off x="365760" y="54864"/>
+            <a:ext cx="8412480" cy="457200"/>
+          </a:xfrm>
+          <a:prstGeom prst="rect">
+            <a:avLst/>
+          </a:prstGeom>
+          <a:noFill/>
+          <a:ln/>
+        </p:spPr>
+        <p:txBody>
+          <a:bodyPr wrap="square" lIns="0" tIns="0" rIns="0" bIns="0" rtlCol="0" anchor="ctr"/>
+          <a:lstStyle/>
+          <a:p>
+            <a:pPr indent="0" marL="0">
+              <a:buNone/>
+            </a:pPr>
+            <a:r>
+              <a:rPr lang="en-US" sz="2200" b="1" dirty="0">
+                <a:solidFill>
+                  <a:srgbClr val="FFFFFF"/>
+                </a:solidFill>
+                <a:latin typeface="Calibri" pitchFamily="34" charset="0"/>
+                <a:ea typeface="Calibri" pitchFamily="34" charset="-122"/>
+                <a:cs typeface="Calibri" pitchFamily="34" charset="-120"/>
+              </a:rPr>
+              <a:t>🔤  Vocabulary</a:t>
+            </a:r>
+            <a:endParaRPr lang="en-US" sz="2200" dirty="0"/>
+          </a:p>
+        </p:txBody>
+      </p:sp>
+      <p:sp>
+        <p:nvSpPr>
+          <p:cNvPr id="4" name="Text 2"/>
+          <p:cNvSpPr/>
+          <p:nvPr/>
+        </p:nvSpPr>
+        <p:spPr>
+          <a:xfrm>
+            <a:off x="365760" y="804672"/>
+            <a:ext cx="8229600" cy="237744"/>
+          </a:xfrm>
+          <a:prstGeom prst="rect">
+            <a:avLst/>
+          </a:prstGeom>
+          <a:noFill/>
+          <a:ln/>
+        </p:spPr>
+        <p:txBody>
+          <a:bodyPr wrap="square" lIns="0" tIns="0" rIns="0" bIns="0" rtlCol="0" anchor="ctr"/>
+          <a:lstStyle/>
+          <a:p>
+            <a:pPr indent="0" marL="0">
+              <a:buNone/>
+            </a:pPr>
+            <a:r>
+              <a:rPr lang="en-US" sz="1100" b="1" spc="100" kern="0" dirty="0">
+                <a:solidFill>
+                  <a:srgbClr val="55C8E8"/>
+                </a:solidFill>
+                <a:latin typeface="Calibri" pitchFamily="34" charset="0"/>
+                <a:ea typeface="Calibri" pitchFamily="34" charset="-122"/>
+                <a:cs typeface="Calibri" pitchFamily="34" charset="-120"/>
+              </a:rPr>
+              <a:t>IDENTIFY &amp; MATCH</a:t>
+            </a:r>
+            <a:endParaRPr lang="en-US" sz="1100" dirty="0"/>
+          </a:p>
+        </p:txBody>
+      </p:sp>
+      <p:sp>
+        <p:nvSpPr>
+          <p:cNvPr id="5" name="Shape 3"/>
+          <p:cNvSpPr/>
+          <p:nvPr/>
+        </p:nvSpPr>
+        <p:spPr>
+          <a:xfrm>
+            <a:off x="365760" y="1097280"/>
+            <a:ext cx="8412480" cy="658368"/>
           </a:xfrm>
           <a:prstGeom prst="roundRect">
             <a:avLst>
-              <a:gd name="adj" fmla="val 14286"/>
+              <a:gd name="adj" fmla="val 13889"/>
             </a:avLst>
           </a:prstGeom>
           <a:solidFill>
-            <a:srgbClr val="FEF6E8"/>
+            <a:srgbClr val="E5F7FC"/>
           </a:solidFill>
           <a:ln/>
           <a:effectLst>
@@ -2357,30 +2547,30 @@
       </p:sp>
       <p:sp>
         <p:nvSpPr>
-          <p:cNvPr id="5" name="Text 3"/>
-          <p:cNvSpPr/>
-          <p:nvPr/>
-        </p:nvSpPr>
-        <p:spPr>
-          <a:xfrm>
-            <a:off x="594360" y="1060704"/>
-            <a:ext cx="3566160" cy="530352"/>
-          </a:xfrm>
-          <a:prstGeom prst="rect">
-            <a:avLst/>
-          </a:prstGeom>
-          <a:noFill/>
-          <a:ln/>
-        </p:spPr>
-        <p:txBody>
-          <a:bodyPr wrap="square" lIns="0" tIns="0" rIns="0" bIns="0" rtlCol="0" anchor="ctr"/>
-          <a:lstStyle/>
-          <a:p>
-            <a:pPr indent="0" marL="0">
-              <a:buNone/>
-            </a:pPr>
-            <a:r>
-              <a:rPr lang="en-US" sz="1500" b="1" dirty="0">
+          <p:cNvPr id="6" name="Text 4"/>
+          <p:cNvSpPr/>
+          <p:nvPr/>
+        </p:nvSpPr>
+        <p:spPr>
+          <a:xfrm>
+            <a:off x="594360" y="1225296"/>
+            <a:ext cx="7863840" cy="420624"/>
+          </a:xfrm>
+          <a:prstGeom prst="rect">
+            <a:avLst/>
+          </a:prstGeom>
+          <a:noFill/>
+          <a:ln/>
+        </p:spPr>
+        <p:txBody>
+          <a:bodyPr wrap="square" lIns="0" tIns="0" rIns="0" bIns="0" rtlCol="0" anchor="ctr"/>
+          <a:lstStyle/>
+          <a:p>
+            <a:pPr indent="0" marL="0">
+              <a:buNone/>
+            </a:pPr>
+            <a:r>
+              <a:rPr lang="en-US" sz="1700" b="1" dirty="0">
                 <a:solidFill>
                   <a:srgbClr val="0E1C42"/>
                 </a:solidFill>
@@ -2388,19 +2578,13 @@
                 <a:ea typeface="Calibri" pitchFamily="34" charset="-122"/>
                 <a:cs typeface="Calibri" pitchFamily="34" charset="-120"/>
               </a:rPr>
-              <a:t>renewed</a:t>
-            </a:r>
-            <a:pPr indent="0" marL="0">
-              <a:buNone/>
-            </a:pPr>
-            <a:endParaRPr lang="en-US" sz="1500" dirty="0"/>
-          </a:p>
-          <a:p>
-            <a:pPr indent="0" marL="0">
-              <a:buNone/>
-            </a:pPr>
-            <a:r>
-              <a:rPr lang="en-US" sz="1200" dirty="0">
+              <a:t>renewed  </a:t>
+            </a:r>
+            <a:pPr indent="0" marL="0">
+              <a:buNone/>
+            </a:pPr>
+            <a:r>
+              <a:rPr lang="en-US" sz="1400" dirty="0">
                 <a:solidFill>
                   <a:srgbClr val="1E293B"/>
                 </a:solidFill>
@@ -2410,28 +2594,28 @@
               </a:rPr>
               <a:t>Made new again; restored to a fresh state.</a:t>
             </a:r>
-            <a:endParaRPr lang="en-US" sz="1500" dirty="0"/>
-          </a:p>
-        </p:txBody>
-      </p:sp>
-      <p:sp>
-        <p:nvSpPr>
-          <p:cNvPr id="6" name="Shape 4"/>
-          <p:cNvSpPr/>
-          <p:nvPr/>
-        </p:nvSpPr>
-        <p:spPr>
-          <a:xfrm>
-            <a:off x="4572000" y="1005840"/>
-            <a:ext cx="3840480" cy="640080"/>
+            <a:endParaRPr lang="en-US" sz="1700" dirty="0"/>
+          </a:p>
+        </p:txBody>
+      </p:sp>
+      <p:sp>
+        <p:nvSpPr>
+          <p:cNvPr id="7" name="Shape 5"/>
+          <p:cNvSpPr/>
+          <p:nvPr/>
+        </p:nvSpPr>
+        <p:spPr>
+          <a:xfrm>
+            <a:off x="365760" y="1828800"/>
+            <a:ext cx="8412480" cy="658368"/>
           </a:xfrm>
           <a:prstGeom prst="roundRect">
             <a:avLst>
-              <a:gd name="adj" fmla="val 14286"/>
+              <a:gd name="adj" fmla="val 13889"/>
             </a:avLst>
           </a:prstGeom>
           <a:solidFill>
-            <a:srgbClr val="FEF6E8"/>
+            <a:srgbClr val="FFFFFF"/>
           </a:solidFill>
           <a:ln/>
           <a:effectLst>
@@ -2445,30 +2629,30 @@
       </p:sp>
       <p:sp>
         <p:nvSpPr>
-          <p:cNvPr id="7" name="Text 5"/>
-          <p:cNvSpPr/>
-          <p:nvPr/>
-        </p:nvSpPr>
-        <p:spPr>
-          <a:xfrm>
-            <a:off x="4709160" y="1060704"/>
-            <a:ext cx="3566160" cy="530352"/>
-          </a:xfrm>
-          <a:prstGeom prst="rect">
-            <a:avLst/>
-          </a:prstGeom>
-          <a:noFill/>
-          <a:ln/>
-        </p:spPr>
-        <p:txBody>
-          <a:bodyPr wrap="square" lIns="0" tIns="0" rIns="0" bIns="0" rtlCol="0" anchor="ctr"/>
-          <a:lstStyle/>
-          <a:p>
-            <a:pPr indent="0" marL="0">
-              <a:buNone/>
-            </a:pPr>
-            <a:r>
-              <a:rPr lang="en-US" sz="1500" b="1" dirty="0">
+          <p:cNvPr id="8" name="Text 6"/>
+          <p:cNvSpPr/>
+          <p:nvPr/>
+        </p:nvSpPr>
+        <p:spPr>
+          <a:xfrm>
+            <a:off x="594360" y="1956816"/>
+            <a:ext cx="7863840" cy="420624"/>
+          </a:xfrm>
+          <a:prstGeom prst="rect">
+            <a:avLst/>
+          </a:prstGeom>
+          <a:noFill/>
+          <a:ln/>
+        </p:spPr>
+        <p:txBody>
+          <a:bodyPr wrap="square" lIns="0" tIns="0" rIns="0" bIns="0" rtlCol="0" anchor="ctr"/>
+          <a:lstStyle/>
+          <a:p>
+            <a:pPr indent="0" marL="0">
+              <a:buNone/>
+            </a:pPr>
+            <a:r>
+              <a:rPr lang="en-US" sz="1700" b="1" dirty="0">
                 <a:solidFill>
                   <a:srgbClr val="0E1C42"/>
                 </a:solidFill>
@@ -2476,19 +2660,13 @@
                 <a:ea typeface="Calibri" pitchFamily="34" charset="-122"/>
                 <a:cs typeface="Calibri" pitchFamily="34" charset="-120"/>
               </a:rPr>
-              <a:t>herald</a:t>
-            </a:r>
-            <a:pPr indent="0" marL="0">
-              <a:buNone/>
-            </a:pPr>
-            <a:endParaRPr lang="en-US" sz="1500" dirty="0"/>
-          </a:p>
-          <a:p>
-            <a:pPr indent="0" marL="0">
-              <a:buNone/>
-            </a:pPr>
-            <a:r>
-              <a:rPr lang="en-US" sz="1200" dirty="0">
+              <a:t>herald  </a:t>
+            </a:r>
+            <a:pPr indent="0" marL="0">
+              <a:buNone/>
+            </a:pPr>
+            <a:r>
+              <a:rPr lang="en-US" sz="1400" dirty="0">
                 <a:solidFill>
                   <a:srgbClr val="1E293B"/>
                 </a:solidFill>
@@ -2498,28 +2676,28 @@
               </a:rPr>
               <a:t>A person or thing that announces something important is coming.</a:t>
             </a:r>
-            <a:endParaRPr lang="en-US" sz="1500" dirty="0"/>
-          </a:p>
-        </p:txBody>
-      </p:sp>
-      <p:sp>
-        <p:nvSpPr>
-          <p:cNvPr id="8" name="Shape 6"/>
-          <p:cNvSpPr/>
-          <p:nvPr/>
-        </p:nvSpPr>
-        <p:spPr>
-          <a:xfrm>
-            <a:off x="457200" y="1755648"/>
-            <a:ext cx="3840480" cy="640080"/>
+            <a:endParaRPr lang="en-US" sz="1700" dirty="0"/>
+          </a:p>
+        </p:txBody>
+      </p:sp>
+      <p:sp>
+        <p:nvSpPr>
+          <p:cNvPr id="9" name="Shape 7"/>
+          <p:cNvSpPr/>
+          <p:nvPr/>
+        </p:nvSpPr>
+        <p:spPr>
+          <a:xfrm>
+            <a:off x="365760" y="2560320"/>
+            <a:ext cx="8412480" cy="658368"/>
           </a:xfrm>
           <a:prstGeom prst="roundRect">
             <a:avLst>
-              <a:gd name="adj" fmla="val 14286"/>
+              <a:gd name="adj" fmla="val 13889"/>
             </a:avLst>
           </a:prstGeom>
           <a:solidFill>
-            <a:srgbClr val="FEF6E8"/>
+            <a:srgbClr val="E5F7FC"/>
           </a:solidFill>
           <a:ln/>
           <a:effectLst>
@@ -2533,30 +2711,30 @@
       </p:sp>
       <p:sp>
         <p:nvSpPr>
-          <p:cNvPr id="9" name="Text 7"/>
-          <p:cNvSpPr/>
-          <p:nvPr/>
-        </p:nvSpPr>
-        <p:spPr>
-          <a:xfrm>
-            <a:off x="594360" y="1810512"/>
-            <a:ext cx="3566160" cy="530352"/>
-          </a:xfrm>
-          <a:prstGeom prst="rect">
-            <a:avLst/>
-          </a:prstGeom>
-          <a:noFill/>
-          <a:ln/>
-        </p:spPr>
-        <p:txBody>
-          <a:bodyPr wrap="square" lIns="0" tIns="0" rIns="0" bIns="0" rtlCol="0" anchor="ctr"/>
-          <a:lstStyle/>
-          <a:p>
-            <a:pPr indent="0" marL="0">
-              <a:buNone/>
-            </a:pPr>
-            <a:r>
-              <a:rPr lang="en-US" sz="1500" b="1" dirty="0">
+          <p:cNvPr id="10" name="Text 8"/>
+          <p:cNvSpPr/>
+          <p:nvPr/>
+        </p:nvSpPr>
+        <p:spPr>
+          <a:xfrm>
+            <a:off x="594360" y="2688336"/>
+            <a:ext cx="7863840" cy="420624"/>
+          </a:xfrm>
+          <a:prstGeom prst="rect">
+            <a:avLst/>
+          </a:prstGeom>
+          <a:noFill/>
+          <a:ln/>
+        </p:spPr>
+        <p:txBody>
+          <a:bodyPr wrap="square" lIns="0" tIns="0" rIns="0" bIns="0" rtlCol="0" anchor="ctr"/>
+          <a:lstStyle/>
+          <a:p>
+            <a:pPr indent="0" marL="0">
+              <a:buNone/>
+            </a:pPr>
+            <a:r>
+              <a:rPr lang="en-US" sz="1700" b="1" dirty="0">
                 <a:solidFill>
                   <a:srgbClr val="0E1C42"/>
                 </a:solidFill>
@@ -2564,19 +2742,13 @@
                 <a:ea typeface="Calibri" pitchFamily="34" charset="-122"/>
                 <a:cs typeface="Calibri" pitchFamily="34" charset="-120"/>
               </a:rPr>
-              <a:t>solemn</a:t>
-            </a:r>
-            <a:pPr indent="0" marL="0">
-              <a:buNone/>
-            </a:pPr>
-            <a:endParaRPr lang="en-US" sz="1500" dirty="0"/>
-          </a:p>
-          <a:p>
-            <a:pPr indent="0" marL="0">
-              <a:buNone/>
-            </a:pPr>
-            <a:r>
-              <a:rPr lang="en-US" sz="1200" dirty="0">
+              <a:t>solemn  </a:t>
+            </a:r>
+            <a:pPr indent="0" marL="0">
+              <a:buNone/>
+            </a:pPr>
+            <a:r>
+              <a:rPr lang="en-US" sz="1400" dirty="0">
                 <a:solidFill>
                   <a:srgbClr val="1E293B"/>
                 </a:solidFill>
@@ -2586,28 +2758,28 @@
               </a:rPr>
               <a:t>Serious, formal, and sincere.</a:t>
             </a:r>
-            <a:endParaRPr lang="en-US" sz="1500" dirty="0"/>
-          </a:p>
-        </p:txBody>
-      </p:sp>
-      <p:sp>
-        <p:nvSpPr>
-          <p:cNvPr id="10" name="Shape 8"/>
-          <p:cNvSpPr/>
-          <p:nvPr/>
-        </p:nvSpPr>
-        <p:spPr>
-          <a:xfrm>
-            <a:off x="4572000" y="1755648"/>
-            <a:ext cx="3840480" cy="640080"/>
+            <a:endParaRPr lang="en-US" sz="1700" dirty="0"/>
+          </a:p>
+        </p:txBody>
+      </p:sp>
+      <p:sp>
+        <p:nvSpPr>
+          <p:cNvPr id="11" name="Shape 9"/>
+          <p:cNvSpPr/>
+          <p:nvPr/>
+        </p:nvSpPr>
+        <p:spPr>
+          <a:xfrm>
+            <a:off x="365760" y="3291840"/>
+            <a:ext cx="8412480" cy="658368"/>
           </a:xfrm>
           <a:prstGeom prst="roundRect">
             <a:avLst>
-              <a:gd name="adj" fmla="val 14286"/>
+              <a:gd name="adj" fmla="val 13889"/>
             </a:avLst>
           </a:prstGeom>
           <a:solidFill>
-            <a:srgbClr val="FEF6E8"/>
+            <a:srgbClr val="FFFFFF"/>
           </a:solidFill>
           <a:ln/>
           <a:effectLst>
@@ -2621,30 +2793,30 @@
       </p:sp>
       <p:sp>
         <p:nvSpPr>
-          <p:cNvPr id="11" name="Text 9"/>
-          <p:cNvSpPr/>
-          <p:nvPr/>
-        </p:nvSpPr>
-        <p:spPr>
-          <a:xfrm>
-            <a:off x="4709160" y="1810512"/>
-            <a:ext cx="3566160" cy="530352"/>
-          </a:xfrm>
-          <a:prstGeom prst="rect">
-            <a:avLst/>
-          </a:prstGeom>
-          <a:noFill/>
-          <a:ln/>
-        </p:spPr>
-        <p:txBody>
-          <a:bodyPr wrap="square" lIns="0" tIns="0" rIns="0" bIns="0" rtlCol="0" anchor="ctr"/>
-          <a:lstStyle/>
-          <a:p>
-            <a:pPr indent="0" marL="0">
-              <a:buNone/>
-            </a:pPr>
-            <a:r>
-              <a:rPr lang="en-US" sz="1500" b="1" dirty="0">
+          <p:cNvPr id="12" name="Text 10"/>
+          <p:cNvSpPr/>
+          <p:nvPr/>
+        </p:nvSpPr>
+        <p:spPr>
+          <a:xfrm>
+            <a:off x="594360" y="3419856"/>
+            <a:ext cx="7863840" cy="420624"/>
+          </a:xfrm>
+          <a:prstGeom prst="rect">
+            <a:avLst/>
+          </a:prstGeom>
+          <a:noFill/>
+          <a:ln/>
+        </p:spPr>
+        <p:txBody>
+          <a:bodyPr wrap="square" lIns="0" tIns="0" rIns="0" bIns="0" rtlCol="0" anchor="ctr"/>
+          <a:lstStyle/>
+          <a:p>
+            <a:pPr indent="0" marL="0">
+              <a:buNone/>
+            </a:pPr>
+            <a:r>
+              <a:rPr lang="en-US" sz="1700" b="1" dirty="0">
                 <a:solidFill>
                   <a:srgbClr val="0E1C42"/>
                 </a:solidFill>
@@ -2652,19 +2824,13 @@
                 <a:ea typeface="Calibri" pitchFamily="34" charset="-122"/>
                 <a:cs typeface="Calibri" pitchFamily="34" charset="-120"/>
               </a:rPr>
-              <a:t>jovial</a:t>
-            </a:r>
-            <a:pPr indent="0" marL="0">
-              <a:buNone/>
-            </a:pPr>
-            <a:endParaRPr lang="en-US" sz="1500" dirty="0"/>
-          </a:p>
-          <a:p>
-            <a:pPr indent="0" marL="0">
-              <a:buNone/>
-            </a:pPr>
-            <a:r>
-              <a:rPr lang="en-US" sz="1200" dirty="0">
+              <a:t>jovial  </a:t>
+            </a:r>
+            <a:pPr indent="0" marL="0">
+              <a:buNone/>
+            </a:pPr>
+            <a:r>
+              <a:rPr lang="en-US" sz="1400" dirty="0">
                 <a:solidFill>
                   <a:srgbClr val="1E293B"/>
                 </a:solidFill>
@@ -2674,7 +2840,7 @@
               </a:rPr>
               <a:t>Cheerful and friendly; in high spirits.</a:t>
             </a:r>
-            <a:endParaRPr lang="en-US" sz="1500" dirty="0"/>
+            <a:endParaRPr lang="en-US" sz="1700" dirty="0"/>
           </a:p>
         </p:txBody>
       </p:sp>
@@ -2689,6 +2855,888 @@
 <file path=ppt/slides/slide12.xml><?xml version="1.0" encoding="utf-8"?>
 <p:sld xmlns:a="http://schemas.openxmlformats.org/drawingml/2006/main" xmlns:r="http://schemas.openxmlformats.org/officeDocument/2006/relationships" xmlns:p="http://schemas.openxmlformats.org/presentationml/2006/main">
   <p:cSld name="Slide 12">
+    <p:bg>
+      <p:bgPr>
+        <a:solidFill>
+          <a:srgbClr val="F8FAFC"/>
+        </a:solidFill>
+      </p:bgPr>
+    </p:bg>
+    <p:spTree>
+      <p:nvGrpSpPr>
+        <p:cNvPr id="1" name=""/>
+        <p:cNvGrpSpPr/>
+        <p:nvPr/>
+      </p:nvGrpSpPr>
+      <p:grpSpPr>
+        <a:xfrm>
+          <a:off x="0" y="0"/>
+          <a:ext cx="0" cy="0"/>
+          <a:chOff x="0" y="0"/>
+          <a:chExt cx="0" cy="0"/>
+        </a:xfrm>
+      </p:grpSpPr>
+      <p:sp>
+        <p:nvSpPr>
+          <p:cNvPr id="2" name="Shape 0"/>
+          <p:cNvSpPr/>
+          <p:nvPr/>
+        </p:nvSpPr>
+        <p:spPr>
+          <a:xfrm>
+            <a:off x="0" y="0"/>
+            <a:ext cx="9144000" cy="566928"/>
+          </a:xfrm>
+          <a:prstGeom prst="rect">
+            <a:avLst/>
+          </a:prstGeom>
+          <a:solidFill>
+            <a:srgbClr val="C7922C"/>
+          </a:solidFill>
+          <a:ln/>
+        </p:spPr>
+      </p:sp>
+      <p:sp>
+        <p:nvSpPr>
+          <p:cNvPr id="3" name="Text 1"/>
+          <p:cNvSpPr/>
+          <p:nvPr/>
+        </p:nvSpPr>
+        <p:spPr>
+          <a:xfrm>
+            <a:off x="365760" y="54864"/>
+            <a:ext cx="8412480" cy="457200"/>
+          </a:xfrm>
+          <a:prstGeom prst="rect">
+            <a:avLst/>
+          </a:prstGeom>
+          <a:noFill/>
+          <a:ln/>
+        </p:spPr>
+        <p:txBody>
+          <a:bodyPr wrap="square" lIns="0" tIns="0" rIns="0" bIns="0" rtlCol="0" anchor="ctr"/>
+          <a:lstStyle/>
+          <a:p>
+            <a:pPr indent="0" marL="0">
+              <a:buNone/>
+            </a:pPr>
+            <a:r>
+              <a:rPr lang="en-US" sz="2200" b="1" dirty="0">
+                <a:solidFill>
+                  <a:srgbClr val="FFFFFF"/>
+                </a:solidFill>
+                <a:latin typeface="Calibri" pitchFamily="34" charset="0"/>
+                <a:ea typeface="Calibri" pitchFamily="34" charset="-122"/>
+                <a:cs typeface="Calibri" pitchFamily="34" charset="-120"/>
+              </a:rPr>
+              <a:t>✏️  Grammar</a:t>
+            </a:r>
+            <a:endParaRPr lang="en-US" sz="2200" dirty="0"/>
+          </a:p>
+        </p:txBody>
+      </p:sp>
+      <p:sp>
+        <p:nvSpPr>
+          <p:cNvPr id="4" name="Text 2"/>
+          <p:cNvSpPr/>
+          <p:nvPr/>
+        </p:nvSpPr>
+        <p:spPr>
+          <a:xfrm>
+            <a:off x="365760" y="777240"/>
+            <a:ext cx="8229600" cy="237744"/>
+          </a:xfrm>
+          <a:prstGeom prst="rect">
+            <a:avLst/>
+          </a:prstGeom>
+          <a:noFill/>
+          <a:ln/>
+        </p:spPr>
+        <p:txBody>
+          <a:bodyPr wrap="square" lIns="0" tIns="0" rIns="0" bIns="0" rtlCol="0" anchor="ctr"/>
+          <a:lstStyle/>
+          <a:p>
+            <a:pPr indent="0" marL="0">
+              <a:buNone/>
+            </a:pPr>
+            <a:r>
+              <a:rPr lang="en-US" sz="1100" b="1" spc="100" kern="0" dirty="0">
+                <a:solidFill>
+                  <a:srgbClr val="C7922C"/>
+                </a:solidFill>
+                <a:latin typeface="Calibri" pitchFamily="34" charset="0"/>
+                <a:ea typeface="Calibri" pitchFamily="34" charset="-122"/>
+                <a:cs typeface="Calibri" pitchFamily="34" charset="-120"/>
+              </a:rPr>
+              <a:t>APOSTROPHES IN CONTRACTIONS AND POSSESSIVES</a:t>
+            </a:r>
+            <a:endParaRPr lang="en-US" sz="1100" dirty="0"/>
+          </a:p>
+        </p:txBody>
+      </p:sp>
+      <p:sp>
+        <p:nvSpPr>
+          <p:cNvPr id="5" name="Shape 3"/>
+          <p:cNvSpPr/>
+          <p:nvPr/>
+        </p:nvSpPr>
+        <p:spPr>
+          <a:xfrm>
+            <a:off x="365760" y="1078992"/>
+            <a:ext cx="8412480" cy="658368"/>
+          </a:xfrm>
+          <a:prstGeom prst="roundRect">
+            <a:avLst>
+              <a:gd name="adj" fmla="val 13889"/>
+            </a:avLst>
+          </a:prstGeom>
+          <a:solidFill>
+            <a:srgbClr val="FEF6E8"/>
+          </a:solidFill>
+          <a:ln/>
+          <a:effectLst>
+            <a:outerShdw sx="100000" sy="100000" kx="0" ky="0" algn="bl" rotWithShape="0" blurRad="101600" dist="38100" dir="2700000">
+              <a:srgbClr val="000000">
+                <a:alpha val="12000"/>
+              </a:srgbClr>
+            </a:outerShdw>
+          </a:effectLst>
+        </p:spPr>
+      </p:sp>
+      <p:sp>
+        <p:nvSpPr>
+          <p:cNvPr id="6" name="Text 4"/>
+          <p:cNvSpPr/>
+          <p:nvPr/>
+        </p:nvSpPr>
+        <p:spPr>
+          <a:xfrm>
+            <a:off x="594360" y="1225296"/>
+            <a:ext cx="7863840" cy="402336"/>
+          </a:xfrm>
+          <a:prstGeom prst="rect">
+            <a:avLst/>
+          </a:prstGeom>
+          <a:noFill/>
+          <a:ln/>
+        </p:spPr>
+        <p:txBody>
+          <a:bodyPr wrap="square" lIns="0" tIns="0" rIns="0" bIns="0" rtlCol="0" anchor="ctr"/>
+          <a:lstStyle/>
+          <a:p>
+            <a:pPr indent="0" marL="0">
+              <a:buNone/>
+            </a:pPr>
+            <a:r>
+              <a:rPr lang="en-US" sz="1600" dirty="0">
+                <a:solidFill>
+                  <a:srgbClr val="1E293B"/>
+                </a:solidFill>
+                <a:latin typeface="Calibri" pitchFamily="34" charset="0"/>
+                <a:ea typeface="Calibri" pitchFamily="34" charset="-122"/>
+                <a:cs typeface="Calibri" pitchFamily="34" charset="-120"/>
+              </a:rPr>
+              <a:t>It's going to be a long march to Aslan's camp.</a:t>
+            </a:r>
+            <a:endParaRPr lang="en-US" sz="1600" dirty="0"/>
+          </a:p>
+        </p:txBody>
+      </p:sp>
+      <p:sp>
+        <p:nvSpPr>
+          <p:cNvPr id="7" name="Shape 5"/>
+          <p:cNvSpPr/>
+          <p:nvPr/>
+        </p:nvSpPr>
+        <p:spPr>
+          <a:xfrm>
+            <a:off x="365760" y="1810512"/>
+            <a:ext cx="8412480" cy="658368"/>
+          </a:xfrm>
+          <a:prstGeom prst="roundRect">
+            <a:avLst>
+              <a:gd name="adj" fmla="val 13889"/>
+            </a:avLst>
+          </a:prstGeom>
+          <a:solidFill>
+            <a:srgbClr val="FFFFFF"/>
+          </a:solidFill>
+          <a:ln/>
+          <a:effectLst>
+            <a:outerShdw sx="100000" sy="100000" kx="0" ky="0" algn="bl" rotWithShape="0" blurRad="101600" dist="38100" dir="2700000">
+              <a:srgbClr val="000000">
+                <a:alpha val="12000"/>
+              </a:srgbClr>
+            </a:outerShdw>
+          </a:effectLst>
+        </p:spPr>
+      </p:sp>
+      <p:sp>
+        <p:nvSpPr>
+          <p:cNvPr id="8" name="Text 6"/>
+          <p:cNvSpPr/>
+          <p:nvPr/>
+        </p:nvSpPr>
+        <p:spPr>
+          <a:xfrm>
+            <a:off x="594360" y="1956816"/>
+            <a:ext cx="7863840" cy="402336"/>
+          </a:xfrm>
+          <a:prstGeom prst="rect">
+            <a:avLst/>
+          </a:prstGeom>
+          <a:noFill/>
+          <a:ln/>
+        </p:spPr>
+        <p:txBody>
+          <a:bodyPr wrap="square" lIns="0" tIns="0" rIns="0" bIns="0" rtlCol="0" anchor="ctr"/>
+          <a:lstStyle/>
+          <a:p>
+            <a:pPr indent="0" marL="0">
+              <a:buNone/>
+            </a:pPr>
+            <a:r>
+              <a:rPr lang="en-US" sz="1600" dirty="0">
+                <a:solidFill>
+                  <a:srgbClr val="1E293B"/>
+                </a:solidFill>
+                <a:latin typeface="Calibri" pitchFamily="34" charset="0"/>
+                <a:ea typeface="Calibri" pitchFamily="34" charset="-122"/>
+                <a:cs typeface="Calibri" pitchFamily="34" charset="-120"/>
+              </a:rPr>
+              <a:t>The Witch's face didn't show any fear.</a:t>
+            </a:r>
+            <a:endParaRPr lang="en-US" sz="1600" dirty="0"/>
+          </a:p>
+        </p:txBody>
+      </p:sp>
+      <p:sp>
+        <p:nvSpPr>
+          <p:cNvPr id="9" name="Shape 7"/>
+          <p:cNvSpPr/>
+          <p:nvPr/>
+        </p:nvSpPr>
+        <p:spPr>
+          <a:xfrm>
+            <a:off x="365760" y="2542032"/>
+            <a:ext cx="8412480" cy="658368"/>
+          </a:xfrm>
+          <a:prstGeom prst="roundRect">
+            <a:avLst>
+              <a:gd name="adj" fmla="val 13889"/>
+            </a:avLst>
+          </a:prstGeom>
+          <a:solidFill>
+            <a:srgbClr val="FEF6E8"/>
+          </a:solidFill>
+          <a:ln/>
+          <a:effectLst>
+            <a:outerShdw sx="100000" sy="100000" kx="0" ky="0" algn="bl" rotWithShape="0" blurRad="101600" dist="38100" dir="2700000">
+              <a:srgbClr val="000000">
+                <a:alpha val="12000"/>
+              </a:srgbClr>
+            </a:outerShdw>
+          </a:effectLst>
+        </p:spPr>
+      </p:sp>
+      <p:sp>
+        <p:nvSpPr>
+          <p:cNvPr id="10" name="Text 8"/>
+          <p:cNvSpPr/>
+          <p:nvPr/>
+        </p:nvSpPr>
+        <p:spPr>
+          <a:xfrm>
+            <a:off x="594360" y="2688336"/>
+            <a:ext cx="7863840" cy="402336"/>
+          </a:xfrm>
+          <a:prstGeom prst="rect">
+            <a:avLst/>
+          </a:prstGeom>
+          <a:noFill/>
+          <a:ln/>
+        </p:spPr>
+        <p:txBody>
+          <a:bodyPr wrap="square" lIns="0" tIns="0" rIns="0" bIns="0" rtlCol="0" anchor="ctr"/>
+          <a:lstStyle/>
+          <a:p>
+            <a:pPr indent="0" marL="0">
+              <a:buNone/>
+            </a:pPr>
+            <a:r>
+              <a:rPr lang="en-US" sz="1600" dirty="0">
+                <a:solidFill>
+                  <a:srgbClr val="1E293B"/>
+                </a:solidFill>
+                <a:latin typeface="Calibri" pitchFamily="34" charset="0"/>
+                <a:ea typeface="Calibri" pitchFamily="34" charset="-122"/>
+                <a:cs typeface="Calibri" pitchFamily="34" charset="-120"/>
+              </a:rPr>
+              <a:t>Edmund couldn't remember the way to the castle.</a:t>
+            </a:r>
+            <a:endParaRPr lang="en-US" sz="1600" dirty="0"/>
+          </a:p>
+        </p:txBody>
+      </p:sp>
+      <p:sp>
+        <p:nvSpPr>
+          <p:cNvPr id="11" name="Shape 9"/>
+          <p:cNvSpPr/>
+          <p:nvPr/>
+        </p:nvSpPr>
+        <p:spPr>
+          <a:xfrm>
+            <a:off x="365760" y="3273552"/>
+            <a:ext cx="8412480" cy="658368"/>
+          </a:xfrm>
+          <a:prstGeom prst="roundRect">
+            <a:avLst>
+              <a:gd name="adj" fmla="val 13889"/>
+            </a:avLst>
+          </a:prstGeom>
+          <a:solidFill>
+            <a:srgbClr val="FFFFFF"/>
+          </a:solidFill>
+          <a:ln/>
+          <a:effectLst>
+            <a:outerShdw sx="100000" sy="100000" kx="0" ky="0" algn="bl" rotWithShape="0" blurRad="101600" dist="38100" dir="2700000">
+              <a:srgbClr val="000000">
+                <a:alpha val="12000"/>
+              </a:srgbClr>
+            </a:outerShdw>
+          </a:effectLst>
+        </p:spPr>
+      </p:sp>
+      <p:sp>
+        <p:nvSpPr>
+          <p:cNvPr id="12" name="Text 10"/>
+          <p:cNvSpPr/>
+          <p:nvPr/>
+        </p:nvSpPr>
+        <p:spPr>
+          <a:xfrm>
+            <a:off x="594360" y="3419856"/>
+            <a:ext cx="7863840" cy="402336"/>
+          </a:xfrm>
+          <a:prstGeom prst="rect">
+            <a:avLst/>
+          </a:prstGeom>
+          <a:noFill/>
+          <a:ln/>
+        </p:spPr>
+        <p:txBody>
+          <a:bodyPr wrap="square" lIns="0" tIns="0" rIns="0" bIns="0" rtlCol="0" anchor="ctr"/>
+          <a:lstStyle/>
+          <a:p>
+            <a:pPr indent="0" marL="0">
+              <a:buNone/>
+            </a:pPr>
+            <a:r>
+              <a:rPr lang="en-US" sz="1600" dirty="0">
+                <a:solidFill>
+                  <a:srgbClr val="1E293B"/>
+                </a:solidFill>
+                <a:latin typeface="Calibri" pitchFamily="34" charset="0"/>
+                <a:ea typeface="Calibri" pitchFamily="34" charset="-122"/>
+                <a:cs typeface="Calibri" pitchFamily="34" charset="-120"/>
+              </a:rPr>
+              <a:t>Father Christmas's gifts were given to each child.</a:t>
+            </a:r>
+            <a:endParaRPr lang="en-US" sz="1600" dirty="0"/>
+          </a:p>
+        </p:txBody>
+      </p:sp>
+      <p:sp>
+        <p:nvSpPr>
+          <p:cNvPr id="13" name="Text 11"/>
+          <p:cNvSpPr/>
+          <p:nvPr/>
+        </p:nvSpPr>
+        <p:spPr>
+          <a:xfrm>
+            <a:off x="365760" y="4050792"/>
+            <a:ext cx="8412480" cy="365760"/>
+          </a:xfrm>
+          <a:prstGeom prst="rect">
+            <a:avLst/>
+          </a:prstGeom>
+          <a:noFill/>
+          <a:ln/>
+        </p:spPr>
+        <p:txBody>
+          <a:bodyPr wrap="square" lIns="0" tIns="0" rIns="0" bIns="0" rtlCol="0" anchor="ctr"/>
+          <a:lstStyle/>
+          <a:p>
+            <a:pPr indent="0" marL="0">
+              <a:buNone/>
+            </a:pPr>
+            <a:r>
+              <a:rPr lang="en-US" sz="1500" i="1" dirty="0">
+                <a:solidFill>
+                  <a:srgbClr val="64748B"/>
+                </a:solidFill>
+                <a:latin typeface="Calibri" pitchFamily="34" charset="0"/>
+                <a:ea typeface="Calibri" pitchFamily="34" charset="-122"/>
+                <a:cs typeface="Calibri" pitchFamily="34" charset="-120"/>
+              </a:rPr>
+              <a:t>Identify the key word or pattern in each sentence. Think: what rule does it follow?</a:t>
+            </a:r>
+            <a:endParaRPr lang="en-US" sz="1500" dirty="0"/>
+          </a:p>
+        </p:txBody>
+      </p:sp>
+    </p:spTree>
+  </p:cSld>
+  <p:clrMapOvr>
+    <a:masterClrMapping/>
+  </p:clrMapOvr>
+</p:sld>
+</file>
+
+<file path=ppt/slides/slide13.xml><?xml version="1.0" encoding="utf-8"?>
+<p:sld xmlns:a="http://schemas.openxmlformats.org/drawingml/2006/main" xmlns:r="http://schemas.openxmlformats.org/officeDocument/2006/relationships" xmlns:p="http://schemas.openxmlformats.org/presentationml/2006/main">
+  <p:cSld name="Slide 13">
+    <p:bg>
+      <p:bgPr>
+        <a:solidFill>
+          <a:srgbClr val="F8FAFC"/>
+        </a:solidFill>
+      </p:bgPr>
+    </p:bg>
+    <p:spTree>
+      <p:nvGrpSpPr>
+        <p:cNvPr id="1" name=""/>
+        <p:cNvGrpSpPr/>
+        <p:nvPr/>
+      </p:nvGrpSpPr>
+      <p:grpSpPr>
+        <a:xfrm>
+          <a:off x="0" y="0"/>
+          <a:ext cx="0" cy="0"/>
+          <a:chOff x="0" y="0"/>
+          <a:chExt cx="0" cy="0"/>
+        </a:xfrm>
+      </p:grpSpPr>
+      <p:sp>
+        <p:nvSpPr>
+          <p:cNvPr id="2" name="Shape 0"/>
+          <p:cNvSpPr/>
+          <p:nvPr/>
+        </p:nvSpPr>
+        <p:spPr>
+          <a:xfrm>
+            <a:off x="0" y="0"/>
+            <a:ext cx="9144000" cy="566928"/>
+          </a:xfrm>
+          <a:prstGeom prst="rect">
+            <a:avLst/>
+          </a:prstGeom>
+          <a:solidFill>
+            <a:srgbClr val="C7922C"/>
+          </a:solidFill>
+          <a:ln/>
+        </p:spPr>
+      </p:sp>
+      <p:sp>
+        <p:nvSpPr>
+          <p:cNvPr id="3" name="Text 1"/>
+          <p:cNvSpPr/>
+          <p:nvPr/>
+        </p:nvSpPr>
+        <p:spPr>
+          <a:xfrm>
+            <a:off x="365760" y="54864"/>
+            <a:ext cx="8412480" cy="457200"/>
+          </a:xfrm>
+          <a:prstGeom prst="rect">
+            <a:avLst/>
+          </a:prstGeom>
+          <a:noFill/>
+          <a:ln/>
+        </p:spPr>
+        <p:txBody>
+          <a:bodyPr wrap="square" lIns="0" tIns="0" rIns="0" bIns="0" rtlCol="0" anchor="ctr"/>
+          <a:lstStyle/>
+          <a:p>
+            <a:pPr indent="0" marL="0">
+              <a:buNone/>
+            </a:pPr>
+            <a:r>
+              <a:rPr lang="en-US" sz="2200" b="1" dirty="0">
+                <a:solidFill>
+                  <a:srgbClr val="FFFFFF"/>
+                </a:solidFill>
+                <a:latin typeface="Calibri" pitchFamily="34" charset="0"/>
+                <a:ea typeface="Calibri" pitchFamily="34" charset="-122"/>
+                <a:cs typeface="Calibri" pitchFamily="34" charset="-120"/>
+              </a:rPr>
+              <a:t>✏️  Grammar</a:t>
+            </a:r>
+            <a:endParaRPr lang="en-US" sz="2200" dirty="0"/>
+          </a:p>
+        </p:txBody>
+      </p:sp>
+      <p:sp>
+        <p:nvSpPr>
+          <p:cNvPr id="4" name="Text 2"/>
+          <p:cNvSpPr/>
+          <p:nvPr/>
+        </p:nvSpPr>
+        <p:spPr>
+          <a:xfrm>
+            <a:off x="365760" y="777240"/>
+            <a:ext cx="8229600" cy="237744"/>
+          </a:xfrm>
+          <a:prstGeom prst="rect">
+            <a:avLst/>
+          </a:prstGeom>
+          <a:noFill/>
+          <a:ln/>
+        </p:spPr>
+        <p:txBody>
+          <a:bodyPr wrap="square" lIns="0" tIns="0" rIns="0" bIns="0" rtlCol="0" anchor="ctr"/>
+          <a:lstStyle/>
+          <a:p>
+            <a:pPr indent="0" marL="0">
+              <a:buNone/>
+            </a:pPr>
+            <a:r>
+              <a:rPr lang="en-US" sz="1100" b="1" spc="100" kern="0" dirty="0">
+                <a:solidFill>
+                  <a:srgbClr val="C7922C"/>
+                </a:solidFill>
+                <a:latin typeface="Calibri" pitchFamily="34" charset="0"/>
+                <a:ea typeface="Calibri" pitchFamily="34" charset="-122"/>
+                <a:cs typeface="Calibri" pitchFamily="34" charset="-120"/>
+              </a:rPr>
+              <a:t>APOSTROPHES IN CONTRACTIONS AND POSSESSIVES</a:t>
+            </a:r>
+            <a:endParaRPr lang="en-US" sz="1100" dirty="0"/>
+          </a:p>
+        </p:txBody>
+      </p:sp>
+      <p:sp>
+        <p:nvSpPr>
+          <p:cNvPr id="5" name="Shape 3"/>
+          <p:cNvSpPr/>
+          <p:nvPr/>
+        </p:nvSpPr>
+        <p:spPr>
+          <a:xfrm>
+            <a:off x="365760" y="1078992"/>
+            <a:ext cx="8412480" cy="658368"/>
+          </a:xfrm>
+          <a:prstGeom prst="roundRect">
+            <a:avLst>
+              <a:gd name="adj" fmla="val 13889"/>
+            </a:avLst>
+          </a:prstGeom>
+          <a:solidFill>
+            <a:srgbClr val="FEF6E8"/>
+          </a:solidFill>
+          <a:ln/>
+          <a:effectLst>
+            <a:outerShdw sx="100000" sy="100000" kx="0" ky="0" algn="bl" rotWithShape="0" blurRad="101600" dist="38100" dir="2700000">
+              <a:srgbClr val="000000">
+                <a:alpha val="12000"/>
+              </a:srgbClr>
+            </a:outerShdw>
+          </a:effectLst>
+        </p:spPr>
+      </p:sp>
+      <p:sp>
+        <p:nvSpPr>
+          <p:cNvPr id="6" name="Text 4"/>
+          <p:cNvSpPr/>
+          <p:nvPr/>
+        </p:nvSpPr>
+        <p:spPr>
+          <a:xfrm>
+            <a:off x="594360" y="1225296"/>
+            <a:ext cx="7863840" cy="402336"/>
+          </a:xfrm>
+          <a:prstGeom prst="rect">
+            <a:avLst/>
+          </a:prstGeom>
+          <a:noFill/>
+          <a:ln/>
+        </p:spPr>
+        <p:txBody>
+          <a:bodyPr wrap="square" lIns="0" tIns="0" rIns="0" bIns="0" rtlCol="0" anchor="ctr"/>
+          <a:lstStyle/>
+          <a:p>
+            <a:pPr indent="0" marL="0">
+              <a:buNone/>
+            </a:pPr>
+            <a:r>
+              <a:rPr lang="en-US" sz="1600" dirty="0">
+                <a:solidFill>
+                  <a:srgbClr val="1E293B"/>
+                </a:solidFill>
+                <a:latin typeface="Calibri" pitchFamily="34" charset="0"/>
+                <a:ea typeface="Calibri" pitchFamily="34" charset="-122"/>
+                <a:cs typeface="Calibri" pitchFamily="34" charset="-120"/>
+              </a:rPr>
+              <a:t>It's going to be a long march to Aslan's camp.</a:t>
+            </a:r>
+            <a:endParaRPr lang="en-US" sz="1600" dirty="0"/>
+          </a:p>
+        </p:txBody>
+      </p:sp>
+      <p:sp>
+        <p:nvSpPr>
+          <p:cNvPr id="7" name="Shape 5"/>
+          <p:cNvSpPr/>
+          <p:nvPr/>
+        </p:nvSpPr>
+        <p:spPr>
+          <a:xfrm>
+            <a:off x="365760" y="1810512"/>
+            <a:ext cx="8412480" cy="658368"/>
+          </a:xfrm>
+          <a:prstGeom prst="roundRect">
+            <a:avLst>
+              <a:gd name="adj" fmla="val 13889"/>
+            </a:avLst>
+          </a:prstGeom>
+          <a:solidFill>
+            <a:srgbClr val="FFFFFF"/>
+          </a:solidFill>
+          <a:ln/>
+          <a:effectLst>
+            <a:outerShdw sx="100000" sy="100000" kx="0" ky="0" algn="bl" rotWithShape="0" blurRad="101600" dist="38100" dir="2700000">
+              <a:srgbClr val="000000">
+                <a:alpha val="12000"/>
+              </a:srgbClr>
+            </a:outerShdw>
+          </a:effectLst>
+        </p:spPr>
+      </p:sp>
+      <p:sp>
+        <p:nvSpPr>
+          <p:cNvPr id="8" name="Text 6"/>
+          <p:cNvSpPr/>
+          <p:nvPr/>
+        </p:nvSpPr>
+        <p:spPr>
+          <a:xfrm>
+            <a:off x="594360" y="1956816"/>
+            <a:ext cx="7863840" cy="402336"/>
+          </a:xfrm>
+          <a:prstGeom prst="rect">
+            <a:avLst/>
+          </a:prstGeom>
+          <a:noFill/>
+          <a:ln/>
+        </p:spPr>
+        <p:txBody>
+          <a:bodyPr wrap="square" lIns="0" tIns="0" rIns="0" bIns="0" rtlCol="0" anchor="ctr"/>
+          <a:lstStyle/>
+          <a:p>
+            <a:pPr indent="0" marL="0">
+              <a:buNone/>
+            </a:pPr>
+            <a:r>
+              <a:rPr lang="en-US" sz="1600" dirty="0">
+                <a:solidFill>
+                  <a:srgbClr val="1E293B"/>
+                </a:solidFill>
+                <a:latin typeface="Calibri" pitchFamily="34" charset="0"/>
+                <a:ea typeface="Calibri" pitchFamily="34" charset="-122"/>
+                <a:cs typeface="Calibri" pitchFamily="34" charset="-120"/>
+              </a:rPr>
+              <a:t>The Witch's face didn't show any fear.</a:t>
+            </a:r>
+            <a:endParaRPr lang="en-US" sz="1600" dirty="0"/>
+          </a:p>
+        </p:txBody>
+      </p:sp>
+      <p:sp>
+        <p:nvSpPr>
+          <p:cNvPr id="9" name="Shape 7"/>
+          <p:cNvSpPr/>
+          <p:nvPr/>
+        </p:nvSpPr>
+        <p:spPr>
+          <a:xfrm>
+            <a:off x="365760" y="2542032"/>
+            <a:ext cx="8412480" cy="658368"/>
+          </a:xfrm>
+          <a:prstGeom prst="roundRect">
+            <a:avLst>
+              <a:gd name="adj" fmla="val 13889"/>
+            </a:avLst>
+          </a:prstGeom>
+          <a:solidFill>
+            <a:srgbClr val="FEF6E8"/>
+          </a:solidFill>
+          <a:ln/>
+          <a:effectLst>
+            <a:outerShdw sx="100000" sy="100000" kx="0" ky="0" algn="bl" rotWithShape="0" blurRad="101600" dist="38100" dir="2700000">
+              <a:srgbClr val="000000">
+                <a:alpha val="12000"/>
+              </a:srgbClr>
+            </a:outerShdw>
+          </a:effectLst>
+        </p:spPr>
+      </p:sp>
+      <p:sp>
+        <p:nvSpPr>
+          <p:cNvPr id="10" name="Text 8"/>
+          <p:cNvSpPr/>
+          <p:nvPr/>
+        </p:nvSpPr>
+        <p:spPr>
+          <a:xfrm>
+            <a:off x="594360" y="2688336"/>
+            <a:ext cx="7863840" cy="402336"/>
+          </a:xfrm>
+          <a:prstGeom prst="rect">
+            <a:avLst/>
+          </a:prstGeom>
+          <a:noFill/>
+          <a:ln/>
+        </p:spPr>
+        <p:txBody>
+          <a:bodyPr wrap="square" lIns="0" tIns="0" rIns="0" bIns="0" rtlCol="0" anchor="ctr"/>
+          <a:lstStyle/>
+          <a:p>
+            <a:pPr indent="0" marL="0">
+              <a:buNone/>
+            </a:pPr>
+            <a:r>
+              <a:rPr lang="en-US" sz="1600" dirty="0">
+                <a:solidFill>
+                  <a:srgbClr val="1E293B"/>
+                </a:solidFill>
+                <a:latin typeface="Calibri" pitchFamily="34" charset="0"/>
+                <a:ea typeface="Calibri" pitchFamily="34" charset="-122"/>
+                <a:cs typeface="Calibri" pitchFamily="34" charset="-120"/>
+              </a:rPr>
+              <a:t>Edmund couldn't remember the way to the castle.</a:t>
+            </a:r>
+            <a:endParaRPr lang="en-US" sz="1600" dirty="0"/>
+          </a:p>
+        </p:txBody>
+      </p:sp>
+      <p:sp>
+        <p:nvSpPr>
+          <p:cNvPr id="11" name="Shape 9"/>
+          <p:cNvSpPr/>
+          <p:nvPr/>
+        </p:nvSpPr>
+        <p:spPr>
+          <a:xfrm>
+            <a:off x="365760" y="3273552"/>
+            <a:ext cx="8412480" cy="658368"/>
+          </a:xfrm>
+          <a:prstGeom prst="roundRect">
+            <a:avLst>
+              <a:gd name="adj" fmla="val 13889"/>
+            </a:avLst>
+          </a:prstGeom>
+          <a:solidFill>
+            <a:srgbClr val="FFFFFF"/>
+          </a:solidFill>
+          <a:ln/>
+          <a:effectLst>
+            <a:outerShdw sx="100000" sy="100000" kx="0" ky="0" algn="bl" rotWithShape="0" blurRad="101600" dist="38100" dir="2700000">
+              <a:srgbClr val="000000">
+                <a:alpha val="12000"/>
+              </a:srgbClr>
+            </a:outerShdw>
+          </a:effectLst>
+        </p:spPr>
+      </p:sp>
+      <p:sp>
+        <p:nvSpPr>
+          <p:cNvPr id="12" name="Text 10"/>
+          <p:cNvSpPr/>
+          <p:nvPr/>
+        </p:nvSpPr>
+        <p:spPr>
+          <a:xfrm>
+            <a:off x="594360" y="3419856"/>
+            <a:ext cx="7863840" cy="402336"/>
+          </a:xfrm>
+          <a:prstGeom prst="rect">
+            <a:avLst/>
+          </a:prstGeom>
+          <a:noFill/>
+          <a:ln/>
+        </p:spPr>
+        <p:txBody>
+          <a:bodyPr wrap="square" lIns="0" tIns="0" rIns="0" bIns="0" rtlCol="0" anchor="ctr"/>
+          <a:lstStyle/>
+          <a:p>
+            <a:pPr indent="0" marL="0">
+              <a:buNone/>
+            </a:pPr>
+            <a:r>
+              <a:rPr lang="en-US" sz="1600" dirty="0">
+                <a:solidFill>
+                  <a:srgbClr val="1E293B"/>
+                </a:solidFill>
+                <a:latin typeface="Calibri" pitchFamily="34" charset="0"/>
+                <a:ea typeface="Calibri" pitchFamily="34" charset="-122"/>
+                <a:cs typeface="Calibri" pitchFamily="34" charset="-120"/>
+              </a:rPr>
+              <a:t>Father Christmas's gifts were given to each child.</a:t>
+            </a:r>
+            <a:endParaRPr lang="en-US" sz="1600" dirty="0"/>
+          </a:p>
+        </p:txBody>
+      </p:sp>
+      <p:sp>
+        <p:nvSpPr>
+          <p:cNvPr id="13" name="Text 11"/>
+          <p:cNvSpPr/>
+          <p:nvPr/>
+        </p:nvSpPr>
+        <p:spPr>
+          <a:xfrm>
+            <a:off x="365760" y="4050792"/>
+            <a:ext cx="8412480" cy="365760"/>
+          </a:xfrm>
+          <a:prstGeom prst="rect">
+            <a:avLst/>
+          </a:prstGeom>
+          <a:noFill/>
+          <a:ln/>
+        </p:spPr>
+        <p:txBody>
+          <a:bodyPr wrap="square" lIns="0" tIns="0" rIns="0" bIns="0" rtlCol="0" anchor="ctr"/>
+          <a:lstStyle/>
+          <a:p>
+            <a:pPr indent="0" marL="0">
+              <a:buNone/>
+            </a:pPr>
+            <a:r>
+              <a:rPr lang="en-US" sz="1500" b="1" dirty="0">
+                <a:solidFill>
+                  <a:srgbClr val="34B76F"/>
+                </a:solidFill>
+                <a:latin typeface="Calibri" pitchFamily="34" charset="0"/>
+                <a:ea typeface="Calibri" pitchFamily="34" charset="-122"/>
+                <a:cs typeface="Calibri" pitchFamily="34" charset="-120"/>
+              </a:rPr>
+              <a:t>✅  Answers revealed</a:t>
+            </a:r>
+            <a:endParaRPr lang="en-US" sz="1500" dirty="0"/>
+          </a:p>
+        </p:txBody>
+      </p:sp>
+    </p:spTree>
+  </p:cSld>
+  <p:clrMapOvr>
+    <a:masterClrMapping/>
+  </p:clrMapOvr>
+</p:sld>
+</file>
+
+<file path=ppt/slides/slide14.xml><?xml version="1.0" encoding="utf-8"?>
+<p:sld xmlns:a="http://schemas.openxmlformats.org/drawingml/2006/main" xmlns:r="http://schemas.openxmlformats.org/officeDocument/2006/relationships" xmlns:p="http://schemas.openxmlformats.org/presentationml/2006/main">
+  <p:cSld name="Slide 14">
     <p:bg>
       <p:bgPr>
         <a:solidFill>
@@ -2712,30 +3760,89 @@
       </p:grpSpPr>
       <p:sp>
         <p:nvSpPr>
-          <p:cNvPr id="2" name="Text 0"/>
-          <p:cNvSpPr/>
-          <p:nvPr/>
-        </p:nvSpPr>
-        <p:spPr>
-          <a:xfrm>
-            <a:off x="365760" y="164592"/>
-            <a:ext cx="8412480" cy="566928"/>
-          </a:xfrm>
-          <a:prstGeom prst="rect">
-            <a:avLst/>
-          </a:prstGeom>
-          <a:noFill/>
-          <a:ln/>
-        </p:spPr>
-        <p:txBody>
-          <a:bodyPr wrap="square" lIns="0" tIns="0" rIns="0" bIns="0" rtlCol="0" anchor="ctr"/>
-          <a:lstStyle/>
-          <a:p>
-            <a:pPr algn="l" indent="0" marL="0">
-              <a:buNone/>
-            </a:pPr>
-            <a:r>
-              <a:rPr lang="en-US" sz="2800" b="1" dirty="0">
+          <p:cNvPr id="2" name="Shape 0"/>
+          <p:cNvSpPr/>
+          <p:nvPr/>
+        </p:nvSpPr>
+        <p:spPr>
+          <a:xfrm>
+            <a:off x="0" y="0"/>
+            <a:ext cx="9144000" cy="566928"/>
+          </a:xfrm>
+          <a:prstGeom prst="rect">
+            <a:avLst/>
+          </a:prstGeom>
+          <a:solidFill>
+            <a:srgbClr val="4A90D9"/>
+          </a:solidFill>
+          <a:ln/>
+        </p:spPr>
+      </p:sp>
+      <p:sp>
+        <p:nvSpPr>
+          <p:cNvPr id="3" name="Text 1"/>
+          <p:cNvSpPr/>
+          <p:nvPr/>
+        </p:nvSpPr>
+        <p:spPr>
+          <a:xfrm>
+            <a:off x="365760" y="54864"/>
+            <a:ext cx="8412480" cy="457200"/>
+          </a:xfrm>
+          <a:prstGeom prst="rect">
+            <a:avLst/>
+          </a:prstGeom>
+          <a:noFill/>
+          <a:ln/>
+        </p:spPr>
+        <p:txBody>
+          <a:bodyPr wrap="square" lIns="0" tIns="0" rIns="0" bIns="0" rtlCol="0" anchor="ctr"/>
+          <a:lstStyle/>
+          <a:p>
+            <a:pPr indent="0" marL="0">
+              <a:buNone/>
+            </a:pPr>
+            <a:r>
+              <a:rPr lang="en-US" sz="2200" b="1" dirty="0">
+                <a:solidFill>
+                  <a:srgbClr val="FFFFFF"/>
+                </a:solidFill>
+                <a:latin typeface="Calibri" pitchFamily="34" charset="0"/>
+                <a:ea typeface="Calibri" pitchFamily="34" charset="-122"/>
+                <a:cs typeface="Calibri" pitchFamily="34" charset="-120"/>
+              </a:rPr>
+              <a:t>📕  Read</a:t>
+            </a:r>
+            <a:endParaRPr lang="en-US" sz="2200" dirty="0"/>
+          </a:p>
+        </p:txBody>
+      </p:sp>
+      <p:sp>
+        <p:nvSpPr>
+          <p:cNvPr id="4" name="Text 2"/>
+          <p:cNvSpPr/>
+          <p:nvPr/>
+        </p:nvSpPr>
+        <p:spPr>
+          <a:xfrm>
+            <a:off x="365760" y="868680"/>
+            <a:ext cx="8412480" cy="502920"/>
+          </a:xfrm>
+          <a:prstGeom prst="rect">
+            <a:avLst/>
+          </a:prstGeom>
+          <a:noFill/>
+          <a:ln/>
+        </p:spPr>
+        <p:txBody>
+          <a:bodyPr wrap="square" lIns="0" tIns="0" rIns="0" bIns="0" rtlCol="0" anchor="ctr"/>
+          <a:lstStyle/>
+          <a:p>
+            <a:pPr indent="0" marL="0">
+              <a:buNone/>
+            </a:pPr>
+            <a:r>
+              <a:rPr lang="en-US" sz="2600" b="1" dirty="0">
                 <a:solidFill>
                   <a:srgbClr val="0E1C42"/>
                 </a:solidFill>
@@ -2745,61 +3852,38 @@
               </a:rPr>
               <a:t>Reading: Ch. 10–12</a:t>
             </a:r>
-            <a:endParaRPr lang="en-US" sz="2800" dirty="0"/>
-          </a:p>
-        </p:txBody>
-      </p:sp>
-      <p:sp>
-        <p:nvSpPr>
-          <p:cNvPr id="3" name="Shape 1"/>
-          <p:cNvSpPr/>
-          <p:nvPr/>
-        </p:nvSpPr>
-        <p:spPr>
-          <a:xfrm>
-            <a:off x="365760" y="749808"/>
-            <a:ext cx="8412480" cy="0"/>
-          </a:xfrm>
-          <a:prstGeom prst="line">
-            <a:avLst/>
-          </a:prstGeom>
-          <a:noFill/>
-          <a:ln w="19050">
-            <a:solidFill>
-              <a:srgbClr val="55C8E8"/>
-            </a:solidFill>
-            <a:prstDash val="solid"/>
-          </a:ln>
-        </p:spPr>
-      </p:sp>
-      <p:sp>
-        <p:nvSpPr>
-          <p:cNvPr id="4" name="Text 2"/>
-          <p:cNvSpPr/>
-          <p:nvPr/>
-        </p:nvSpPr>
-        <p:spPr>
-          <a:xfrm>
-            <a:off x="457200" y="1005840"/>
-            <a:ext cx="8046720" cy="292608"/>
-          </a:xfrm>
-          <a:prstGeom prst="rect">
-            <a:avLst/>
-          </a:prstGeom>
-          <a:noFill/>
-          <a:ln/>
-        </p:spPr>
-        <p:txBody>
-          <a:bodyPr wrap="square" lIns="0" tIns="0" rIns="0" bIns="0" rtlCol="0" anchor="ctr"/>
-          <a:lstStyle/>
-          <a:p>
-            <a:pPr indent="0" marL="0">
-              <a:buNone/>
-            </a:pPr>
-            <a:r>
-              <a:rPr lang="en-US" sz="1100" b="1" spc="200" kern="0" dirty="0">
-                <a:solidFill>
-                  <a:srgbClr val="55C8E8"/>
+            <a:endParaRPr lang="en-US" sz="2600" dirty="0"/>
+          </a:p>
+        </p:txBody>
+      </p:sp>
+      <p:sp>
+        <p:nvSpPr>
+          <p:cNvPr id="5" name="Text 3"/>
+          <p:cNvSpPr/>
+          <p:nvPr/>
+        </p:nvSpPr>
+        <p:spPr>
+          <a:xfrm>
+            <a:off x="365760" y="1463040"/>
+            <a:ext cx="8229600" cy="237744"/>
+          </a:xfrm>
+          <a:prstGeom prst="rect">
+            <a:avLst/>
+          </a:prstGeom>
+          <a:noFill/>
+          <a:ln/>
+        </p:spPr>
+        <p:txBody>
+          <a:bodyPr wrap="square" lIns="0" tIns="0" rIns="0" bIns="0" rtlCol="0" anchor="ctr"/>
+          <a:lstStyle/>
+          <a:p>
+            <a:pPr indent="0" marL="0">
+              <a:buNone/>
+            </a:pPr>
+            <a:r>
+              <a:rPr lang="en-US" sz="1100" b="1" spc="100" kern="0" dirty="0">
+                <a:solidFill>
+                  <a:srgbClr val="C7922C"/>
                 </a:solidFill>
                 <a:latin typeface="Calibri" pitchFamily="34" charset="0"/>
                 <a:ea typeface="Calibri" pitchFamily="34" charset="-122"/>
@@ -2813,30 +3897,30 @@
       </p:sp>
       <p:sp>
         <p:nvSpPr>
-          <p:cNvPr id="5" name="Text 3"/>
-          <p:cNvSpPr/>
-          <p:nvPr/>
-        </p:nvSpPr>
-        <p:spPr>
-          <a:xfrm>
-            <a:off x="640080" y="1325880"/>
-            <a:ext cx="7863840" cy="548640"/>
-          </a:xfrm>
-          <a:prstGeom prst="rect">
-            <a:avLst/>
-          </a:prstGeom>
-          <a:noFill/>
-          <a:ln/>
-        </p:spPr>
-        <p:txBody>
-          <a:bodyPr wrap="square" lIns="0" tIns="0" rIns="0" bIns="0" rtlCol="0" anchor="ctr"/>
-          <a:lstStyle/>
-          <a:p>
-            <a:pPr indent="0" marL="0">
-              <a:buNone/>
-            </a:pPr>
-            <a:r>
-              <a:rPr lang="en-US" sz="1400" i="1" dirty="0">
+          <p:cNvPr id="6" name="Text 4"/>
+          <p:cNvSpPr/>
+          <p:nvPr/>
+        </p:nvSpPr>
+        <p:spPr>
+          <a:xfrm>
+            <a:off x="365760" y="1719072"/>
+            <a:ext cx="8412480" cy="914400"/>
+          </a:xfrm>
+          <a:prstGeom prst="rect">
+            <a:avLst/>
+          </a:prstGeom>
+          <a:noFill/>
+          <a:ln/>
+        </p:spPr>
+        <p:txBody>
+          <a:bodyPr wrap="square" lIns="0" tIns="0" rIns="0" bIns="0" rtlCol="0" anchor="ctr"/>
+          <a:lstStyle/>
+          <a:p>
+            <a:pPr indent="0" marL="0">
+              <a:buNone/>
+            </a:pPr>
+            <a:r>
+              <a:rPr lang="en-US" sz="1500" dirty="0">
                 <a:solidFill>
                   <a:srgbClr val="1E293B"/>
                 </a:solidFill>
@@ -2844,38 +3928,16 @@
                 <a:ea typeface="Calibri" pitchFamily="34" charset="-122"/>
                 <a:cs typeface="Calibri" pitchFamily="34" charset="-120"/>
               </a:rPr>
-              <a:t>As you read today, ask yourself: How do you recognize a symbol — something that stands for more than just itself?</a:t>
-            </a:r>
-            <a:endParaRPr lang="en-US" sz="1400" dirty="0"/>
-          </a:p>
-        </p:txBody>
-      </p:sp>
-      <p:sp>
-        <p:nvSpPr>
-          <p:cNvPr id="6" name="Text 4"/>
-          <p:cNvSpPr/>
-          <p:nvPr/>
-        </p:nvSpPr>
-        <p:spPr>
-          <a:xfrm>
-            <a:off x="640080" y="1965960"/>
-            <a:ext cx="7863840" cy="548640"/>
-          </a:xfrm>
-          <a:prstGeom prst="rect">
-            <a:avLst/>
-          </a:prstGeom>
-          <a:noFill/>
-          <a:ln/>
-        </p:spPr>
-        <p:txBody>
-          <a:bodyPr wrap="square" lIns="0" tIns="0" rIns="0" bIns="0" rtlCol="0" anchor="ctr"/>
-          <a:lstStyle/>
-          <a:p>
-            <a:pPr indent="0" marL="0">
-              <a:buNone/>
-            </a:pPr>
-            <a:r>
-              <a:rPr lang="en-US" sz="1400" i="1" dirty="0">
+              <a:t>•  Notice symbolism and repeated ideas.</a:t>
+            </a:r>
+            <a:endParaRPr lang="en-US" sz="1500" dirty="0"/>
+          </a:p>
+          <a:p>
+            <a:pPr indent="0" marL="0">
+              <a:buNone/>
+            </a:pPr>
+            <a:r>
+              <a:rPr lang="en-US" sz="1500" dirty="0">
                 <a:solidFill>
                   <a:srgbClr val="1E293B"/>
                 </a:solidFill>
@@ -2883,132 +3945,16 @@
                 <a:ea typeface="Calibri" pitchFamily="34" charset="-122"/>
                 <a:cs typeface="Calibri" pitchFamily="34" charset="-120"/>
               </a:rPr>
-              <a:t>How does the White Witch respond when the snow starts to melt? What does her response tell you about her character?</a:t>
-            </a:r>
-            <a:endParaRPr lang="en-US" sz="1400" dirty="0"/>
-          </a:p>
-        </p:txBody>
-      </p:sp>
-    </p:spTree>
-  </p:cSld>
-  <p:clrMapOvr>
-    <a:masterClrMapping/>
-  </p:clrMapOvr>
-</p:sld>
-</file>
-
-<file path=ppt/slides/slide13.xml><?xml version="1.0" encoding="utf-8"?>
-<p:sld xmlns:a="http://schemas.openxmlformats.org/drawingml/2006/main" xmlns:r="http://schemas.openxmlformats.org/officeDocument/2006/relationships" xmlns:p="http://schemas.openxmlformats.org/presentationml/2006/main">
-  <p:cSld name="Slide 13">
-    <p:bg>
-      <p:bgPr>
-        <a:solidFill>
-          <a:srgbClr val="FFFFFF"/>
-        </a:solidFill>
-      </p:bgPr>
-    </p:bg>
-    <p:spTree>
-      <p:nvGrpSpPr>
-        <p:cNvPr id="1" name=""/>
-        <p:cNvGrpSpPr/>
-        <p:nvPr/>
-      </p:nvGrpSpPr>
-      <p:grpSpPr>
-        <a:xfrm>
-          <a:off x="0" y="0"/>
-          <a:ext cx="0" cy="0"/>
-          <a:chOff x="0" y="0"/>
-          <a:chExt cx="0" cy="0"/>
-        </a:xfrm>
-      </p:grpSpPr>
-      <p:sp>
-        <p:nvSpPr>
-          <p:cNvPr id="2" name="Text 0"/>
-          <p:cNvSpPr/>
-          <p:nvPr/>
-        </p:nvSpPr>
-        <p:spPr>
-          <a:xfrm>
-            <a:off x="365760" y="164592"/>
-            <a:ext cx="8412480" cy="566928"/>
-          </a:xfrm>
-          <a:prstGeom prst="rect">
-            <a:avLst/>
-          </a:prstGeom>
-          <a:noFill/>
-          <a:ln/>
-        </p:spPr>
-        <p:txBody>
-          <a:bodyPr wrap="square" lIns="0" tIns="0" rIns="0" bIns="0" rtlCol="0" anchor="ctr"/>
-          <a:lstStyle/>
-          <a:p>
-            <a:pPr algn="l" indent="0" marL="0">
-              <a:buNone/>
-            </a:pPr>
-            <a:r>
-              <a:rPr lang="en-US" sz="2800" b="1" dirty="0">
-                <a:solidFill>
-                  <a:srgbClr val="0E1C42"/>
-                </a:solidFill>
-                <a:latin typeface="Calibri" pitchFamily="34" charset="0"/>
-                <a:ea typeface="Calibri" pitchFamily="34" charset="-122"/>
-                <a:cs typeface="Calibri" pitchFamily="34" charset="-120"/>
-              </a:rPr>
-              <a:t>Writer’s Workshop: Week 28 · REVISE with Precise Language</a:t>
-            </a:r>
-            <a:endParaRPr lang="en-US" sz="2800" dirty="0"/>
-          </a:p>
-        </p:txBody>
-      </p:sp>
-      <p:sp>
-        <p:nvSpPr>
-          <p:cNvPr id="3" name="Shape 1"/>
-          <p:cNvSpPr/>
-          <p:nvPr/>
-        </p:nvSpPr>
-        <p:spPr>
-          <a:xfrm>
-            <a:off x="365760" y="749808"/>
-            <a:ext cx="8412480" cy="0"/>
-          </a:xfrm>
-          <a:prstGeom prst="line">
-            <a:avLst/>
-          </a:prstGeom>
-          <a:noFill/>
-          <a:ln w="19050">
-            <a:solidFill>
-              <a:srgbClr val="34B76F"/>
-            </a:solidFill>
-            <a:prstDash val="solid"/>
-          </a:ln>
-        </p:spPr>
-      </p:sp>
-      <p:sp>
-        <p:nvSpPr>
-          <p:cNvPr id="4" name="Text 2"/>
-          <p:cNvSpPr/>
-          <p:nvPr/>
-        </p:nvSpPr>
-        <p:spPr>
-          <a:xfrm>
-            <a:off x="640080" y="1371600"/>
-            <a:ext cx="7863840" cy="457200"/>
-          </a:xfrm>
-          <a:prstGeom prst="rect">
-            <a:avLst/>
-          </a:prstGeom>
-          <a:noFill/>
-          <a:ln/>
-        </p:spPr>
-        <p:txBody>
-          <a:bodyPr wrap="square" lIns="0" tIns="0" rIns="0" bIns="0" rtlCol="0" anchor="ctr"/>
-          <a:lstStyle/>
-          <a:p>
-            <a:pPr indent="0" marL="0">
-              <a:buNone/>
-            </a:pPr>
-            <a:r>
-              <a:rPr lang="en-US" sz="1600" dirty="0">
+              <a:t>•  As you read today, ask yourself: How do you recognize a symbol — something that stands for more than just itself?</a:t>
+            </a:r>
+            <a:endParaRPr lang="en-US" sz="1500" dirty="0"/>
+          </a:p>
+          <a:p>
+            <a:pPr indent="0" marL="0">
+              <a:buNone/>
+            </a:pPr>
+            <a:r>
+              <a:rPr lang="en-US" sz="1500" dirty="0">
                 <a:solidFill>
                   <a:srgbClr val="1E293B"/>
                 </a:solidFill>
@@ -3016,48 +3962,9 @@
                 <a:ea typeface="Calibri" pitchFamily="34" charset="-122"/>
                 <a:cs typeface="Calibri" pitchFamily="34" charset="-120"/>
               </a:rPr>
-              <a:t>Open your writing assignment in Canvas.</a:t>
-            </a:r>
-            <a:endParaRPr lang="en-US" sz="1600" dirty="0"/>
-          </a:p>
-        </p:txBody>
-      </p:sp>
-      <p:sp>
-        <p:nvSpPr>
-          <p:cNvPr id="5" name="Text 3"/>
-          <p:cNvSpPr/>
-          <p:nvPr/>
-        </p:nvSpPr>
-        <p:spPr>
-          <a:xfrm>
-            <a:off x="640080" y="2011680"/>
-            <a:ext cx="7863840" cy="457200"/>
-          </a:xfrm>
-          <a:prstGeom prst="rect">
-            <a:avLst/>
-          </a:prstGeom>
-          <a:noFill/>
-          <a:ln/>
-        </p:spPr>
-        <p:txBody>
-          <a:bodyPr wrap="square" lIns="0" tIns="0" rIns="0" bIns="0" rtlCol="0" anchor="ctr"/>
-          <a:lstStyle/>
-          <a:p>
-            <a:pPr indent="0" marL="0">
-              <a:buNone/>
-            </a:pPr>
-            <a:r>
-              <a:rPr lang="en-US" sz="1400" dirty="0">
-                <a:solidFill>
-                  <a:srgbClr val="64748B"/>
-                </a:solidFill>
-                <a:latin typeface="Calibri" pitchFamily="34" charset="0"/>
-                <a:ea typeface="Calibri" pitchFamily="34" charset="-122"/>
-                <a:cs typeface="Calibri" pitchFamily="34" charset="-120"/>
-              </a:rPr>
-              <a:t>Follow the writing prompt for today's workshop.</a:t>
-            </a:r>
-            <a:endParaRPr lang="en-US" sz="1400" dirty="0"/>
+              <a:t>•  Does this fit the A–A–B–B–A pattern you wrote down last week? Check each line.</a:t>
+            </a:r>
+            <a:endParaRPr lang="en-US" sz="1500" dirty="0"/>
           </a:p>
         </p:txBody>
       </p:sp>
@@ -3095,65 +4002,62 @@
       </p:grpSpPr>
       <p:sp>
         <p:nvSpPr>
-          <p:cNvPr id="2" name="Text 0"/>
-          <p:cNvSpPr/>
-          <p:nvPr/>
-        </p:nvSpPr>
-        <p:spPr>
-          <a:xfrm>
-            <a:off x="365760" y="164592"/>
-            <a:ext cx="8412480" cy="566928"/>
-          </a:xfrm>
-          <a:prstGeom prst="rect">
-            <a:avLst/>
-          </a:prstGeom>
-          <a:noFill/>
-          <a:ln/>
-        </p:spPr>
-        <p:txBody>
-          <a:bodyPr wrap="square" lIns="0" tIns="0" rIns="0" bIns="0" rtlCol="0" anchor="ctr"/>
-          <a:lstStyle/>
-          <a:p>
-            <a:pPr algn="l" indent="0" marL="0">
-              <a:buNone/>
-            </a:pPr>
-            <a:r>
-              <a:rPr lang="en-US" sz="2800" b="1" dirty="0">
-                <a:solidFill>
-                  <a:srgbClr val="0E1C42"/>
-                </a:solidFill>
-                <a:latin typeface="Calibri" pitchFamily="34" charset="0"/>
-                <a:ea typeface="Calibri" pitchFamily="34" charset="-122"/>
-                <a:cs typeface="Calibri" pitchFamily="34" charset="-120"/>
-              </a:rPr>
-              <a:t>✏️ 10-Minute Write</a:t>
-            </a:r>
-            <a:endParaRPr lang="en-US" sz="2800" dirty="0"/>
-          </a:p>
-        </p:txBody>
-      </p:sp>
-      <p:sp>
-        <p:nvSpPr>
-          <p:cNvPr id="3" name="Shape 1"/>
-          <p:cNvSpPr/>
-          <p:nvPr/>
-        </p:nvSpPr>
-        <p:spPr>
-          <a:xfrm>
-            <a:off x="365760" y="749808"/>
-            <a:ext cx="8412480" cy="0"/>
-          </a:xfrm>
-          <a:prstGeom prst="line">
-            <a:avLst/>
-          </a:prstGeom>
-          <a:noFill/>
-          <a:ln w="19050">
-            <a:solidFill>
-              <a:srgbClr val="C7922C"/>
-            </a:solidFill>
-            <a:prstDash val="solid"/>
-          </a:ln>
-        </p:spPr>
+          <p:cNvPr id="2" name="Shape 0"/>
+          <p:cNvSpPr/>
+          <p:nvPr/>
+        </p:nvSpPr>
+        <p:spPr>
+          <a:xfrm>
+            <a:off x="0" y="0"/>
+            <a:ext cx="9144000" cy="566928"/>
+          </a:xfrm>
+          <a:prstGeom prst="rect">
+            <a:avLst/>
+          </a:prstGeom>
+          <a:solidFill>
+            <a:srgbClr val="C7922C"/>
+          </a:solidFill>
+          <a:ln/>
+        </p:spPr>
+      </p:sp>
+      <p:sp>
+        <p:nvSpPr>
+          <p:cNvPr id="3" name="Text 1"/>
+          <p:cNvSpPr/>
+          <p:nvPr/>
+        </p:nvSpPr>
+        <p:spPr>
+          <a:xfrm>
+            <a:off x="365760" y="54864"/>
+            <a:ext cx="8412480" cy="457200"/>
+          </a:xfrm>
+          <a:prstGeom prst="rect">
+            <a:avLst/>
+          </a:prstGeom>
+          <a:noFill/>
+          <a:ln/>
+        </p:spPr>
+        <p:txBody>
+          <a:bodyPr wrap="square" lIns="0" tIns="0" rIns="0" bIns="0" rtlCol="0" anchor="ctr"/>
+          <a:lstStyle/>
+          <a:p>
+            <a:pPr indent="0" marL="0">
+              <a:buNone/>
+            </a:pPr>
+            <a:r>
+              <a:rPr lang="en-US" sz="2200" b="1" dirty="0">
+                <a:solidFill>
+                  <a:srgbClr val="FFFFFF"/>
+                </a:solidFill>
+                <a:latin typeface="Calibri" pitchFamily="34" charset="0"/>
+                <a:ea typeface="Calibri" pitchFamily="34" charset="-122"/>
+                <a:cs typeface="Calibri" pitchFamily="34" charset="-120"/>
+              </a:rPr>
+              <a:t>✍️  10-Minute Write</a:t>
+            </a:r>
+            <a:endParaRPr lang="en-US" sz="2200" dirty="0"/>
+          </a:p>
+        </p:txBody>
       </p:sp>
       <p:sp>
         <p:nvSpPr>
@@ -3163,24 +4067,24 @@
         </p:nvSpPr>
         <p:spPr>
           <a:xfrm>
-            <a:off x="457200" y="1005840"/>
-            <a:ext cx="8046720" cy="292608"/>
-          </a:xfrm>
-          <a:prstGeom prst="rect">
-            <a:avLst/>
-          </a:prstGeom>
-          <a:noFill/>
-          <a:ln/>
-        </p:spPr>
-        <p:txBody>
-          <a:bodyPr wrap="square" lIns="0" tIns="0" rIns="0" bIns="0" rtlCol="0" anchor="ctr"/>
-          <a:lstStyle/>
-          <a:p>
-            <a:pPr indent="0" marL="0">
-              <a:buNone/>
-            </a:pPr>
-            <a:r>
-              <a:rPr lang="en-US" sz="1100" b="1" spc="200" kern="0" dirty="0">
+            <a:off x="365760" y="822960"/>
+            <a:ext cx="8229600" cy="237744"/>
+          </a:xfrm>
+          <a:prstGeom prst="rect">
+            <a:avLst/>
+          </a:prstGeom>
+          <a:noFill/>
+          <a:ln/>
+        </p:spPr>
+        <p:txBody>
+          <a:bodyPr wrap="square" lIns="0" tIns="0" rIns="0" bIns="0" rtlCol="0" anchor="ctr"/>
+          <a:lstStyle/>
+          <a:p>
+            <a:pPr indent="0" marL="0">
+              <a:buNone/>
+            </a:pPr>
+            <a:r>
+              <a:rPr lang="en-US" sz="1100" b="1" spc="100" kern="0" dirty="0">
                 <a:solidFill>
                   <a:srgbClr val="C7922C"/>
                 </a:solidFill>
@@ -3188,7 +4092,7 @@
                 <a:ea typeface="Calibri" pitchFamily="34" charset="-122"/>
                 <a:cs typeface="Calibri" pitchFamily="34" charset="-120"/>
               </a:rPr>
-              <a:t>📖 READ THE PROMPT — 1 MINUTE</a:t>
+              <a:t>READ THE PROMPT — 1 MINUTE</a:t>
             </a:r>
             <a:endParaRPr lang="en-US" sz="1100" dirty="0"/>
           </a:p>
@@ -3202,18 +4106,18 @@
         </p:nvSpPr>
         <p:spPr>
           <a:xfrm>
-            <a:off x="457200" y="1417320"/>
-            <a:ext cx="8229600" cy="1645920"/>
+            <a:off x="365760" y="1143000"/>
+            <a:ext cx="8412480" cy="1737360"/>
           </a:xfrm>
           <a:prstGeom prst="roundRect">
             <a:avLst>
-              <a:gd name="adj" fmla="val 5556"/>
+              <a:gd name="adj" fmla="val 5263"/>
             </a:avLst>
           </a:prstGeom>
           <a:solidFill>
             <a:srgbClr val="FEF6E8"/>
           </a:solidFill>
-          <a:ln w="12700">
+          <a:ln w="19050">
             <a:solidFill>
               <a:srgbClr val="C7922C"/>
             </a:solidFill>
@@ -3236,24 +4140,24 @@
         </p:nvSpPr>
         <p:spPr>
           <a:xfrm>
-            <a:off x="640080" y="1527048"/>
-            <a:ext cx="7863840" cy="1417320"/>
-          </a:xfrm>
-          <a:prstGeom prst="rect">
-            <a:avLst/>
-          </a:prstGeom>
-          <a:noFill/>
-          <a:ln/>
-        </p:spPr>
-        <p:txBody>
-          <a:bodyPr wrap="square" lIns="0" tIns="0" rIns="0" bIns="0" rtlCol="0" anchor="ctr"/>
-          <a:lstStyle/>
-          <a:p>
-            <a:pPr indent="0" marL="0">
-              <a:buNone/>
-            </a:pPr>
-            <a:r>
-              <a:rPr lang="en-US" sz="1800" i="1" dirty="0">
+            <a:off x="594360" y="1271016"/>
+            <a:ext cx="7955280" cy="1481328"/>
+          </a:xfrm>
+          <a:prstGeom prst="rect">
+            <a:avLst/>
+          </a:prstGeom>
+          <a:noFill/>
+          <a:ln/>
+        </p:spPr>
+        <p:txBody>
+          <a:bodyPr wrap="square" lIns="0" tIns="0" rIns="0" bIns="0" rtlCol="0" anchor="ctr"/>
+          <a:lstStyle/>
+          <a:p>
+            <a:pPr indent="0" marL="0">
+              <a:buNone/>
+            </a:pPr>
+            <a:r>
+              <a:rPr lang="en-US" sz="1700" dirty="0">
                 <a:solidFill>
                   <a:srgbClr val="1E293B"/>
                 </a:solidFill>
@@ -3261,9 +4165,9 @@
                 <a:ea typeface="Calibri" pitchFamily="34" charset="-122"/>
                 <a:cs typeface="Calibri" pitchFamily="34" charset="-120"/>
               </a:rPr>
-              <a:t>Aslan is described as good but not safe. What do you think it means for someone to be good but not safe? Can you think of an example from real life?</a:t>
-            </a:r>
-            <a:endParaRPr lang="en-US" sz="1800" dirty="0"/>
+              <a:t>Aslan gives himself up for Edmund. Write about someone who gave something up for you.</a:t>
+            </a:r>
+            <a:endParaRPr lang="en-US" sz="1700" dirty="0"/>
           </a:p>
         </p:txBody>
       </p:sp>
@@ -3275,76 +4179,34 @@
         </p:nvSpPr>
         <p:spPr>
           <a:xfrm>
-            <a:off x="640080" y="3246120"/>
-            <a:ext cx="7863840" cy="457200"/>
-          </a:xfrm>
-          <a:prstGeom prst="rect">
-            <a:avLst/>
-          </a:prstGeom>
-          <a:noFill/>
-          <a:ln/>
-        </p:spPr>
-        <p:txBody>
-          <a:bodyPr wrap="square" lIns="0" tIns="0" rIns="0" bIns="0" rtlCol="0" anchor="ctr"/>
-          <a:lstStyle/>
-          <a:p>
-            <a:pPr indent="0" marL="0">
-              <a:buNone/>
-            </a:pPr>
-            <a:r>
-              <a:rPr lang="en-US" sz="1400" b="1" dirty="0">
-                <a:solidFill>
-                  <a:srgbClr val="0E1C42"/>
-                </a:solidFill>
-                <a:latin typeface="Calibri" pitchFamily="34" charset="0"/>
-                <a:ea typeface="Calibri" pitchFamily="34" charset="-122"/>
-                <a:cs typeface="Calibri" pitchFamily="34" charset="-120"/>
-              </a:rPr>
-              <a:t>Type in the chat </a:t>
-            </a:r>
-            <a:pPr indent="0" marL="0">
-              <a:buNone/>
-            </a:pPr>
-            <a:r>
-              <a:rPr lang="en-US" sz="1400" dirty="0">
-                <a:solidFill>
-                  <a:srgbClr val="1E293B"/>
-                </a:solidFill>
-                <a:latin typeface="Calibri" pitchFamily="34" charset="0"/>
-                <a:ea typeface="Calibri" pitchFamily="34" charset="-122"/>
-                <a:cs typeface="Calibri" pitchFamily="34" charset="-120"/>
-              </a:rPr>
-              <a:t>or </a:t>
-            </a:r>
-            <a:pPr indent="0" marL="0">
-              <a:buNone/>
-            </a:pPr>
-            <a:r>
-              <a:rPr lang="en-US" sz="1400" b="1" dirty="0">
-                <a:solidFill>
-                  <a:srgbClr val="0E1C42"/>
-                </a:solidFill>
-                <a:latin typeface="Calibri" pitchFamily="34" charset="0"/>
-                <a:ea typeface="Calibri" pitchFamily="34" charset="-122"/>
-                <a:cs typeface="Calibri" pitchFamily="34" charset="-120"/>
-              </a:rPr>
-              <a:t>write on paper</a:t>
-            </a:r>
-            <a:pPr indent="0" marL="0">
-              <a:buNone/>
-            </a:pPr>
-            <a:r>
-              <a:rPr lang="en-US" sz="1400" dirty="0">
-                <a:solidFill>
-                  <a:srgbClr val="1E293B"/>
-                </a:solidFill>
-                <a:latin typeface="Calibri" pitchFamily="34" charset="0"/>
-                <a:ea typeface="Calibri" pitchFamily="34" charset="-122"/>
-                <a:cs typeface="Calibri" pitchFamily="34" charset="-120"/>
-              </a:rPr>
-              <a:t> to hold up when we share.</a:t>
-            </a:r>
-            <a:endParaRPr lang="en-US" sz="1400" dirty="0"/>
+            <a:off x="365760" y="3063240"/>
+            <a:ext cx="8412480" cy="365760"/>
+          </a:xfrm>
+          <a:prstGeom prst="rect">
+            <a:avLst/>
+          </a:prstGeom>
+          <a:noFill/>
+          <a:ln/>
+        </p:spPr>
+        <p:txBody>
+          <a:bodyPr wrap="square" lIns="0" tIns="0" rIns="0" bIns="0" rtlCol="0" anchor="ctr"/>
+          <a:lstStyle/>
+          <a:p>
+            <a:pPr indent="0" marL="0">
+              <a:buNone/>
+            </a:pPr>
+            <a:r>
+              <a:rPr lang="en-US" sz="1600" i="1" dirty="0">
+                <a:solidFill>
+                  <a:srgbClr val="64748B"/>
+                </a:solidFill>
+                <a:latin typeface="Calibri" pitchFamily="34" charset="0"/>
+                <a:ea typeface="Calibri" pitchFamily="34" charset="-122"/>
+                <a:cs typeface="Calibri" pitchFamily="34" charset="-120"/>
+              </a:rPr>
+              <a:t>Think first. You will have five minutes to write.</a:t>
+            </a:r>
+            <a:endParaRPr lang="en-US" sz="1600" dirty="0"/>
           </a:p>
         </p:txBody>
       </p:sp>
@@ -3382,30 +4244,89 @@
       </p:grpSpPr>
       <p:sp>
         <p:nvSpPr>
-          <p:cNvPr id="2" name="Text 0"/>
-          <p:cNvSpPr/>
-          <p:nvPr/>
-        </p:nvSpPr>
-        <p:spPr>
-          <a:xfrm>
-            <a:off x="457200" y="228600"/>
-            <a:ext cx="8229600" cy="640080"/>
-          </a:xfrm>
-          <a:prstGeom prst="rect">
-            <a:avLst/>
-          </a:prstGeom>
-          <a:noFill/>
-          <a:ln/>
-        </p:spPr>
-        <p:txBody>
-          <a:bodyPr wrap="square" lIns="0" tIns="0" rIns="0" bIns="0" rtlCol="0" anchor="ctr"/>
-          <a:lstStyle/>
-          <a:p>
-            <a:pPr algn="ctr" indent="0" marL="0">
-              <a:buNone/>
-            </a:pPr>
-            <a:r>
-              <a:rPr lang="en-US" sz="3200" b="1" dirty="0">
+          <p:cNvPr id="2" name="Shape 0"/>
+          <p:cNvSpPr/>
+          <p:nvPr/>
+        </p:nvSpPr>
+        <p:spPr>
+          <a:xfrm>
+            <a:off x="0" y="0"/>
+            <a:ext cx="9144000" cy="566928"/>
+          </a:xfrm>
+          <a:prstGeom prst="rect">
+            <a:avLst/>
+          </a:prstGeom>
+          <a:solidFill>
+            <a:srgbClr val="C7922C"/>
+          </a:solidFill>
+          <a:ln/>
+        </p:spPr>
+      </p:sp>
+      <p:sp>
+        <p:nvSpPr>
+          <p:cNvPr id="3" name="Text 1"/>
+          <p:cNvSpPr/>
+          <p:nvPr/>
+        </p:nvSpPr>
+        <p:spPr>
+          <a:xfrm>
+            <a:off x="365760" y="54864"/>
+            <a:ext cx="8412480" cy="457200"/>
+          </a:xfrm>
+          <a:prstGeom prst="rect">
+            <a:avLst/>
+          </a:prstGeom>
+          <a:noFill/>
+          <a:ln/>
+        </p:spPr>
+        <p:txBody>
+          <a:bodyPr wrap="square" lIns="0" tIns="0" rIns="0" bIns="0" rtlCol="0" anchor="ctr"/>
+          <a:lstStyle/>
+          <a:p>
+            <a:pPr indent="0" marL="0">
+              <a:buNone/>
+            </a:pPr>
+            <a:r>
+              <a:rPr lang="en-US" sz="2200" b="1" dirty="0">
+                <a:solidFill>
+                  <a:srgbClr val="FFFFFF"/>
+                </a:solidFill>
+                <a:latin typeface="Calibri" pitchFamily="34" charset="0"/>
+                <a:ea typeface="Calibri" pitchFamily="34" charset="-122"/>
+                <a:cs typeface="Calibri" pitchFamily="34" charset="-120"/>
+              </a:rPr>
+              <a:t>✍️  Writing Time</a:t>
+            </a:r>
+            <a:endParaRPr lang="en-US" sz="2200" dirty="0"/>
+          </a:p>
+        </p:txBody>
+      </p:sp>
+      <p:sp>
+        <p:nvSpPr>
+          <p:cNvPr id="4" name="Text 2"/>
+          <p:cNvSpPr/>
+          <p:nvPr/>
+        </p:nvSpPr>
+        <p:spPr>
+          <a:xfrm>
+            <a:off x="365760" y="868680"/>
+            <a:ext cx="8412480" cy="502920"/>
+          </a:xfrm>
+          <a:prstGeom prst="rect">
+            <a:avLst/>
+          </a:prstGeom>
+          <a:noFill/>
+          <a:ln/>
+        </p:spPr>
+        <p:txBody>
+          <a:bodyPr wrap="square" lIns="0" tIns="0" rIns="0" bIns="0" rtlCol="0" anchor="ctr"/>
+          <a:lstStyle/>
+          <a:p>
+            <a:pPr indent="0" marL="0">
+              <a:buNone/>
+            </a:pPr>
+            <a:r>
+              <a:rPr lang="en-US" sz="2600" b="1" dirty="0">
                 <a:solidFill>
                   <a:srgbClr val="0E1C42"/>
                 </a:solidFill>
@@ -3413,38 +4334,38 @@
                 <a:ea typeface="Calibri" pitchFamily="34" charset="-122"/>
                 <a:cs typeface="Calibri" pitchFamily="34" charset="-120"/>
               </a:rPr>
-              <a:t>✏️  Writing Time</a:t>
-            </a:r>
-            <a:endParaRPr lang="en-US" sz="3200" dirty="0"/>
-          </a:p>
-        </p:txBody>
-      </p:sp>
-      <p:sp>
-        <p:nvSpPr>
-          <p:cNvPr id="3" name="Text 1"/>
-          <p:cNvSpPr/>
-          <p:nvPr/>
-        </p:nvSpPr>
-        <p:spPr>
-          <a:xfrm>
-            <a:off x="914400" y="822960"/>
-            <a:ext cx="7315200" cy="365760"/>
-          </a:xfrm>
-          <a:prstGeom prst="rect">
-            <a:avLst/>
-          </a:prstGeom>
-          <a:noFill/>
-          <a:ln/>
-        </p:spPr>
-        <p:txBody>
-          <a:bodyPr wrap="square" lIns="0" tIns="0" rIns="0" bIns="0" rtlCol="0" anchor="ctr"/>
-          <a:lstStyle/>
-          <a:p>
-            <a:pPr algn="ctr" indent="0" marL="0">
-              <a:buNone/>
-            </a:pPr>
-            <a:r>
-              <a:rPr lang="en-US" sz="1600" dirty="0">
+              <a:t>5 minutes — keep your pencil moving!</a:t>
+            </a:r>
+            <a:endParaRPr lang="en-US" sz="2600" dirty="0"/>
+          </a:p>
+        </p:txBody>
+      </p:sp>
+      <p:sp>
+        <p:nvSpPr>
+          <p:cNvPr id="5" name="Text 3"/>
+          <p:cNvSpPr/>
+          <p:nvPr/>
+        </p:nvSpPr>
+        <p:spPr>
+          <a:xfrm>
+            <a:off x="365760" y="1463040"/>
+            <a:ext cx="8229600" cy="237744"/>
+          </a:xfrm>
+          <a:prstGeom prst="rect">
+            <a:avLst/>
+          </a:prstGeom>
+          <a:noFill/>
+          <a:ln/>
+        </p:spPr>
+        <p:txBody>
+          <a:bodyPr wrap="square" lIns="0" tIns="0" rIns="0" bIns="0" rtlCol="0" anchor="ctr"/>
+          <a:lstStyle/>
+          <a:p>
+            <a:pPr indent="0" marL="0">
+              <a:buNone/>
+            </a:pPr>
+            <a:r>
+              <a:rPr lang="en-US" sz="1100" b="1" spc="100" kern="0" dirty="0">
                 <a:solidFill>
                   <a:srgbClr val="C7922C"/>
                 </a:solidFill>
@@ -3452,32 +4373,32 @@
                 <a:ea typeface="Calibri" pitchFamily="34" charset="-122"/>
                 <a:cs typeface="Calibri" pitchFamily="34" charset="-120"/>
               </a:rPr>
-              <a:t>5 minutes — keep your pencil moving!</a:t>
-            </a:r>
-            <a:endParaRPr lang="en-US" sz="1600" dirty="0"/>
-          </a:p>
-        </p:txBody>
-      </p:sp>
-      <p:sp>
-        <p:nvSpPr>
-          <p:cNvPr id="4" name="Shape 2"/>
-          <p:cNvSpPr/>
-          <p:nvPr/>
-        </p:nvSpPr>
-        <p:spPr>
-          <a:xfrm>
-            <a:off x="457200" y="1371600"/>
-            <a:ext cx="8229600" cy="1280160"/>
+              <a:t>YOUR PROMPT</a:t>
+            </a:r>
+            <a:endParaRPr lang="en-US" sz="1100" dirty="0"/>
+          </a:p>
+        </p:txBody>
+      </p:sp>
+      <p:sp>
+        <p:nvSpPr>
+          <p:cNvPr id="6" name="Shape 4"/>
+          <p:cNvSpPr/>
+          <p:nvPr/>
+        </p:nvSpPr>
+        <p:spPr>
+          <a:xfrm>
+            <a:off x="365760" y="1737360"/>
+            <a:ext cx="8412480" cy="1417320"/>
           </a:xfrm>
           <a:prstGeom prst="roundRect">
             <a:avLst>
-              <a:gd name="adj" fmla="val 7143"/>
+              <a:gd name="adj" fmla="val 6452"/>
             </a:avLst>
           </a:prstGeom>
           <a:solidFill>
             <a:srgbClr val="FFFFFF"/>
           </a:solidFill>
-          <a:ln w="12700">
+          <a:ln w="19050">
             <a:solidFill>
               <a:srgbClr val="C7922C"/>
             </a:solidFill>
@@ -3494,44 +4415,30 @@
       </p:sp>
       <p:sp>
         <p:nvSpPr>
-          <p:cNvPr id="5" name="Text 3"/>
-          <p:cNvSpPr/>
-          <p:nvPr/>
-        </p:nvSpPr>
-        <p:spPr>
-          <a:xfrm>
-            <a:off x="640080" y="1417320"/>
-            <a:ext cx="7863840" cy="1188720"/>
-          </a:xfrm>
-          <a:prstGeom prst="rect">
-            <a:avLst/>
-          </a:prstGeom>
-          <a:noFill/>
-          <a:ln/>
-        </p:spPr>
-        <p:txBody>
-          <a:bodyPr wrap="square" lIns="0" tIns="0" rIns="0" bIns="0" rtlCol="0" anchor="t"/>
-          <a:lstStyle/>
-          <a:p>
-            <a:pPr indent="0" marL="0">
-              <a:buNone/>
-            </a:pPr>
-            <a:r>
-              <a:rPr lang="en-US" sz="1200" b="1" dirty="0">
-                <a:solidFill>
-                  <a:srgbClr val="C7922C"/>
-                </a:solidFill>
-                <a:latin typeface="Calibri" pitchFamily="34" charset="0"/>
-                <a:ea typeface="Calibri" pitchFamily="34" charset="-122"/>
-                <a:cs typeface="Calibri" pitchFamily="34" charset="-120"/>
-              </a:rPr>
-              <a:t>📖 Prompt: </a:t>
-            </a:r>
-            <a:pPr indent="0" marL="0">
-              <a:buNone/>
-            </a:pPr>
-            <a:r>
-              <a:rPr lang="en-US" sz="1200" i="1" dirty="0">
+          <p:cNvPr id="7" name="Text 5"/>
+          <p:cNvSpPr/>
+          <p:nvPr/>
+        </p:nvSpPr>
+        <p:spPr>
+          <a:xfrm>
+            <a:off x="594360" y="1865376"/>
+            <a:ext cx="7955280" cy="1161288"/>
+          </a:xfrm>
+          <a:prstGeom prst="rect">
+            <a:avLst/>
+          </a:prstGeom>
+          <a:noFill/>
+          <a:ln/>
+        </p:spPr>
+        <p:txBody>
+          <a:bodyPr wrap="square" lIns="0" tIns="0" rIns="0" bIns="0" rtlCol="0" anchor="ctr"/>
+          <a:lstStyle/>
+          <a:p>
+            <a:pPr indent="0" marL="0">
+              <a:buNone/>
+            </a:pPr>
+            <a:r>
+              <a:rPr lang="en-US" sz="1700" dirty="0">
                 <a:solidFill>
                   <a:srgbClr val="1E293B"/>
                 </a:solidFill>
@@ -3539,122 +4446,48 @@
                 <a:ea typeface="Calibri" pitchFamily="34" charset="-122"/>
                 <a:cs typeface="Calibri" pitchFamily="34" charset="-120"/>
               </a:rPr>
-              <a:t>Aslan is described as good but not safe. What do you think it means for someone to be good but not safe? Can you think of an example from real life?</a:t>
-            </a:r>
-            <a:endParaRPr lang="en-US" sz="1200" dirty="0"/>
-          </a:p>
-        </p:txBody>
-      </p:sp>
-      <p:sp>
-        <p:nvSpPr>
-          <p:cNvPr id="6" name="Shape 4"/>
-          <p:cNvSpPr/>
-          <p:nvPr/>
-        </p:nvSpPr>
-        <p:spPr>
-          <a:xfrm>
-            <a:off x="2286000" y="2926080"/>
-            <a:ext cx="4572000" cy="1280160"/>
-          </a:xfrm>
-          <a:prstGeom prst="roundRect">
-            <a:avLst>
-              <a:gd name="adj" fmla="val 8571"/>
-            </a:avLst>
-          </a:prstGeom>
-          <a:solidFill>
-            <a:srgbClr val="FFFFFF"/>
-          </a:solidFill>
-          <a:ln/>
-          <a:effectLst>
-            <a:outerShdw sx="100000" sy="100000" kx="0" ky="0" algn="bl" rotWithShape="0" blurRad="101600" dist="38100" dir="2700000">
-              <a:srgbClr val="000000">
-                <a:alpha val="12000"/>
-              </a:srgbClr>
-            </a:outerShdw>
-          </a:effectLst>
-        </p:spPr>
-      </p:sp>
-      <p:sp>
-        <p:nvSpPr>
-          <p:cNvPr id="7" name="Text 5"/>
-          <p:cNvSpPr/>
-          <p:nvPr/>
-        </p:nvSpPr>
-        <p:spPr>
-          <a:xfrm>
-            <a:off x="2468880" y="3017520"/>
-            <a:ext cx="4206240" cy="1097280"/>
-          </a:xfrm>
-          <a:prstGeom prst="rect">
-            <a:avLst/>
-          </a:prstGeom>
-          <a:noFill/>
-          <a:ln/>
-        </p:spPr>
-        <p:txBody>
-          <a:bodyPr wrap="square" lIns="0" tIns="0" rIns="0" bIns="0" rtlCol="0" anchor="t"/>
-          <a:lstStyle/>
-          <a:p>
-            <a:pPr indent="0" marL="0">
-              <a:buNone/>
-            </a:pPr>
-            <a:r>
-              <a:rPr lang="en-US" sz="1400" b="1" dirty="0">
-                <a:solidFill>
-                  <a:srgbClr val="0E1C42"/>
-                </a:solidFill>
-                <a:latin typeface="Calibri" pitchFamily="34" charset="0"/>
-                <a:ea typeface="Calibri" pitchFamily="34" charset="-122"/>
-                <a:cs typeface="Calibri" pitchFamily="34" charset="-120"/>
-              </a:rPr>
-              <a:t>If you get stuck:
-</a:t>
-            </a:r>
-            <a:pPr indent="0" marL="0">
-              <a:buNone/>
-            </a:pPr>
-            <a:r>
-              <a:rPr lang="en-US" sz="1300" dirty="0">
-                <a:solidFill>
-                  <a:srgbClr val="1E293B"/>
-                </a:solidFill>
-                <a:latin typeface="Calibri" pitchFamily="34" charset="0"/>
-                <a:ea typeface="Calibri" pitchFamily="34" charset="-122"/>
-                <a:cs typeface="Calibri" pitchFamily="34" charset="-120"/>
-              </a:rPr>
-              <a:t>• Reread the prompt above
-</a:t>
-            </a:r>
-            <a:pPr indent="0" marL="0">
-              <a:buNone/>
-            </a:pPr>
-            <a:r>
-              <a:rPr lang="en-US" sz="1300" dirty="0">
-                <a:solidFill>
-                  <a:srgbClr val="1E293B"/>
-                </a:solidFill>
-                <a:latin typeface="Calibri" pitchFamily="34" charset="0"/>
-                <a:ea typeface="Calibri" pitchFamily="34" charset="-122"/>
-                <a:cs typeface="Calibri" pitchFamily="34" charset="-120"/>
-              </a:rPr>
-              <a:t>• Write "I'm thinking..." until a new idea comes
-</a:t>
-            </a:r>
-            <a:pPr indent="0" marL="0">
-              <a:buNone/>
-            </a:pPr>
-            <a:r>
-              <a:rPr lang="en-US" sz="1300" dirty="0">
-                <a:solidFill>
-                  <a:srgbClr val="1E293B"/>
-                </a:solidFill>
-                <a:latin typeface="Calibri" pitchFamily="34" charset="0"/>
-                <a:ea typeface="Calibri" pitchFamily="34" charset="-122"/>
-                <a:cs typeface="Calibri" pitchFamily="34" charset="-120"/>
-              </a:rPr>
-              <a:t>• Keep going — don't erase!</a:t>
-            </a:r>
-            <a:endParaRPr lang="en-US" sz="1400" dirty="0"/>
+              <a:t>Aslan gives himself up for Edmund. Write about someone who gave something up for you.</a:t>
+            </a:r>
+            <a:endParaRPr lang="en-US" sz="1700" dirty="0"/>
+          </a:p>
+        </p:txBody>
+      </p:sp>
+      <p:sp>
+        <p:nvSpPr>
+          <p:cNvPr id="8" name="Text 6"/>
+          <p:cNvSpPr/>
+          <p:nvPr/>
+        </p:nvSpPr>
+        <p:spPr>
+          <a:xfrm>
+            <a:off x="365760" y="3291840"/>
+            <a:ext cx="8412480" cy="365760"/>
+          </a:xfrm>
+          <a:prstGeom prst="rect">
+            <a:avLst/>
+          </a:prstGeom>
+          <a:noFill/>
+          <a:ln/>
+        </p:spPr>
+        <p:txBody>
+          <a:bodyPr wrap="square" lIns="0" tIns="0" rIns="0" bIns="0" rtlCol="0" anchor="ctr"/>
+          <a:lstStyle/>
+          <a:p>
+            <a:pPr indent="0" marL="0">
+              <a:buNone/>
+            </a:pPr>
+            <a:r>
+              <a:rPr lang="en-US" sz="1500" i="1" dirty="0">
+                <a:solidFill>
+                  <a:srgbClr val="64748B"/>
+                </a:solidFill>
+                <a:latin typeface="Calibri" pitchFamily="34" charset="0"/>
+                <a:ea typeface="Calibri" pitchFamily="34" charset="-122"/>
+                <a:cs typeface="Calibri" pitchFamily="34" charset="-120"/>
+              </a:rPr>
+              <a:t>Do not stop to erase. If you get stuck, write the last word again and keep going.</a:t>
+            </a:r>
+            <a:endParaRPr lang="en-US" sz="1500" dirty="0"/>
           </a:p>
         </p:txBody>
       </p:sp>
@@ -3692,39 +4525,23 @@
       </p:grpSpPr>
       <p:sp>
         <p:nvSpPr>
-          <p:cNvPr id="2" name="Text 0"/>
-          <p:cNvSpPr/>
-          <p:nvPr/>
-        </p:nvSpPr>
-        <p:spPr>
-          <a:xfrm>
-            <a:off x="3657600" y="365760"/>
-            <a:ext cx="1828800" cy="640080"/>
-          </a:xfrm>
-          <a:prstGeom prst="rect">
-            <a:avLst/>
-          </a:prstGeom>
-          <a:noFill/>
-          <a:ln/>
-        </p:spPr>
-        <p:txBody>
-          <a:bodyPr wrap="square" lIns="0" tIns="0" rIns="0" bIns="0" rtlCol="0" anchor="ctr"/>
-          <a:lstStyle/>
-          <a:p>
-            <a:pPr algn="ctr" indent="0" marL="0">
-              <a:buNone/>
-            </a:pPr>
-            <a:r>
-              <a:rPr lang="en-US" sz="4000" dirty="0">
-                <a:solidFill>
-                  <a:srgbClr val="000000"/>
-                </a:solidFill>
-              </a:rPr>
-              <a:t>🔍</a:t>
-            </a:r>
-            <a:endParaRPr lang="en-US" sz="4000" dirty="0"/>
-          </a:p>
-        </p:txBody>
+          <p:cNvPr id="2" name="Shape 0"/>
+          <p:cNvSpPr/>
+          <p:nvPr/>
+        </p:nvSpPr>
+        <p:spPr>
+          <a:xfrm>
+            <a:off x="0" y="0"/>
+            <a:ext cx="9144000" cy="566928"/>
+          </a:xfrm>
+          <a:prstGeom prst="rect">
+            <a:avLst/>
+          </a:prstGeom>
+          <a:solidFill>
+            <a:srgbClr val="34B76F"/>
+          </a:solidFill>
+          <a:ln/>
+        </p:spPr>
       </p:sp>
       <p:sp>
         <p:nvSpPr>
@@ -3734,24 +4551,63 @@
         </p:nvSpPr>
         <p:spPr>
           <a:xfrm>
-            <a:off x="914400" y="914400"/>
-            <a:ext cx="7315200" cy="640080"/>
-          </a:xfrm>
-          <a:prstGeom prst="rect">
-            <a:avLst/>
-          </a:prstGeom>
-          <a:noFill/>
-          <a:ln/>
-        </p:spPr>
-        <p:txBody>
-          <a:bodyPr wrap="square" lIns="0" tIns="0" rIns="0" bIns="0" rtlCol="0" anchor="ctr"/>
-          <a:lstStyle/>
-          <a:p>
-            <a:pPr algn="ctr" indent="0" marL="0">
-              <a:buNone/>
-            </a:pPr>
-            <a:r>
-              <a:rPr lang="en-US" sz="3200" b="1" dirty="0">
+            <a:off x="365760" y="54864"/>
+            <a:ext cx="8412480" cy="457200"/>
+          </a:xfrm>
+          <a:prstGeom prst="rect">
+            <a:avLst/>
+          </a:prstGeom>
+          <a:noFill/>
+          <a:ln/>
+        </p:spPr>
+        <p:txBody>
+          <a:bodyPr wrap="square" lIns="0" tIns="0" rIns="0" bIns="0" rtlCol="0" anchor="ctr"/>
+          <a:lstStyle/>
+          <a:p>
+            <a:pPr indent="0" marL="0">
+              <a:buNone/>
+            </a:pPr>
+            <a:r>
+              <a:rPr lang="en-US" sz="2200" b="1" dirty="0">
+                <a:solidFill>
+                  <a:srgbClr val="FFFFFF"/>
+                </a:solidFill>
+                <a:latin typeface="Calibri" pitchFamily="34" charset="0"/>
+                <a:ea typeface="Calibri" pitchFamily="34" charset="-122"/>
+                <a:cs typeface="Calibri" pitchFamily="34" charset="-120"/>
+              </a:rPr>
+              <a:t>🔍  Edit &amp; Revise</a:t>
+            </a:r>
+            <a:endParaRPr lang="en-US" sz="2200" dirty="0"/>
+          </a:p>
+        </p:txBody>
+      </p:sp>
+      <p:sp>
+        <p:nvSpPr>
+          <p:cNvPr id="4" name="Text 2"/>
+          <p:cNvSpPr/>
+          <p:nvPr/>
+        </p:nvSpPr>
+        <p:spPr>
+          <a:xfrm>
+            <a:off x="365760" y="868680"/>
+            <a:ext cx="8412480" cy="457200"/>
+          </a:xfrm>
+          <a:prstGeom prst="rect">
+            <a:avLst/>
+          </a:prstGeom>
+          <a:noFill/>
+          <a:ln/>
+        </p:spPr>
+        <p:txBody>
+          <a:bodyPr wrap="square" lIns="0" tIns="0" rIns="0" bIns="0" rtlCol="0" anchor="ctr"/>
+          <a:lstStyle/>
+          <a:p>
+            <a:pPr indent="0" marL="0">
+              <a:buNone/>
+            </a:pPr>
+            <a:r>
+              <a:rPr lang="en-US" sz="2400" b="1" dirty="0">
                 <a:solidFill>
                   <a:srgbClr val="0E1C42"/>
                 </a:solidFill>
@@ -3759,38 +4615,38 @@
                 <a:ea typeface="Calibri" pitchFamily="34" charset="-122"/>
                 <a:cs typeface="Calibri" pitchFamily="34" charset="-120"/>
               </a:rPr>
-              <a:t>Edit &amp; Revise</a:t>
-            </a:r>
-            <a:endParaRPr lang="en-US" sz="3200" dirty="0"/>
-          </a:p>
-        </p:txBody>
-      </p:sp>
-      <p:sp>
-        <p:nvSpPr>
-          <p:cNvPr id="4" name="Text 2"/>
-          <p:cNvSpPr/>
-          <p:nvPr/>
-        </p:nvSpPr>
-        <p:spPr>
-          <a:xfrm>
-            <a:off x="914400" y="1508760"/>
-            <a:ext cx="7315200" cy="457200"/>
-          </a:xfrm>
-          <a:prstGeom prst="rect">
-            <a:avLst/>
-          </a:prstGeom>
-          <a:noFill/>
-          <a:ln/>
-        </p:spPr>
-        <p:txBody>
-          <a:bodyPr wrap="square" lIns="0" tIns="0" rIns="0" bIns="0" rtlCol="0" anchor="ctr"/>
-          <a:lstStyle/>
-          <a:p>
-            <a:pPr algn="ctr" indent="0" marL="0">
-              <a:buNone/>
-            </a:pPr>
-            <a:r>
-              <a:rPr lang="en-US" sz="1600" dirty="0">
+              <a:t>1 minute — pick ONE thing to fix.</a:t>
+            </a:r>
+            <a:endParaRPr lang="en-US" sz="2400" dirty="0"/>
+          </a:p>
+        </p:txBody>
+      </p:sp>
+      <p:sp>
+        <p:nvSpPr>
+          <p:cNvPr id="5" name="Text 3"/>
+          <p:cNvSpPr/>
+          <p:nvPr/>
+        </p:nvSpPr>
+        <p:spPr>
+          <a:xfrm>
+            <a:off x="365760" y="1417320"/>
+            <a:ext cx="8229600" cy="237744"/>
+          </a:xfrm>
+          <a:prstGeom prst="rect">
+            <a:avLst/>
+          </a:prstGeom>
+          <a:noFill/>
+          <a:ln/>
+        </p:spPr>
+        <p:txBody>
+          <a:bodyPr wrap="square" lIns="0" tIns="0" rIns="0" bIns="0" rtlCol="0" anchor="ctr"/>
+          <a:lstStyle/>
+          <a:p>
+            <a:pPr indent="0" marL="0">
+              <a:buNone/>
+            </a:pPr>
+            <a:r>
+              <a:rPr lang="en-US" sz="1100" b="1" spc="100" kern="0" dirty="0">
                 <a:solidFill>
                   <a:srgbClr val="34B76F"/>
                 </a:solidFill>
@@ -3798,26 +4654,26 @@
                 <a:ea typeface="Calibri" pitchFamily="34" charset="-122"/>
                 <a:cs typeface="Calibri" pitchFamily="34" charset="-120"/>
               </a:rPr>
-              <a:t>1 minute — pick ONE thing to fix</a:t>
-            </a:r>
-            <a:endParaRPr lang="en-US" sz="1600" dirty="0"/>
-          </a:p>
-        </p:txBody>
-      </p:sp>
-      <p:sp>
-        <p:nvSpPr>
-          <p:cNvPr id="5" name="Shape 3"/>
-          <p:cNvSpPr/>
-          <p:nvPr/>
-        </p:nvSpPr>
-        <p:spPr>
-          <a:xfrm>
-            <a:off x="1371600" y="2103120"/>
-            <a:ext cx="6400800" cy="640080"/>
+              <a:t>TODAY'S EDIT FOCUS</a:t>
+            </a:r>
+            <a:endParaRPr lang="en-US" sz="1100" dirty="0"/>
+          </a:p>
+        </p:txBody>
+      </p:sp>
+      <p:sp>
+        <p:nvSpPr>
+          <p:cNvPr id="6" name="Shape 4"/>
+          <p:cNvSpPr/>
+          <p:nvPr/>
+        </p:nvSpPr>
+        <p:spPr>
+          <a:xfrm>
+            <a:off x="365760" y="1691640"/>
+            <a:ext cx="8412480" cy="777240"/>
           </a:xfrm>
           <a:prstGeom prst="roundRect">
             <a:avLst>
-              <a:gd name="adj" fmla="val 14286"/>
+              <a:gd name="adj" fmla="val 11765"/>
             </a:avLst>
           </a:prstGeom>
           <a:solidFill>
@@ -3840,44 +4696,30 @@
       </p:sp>
       <p:sp>
         <p:nvSpPr>
-          <p:cNvPr id="6" name="Text 4"/>
-          <p:cNvSpPr/>
-          <p:nvPr/>
-        </p:nvSpPr>
-        <p:spPr>
-          <a:xfrm>
-            <a:off x="1554480" y="2148840"/>
-            <a:ext cx="6035040" cy="548640"/>
-          </a:xfrm>
-          <a:prstGeom prst="rect">
-            <a:avLst/>
-          </a:prstGeom>
-          <a:noFill/>
-          <a:ln/>
-        </p:spPr>
-        <p:txBody>
-          <a:bodyPr wrap="square" lIns="0" tIns="0" rIns="0" bIns="0" rtlCol="0" anchor="ctr"/>
-          <a:lstStyle/>
-          <a:p>
-            <a:pPr indent="0" marL="0">
-              <a:buNone/>
-            </a:pPr>
-            <a:r>
-              <a:rPr lang="en-US" sz="1400" b="1" dirty="0">
-                <a:solidFill>
-                  <a:srgbClr val="34B76F"/>
-                </a:solidFill>
-                <a:latin typeface="Calibri" pitchFamily="34" charset="0"/>
-                <a:ea typeface="Calibri" pitchFamily="34" charset="-122"/>
-                <a:cs typeface="Calibri" pitchFamily="34" charset="-120"/>
-              </a:rPr>
-              <a:t>Today's check: </a:t>
-            </a:r>
-            <a:pPr indent="0" marL="0">
-              <a:buNone/>
-            </a:pPr>
-            <a:r>
-              <a:rPr lang="en-US" sz="1400" dirty="0">
+          <p:cNvPr id="7" name="Text 5"/>
+          <p:cNvSpPr/>
+          <p:nvPr/>
+        </p:nvSpPr>
+        <p:spPr>
+          <a:xfrm>
+            <a:off x="594360" y="1819656"/>
+            <a:ext cx="7955280" cy="521208"/>
+          </a:xfrm>
+          <a:prstGeom prst="rect">
+            <a:avLst/>
+          </a:prstGeom>
+          <a:noFill/>
+          <a:ln/>
+        </p:spPr>
+        <p:txBody>
+          <a:bodyPr wrap="square" lIns="0" tIns="0" rIns="0" bIns="0" rtlCol="0" anchor="ctr"/>
+          <a:lstStyle/>
+          <a:p>
+            <a:pPr indent="0" marL="0">
+              <a:buNone/>
+            </a:pPr>
+            <a:r>
+              <a:rPr lang="en-US" sz="1700" dirty="0">
                 <a:solidFill>
                   <a:srgbClr val="1E293B"/>
                 </a:solidFill>
@@ -3885,40 +4727,11 @@
                 <a:ea typeface="Calibri" pitchFamily="34" charset="-122"/>
                 <a:cs typeface="Calibri" pitchFamily="34" charset="-120"/>
               </a:rPr>
-              <a:t>Did I explain what I think the words mean?</a:t>
-            </a:r>
-            <a:endParaRPr lang="en-US" sz="1400" dirty="0"/>
-          </a:p>
-        </p:txBody>
-      </p:sp>
-      <p:sp>
-        <p:nvSpPr>
-          <p:cNvPr id="7" name="Shape 5"/>
-          <p:cNvSpPr/>
-          <p:nvPr/>
-        </p:nvSpPr>
-        <p:spPr>
-          <a:xfrm>
-            <a:off x="1371600" y="2926080"/>
-            <a:ext cx="6400800" cy="1463040"/>
-          </a:xfrm>
-          <a:prstGeom prst="roundRect">
-            <a:avLst>
-              <a:gd name="adj" fmla="val 6250"/>
-            </a:avLst>
-          </a:prstGeom>
-          <a:solidFill>
-            <a:srgbClr val="FFFFFF"/>
-          </a:solidFill>
-          <a:ln/>
-          <a:effectLst>
-            <a:outerShdw sx="100000" sy="100000" kx="0" ky="0" algn="bl" rotWithShape="0" blurRad="101600" dist="38100" dir="2700000">
-              <a:srgbClr val="000000">
-                <a:alpha val="12000"/>
-              </a:srgbClr>
-            </a:outerShdw>
-          </a:effectLst>
-        </p:spPr>
+              <a:t>Did I put quotation marks around the words a person said?</a:t>
+            </a:r>
+            <a:endParaRPr lang="en-US" sz="1700" dirty="0"/>
+          </a:p>
+        </p:txBody>
       </p:sp>
       <p:sp>
         <p:nvSpPr>
@@ -3928,45 +4741,24 @@
         </p:nvSpPr>
         <p:spPr>
           <a:xfrm>
-            <a:off x="1554480" y="3017520"/>
-            <a:ext cx="6035040" cy="1280160"/>
-          </a:xfrm>
-          <a:prstGeom prst="rect">
-            <a:avLst/>
-          </a:prstGeom>
-          <a:noFill/>
-          <a:ln/>
-        </p:spPr>
-        <p:txBody>
-          <a:bodyPr wrap="square" lIns="0" tIns="0" rIns="0" bIns="0" rtlCol="0" anchor="t"/>
-          <a:lstStyle/>
-          <a:p>
-            <a:pPr indent="0" marL="0">
-              <a:spcAft>
-                <a:spcPts val="200"/>
-              </a:spcAft>
-              <a:buNone/>
-            </a:pPr>
-            <a:r>
-              <a:rPr lang="en-US" sz="1300" b="1" dirty="0">
-                <a:solidFill>
-                  <a:srgbClr val="0E1C42"/>
-                </a:solidFill>
-                <a:latin typeface="Calibri" pitchFamily="34" charset="0"/>
-                <a:ea typeface="Calibri" pitchFamily="34" charset="-122"/>
-                <a:cs typeface="Calibri" pitchFamily="34" charset="-120"/>
-              </a:rPr>
-              <a:t>Quick check:
-</a:t>
-            </a:r>
-            <a:pPr indent="0" marL="0">
-              <a:spcAft>
-                <a:spcPts val="200"/>
-              </a:spcAft>
-              <a:buNone/>
-            </a:pPr>
-            <a:r>
-              <a:rPr lang="en-US" sz="1200" dirty="0">
+            <a:off x="365760" y="2651760"/>
+            <a:ext cx="8412480" cy="365760"/>
+          </a:xfrm>
+          <a:prstGeom prst="rect">
+            <a:avLst/>
+          </a:prstGeom>
+          <a:noFill/>
+          <a:ln/>
+        </p:spPr>
+        <p:txBody>
+          <a:bodyPr wrap="square" lIns="0" tIns="0" rIns="0" bIns="0" rtlCol="0" anchor="ctr"/>
+          <a:lstStyle/>
+          <a:p>
+            <a:pPr indent="0" marL="0">
+              <a:buNone/>
+            </a:pPr>
+            <a:r>
+              <a:rPr lang="en-US" sz="1500" b="1" dirty="0">
                 <a:solidFill>
                   <a:srgbClr val="1E293B"/>
                 </a:solidFill>
@@ -3974,17 +4766,13 @@
                 <a:ea typeface="Calibri" pitchFamily="34" charset="-122"/>
                 <a:cs typeface="Calibri" pitchFamily="34" charset="-120"/>
               </a:rPr>
-              <a:t>□ Capital letters at the start of every sentence
-</a:t>
-            </a:r>
-            <a:pPr indent="0" marL="0">
-              <a:spcAft>
-                <a:spcPts val="200"/>
-              </a:spcAft>
-              <a:buNone/>
-            </a:pPr>
-            <a:r>
-              <a:rPr lang="en-US" sz="1200" dirty="0">
+              <a:t>Quick check:  </a:t>
+            </a:r>
+            <a:pPr indent="0" marL="0">
+              <a:buNone/>
+            </a:pPr>
+            <a:r>
+              <a:rPr lang="en-US" sz="1500" dirty="0">
                 <a:solidFill>
                   <a:srgbClr val="1E293B"/>
                 </a:solidFill>
@@ -3992,45 +4780,9 @@
                 <a:ea typeface="Calibri" pitchFamily="34" charset="-122"/>
                 <a:cs typeface="Calibri" pitchFamily="34" charset="-120"/>
               </a:rPr>
-              <a:t>□ End punctuation ( .  ?  ! )
-</a:t>
-            </a:r>
-            <a:pPr indent="0" marL="0">
-              <a:spcAft>
-                <a:spcPts val="200"/>
-              </a:spcAft>
-              <a:buNone/>
-            </a:pPr>
-            <a:r>
-              <a:rPr lang="en-US" sz="1200" dirty="0">
-                <a:solidFill>
-                  <a:srgbClr val="1E293B"/>
-                </a:solidFill>
-                <a:latin typeface="Calibri" pitchFamily="34" charset="0"/>
-                <a:ea typeface="Calibri" pitchFamily="34" charset="-122"/>
-                <a:cs typeface="Calibri" pitchFamily="34" charset="-120"/>
-              </a:rPr>
-              <a:t>□ Spelling — circle any words that look wrong
-</a:t>
-            </a:r>
-            <a:pPr indent="0" marL="0">
-              <a:spcAft>
-                <a:spcPts val="200"/>
-              </a:spcAft>
-              <a:buNone/>
-            </a:pPr>
-            <a:r>
-              <a:rPr lang="en-US" sz="1200" dirty="0">
-                <a:solidFill>
-                  <a:srgbClr val="1E293B"/>
-                </a:solidFill>
-                <a:latin typeface="Calibri" pitchFamily="34" charset="0"/>
-                <a:ea typeface="Calibri" pitchFamily="34" charset="-122"/>
-                <a:cs typeface="Calibri" pitchFamily="34" charset="-120"/>
-              </a:rPr>
-              <a:t>□ Read it quietly to yourself — does it sound right?</a:t>
-            </a:r>
-            <a:endParaRPr lang="en-US" sz="1300" dirty="0"/>
+              <a:t>capitals  ·  end punctuation  ·  circle a word you are unsure of  ·  read it aloud</a:t>
+            </a:r>
+            <a:endParaRPr lang="en-US" sz="1500" dirty="0"/>
           </a:p>
         </p:txBody>
       </p:sp>
@@ -4068,39 +4820,23 @@
       </p:grpSpPr>
       <p:sp>
         <p:nvSpPr>
-          <p:cNvPr id="2" name="Text 0"/>
-          <p:cNvSpPr/>
-          <p:nvPr/>
-        </p:nvSpPr>
-        <p:spPr>
-          <a:xfrm>
-            <a:off x="3657600" y="457200"/>
-            <a:ext cx="1828800" cy="731520"/>
-          </a:xfrm>
-          <a:prstGeom prst="rect">
-            <a:avLst/>
-          </a:prstGeom>
-          <a:noFill/>
-          <a:ln/>
-        </p:spPr>
-        <p:txBody>
-          <a:bodyPr wrap="square" lIns="0" tIns="0" rIns="0" bIns="0" rtlCol="0" anchor="ctr"/>
-          <a:lstStyle/>
-          <a:p>
-            <a:pPr algn="ctr" indent="0" marL="0">
-              <a:buNone/>
-            </a:pPr>
-            <a:r>
-              <a:rPr lang="en-US" sz="4400" dirty="0">
-                <a:solidFill>
-                  <a:srgbClr val="000000"/>
-                </a:solidFill>
-              </a:rPr>
-              <a:t>🗣️</a:t>
-            </a:r>
-            <a:endParaRPr lang="en-US" sz="4400" dirty="0"/>
-          </a:p>
-        </p:txBody>
+          <p:cNvPr id="2" name="Shape 0"/>
+          <p:cNvSpPr/>
+          <p:nvPr/>
+        </p:nvSpPr>
+        <p:spPr>
+          <a:xfrm>
+            <a:off x="0" y="0"/>
+            <a:ext cx="9144000" cy="566928"/>
+          </a:xfrm>
+          <a:prstGeom prst="rect">
+            <a:avLst/>
+          </a:prstGeom>
+          <a:solidFill>
+            <a:srgbClr val="55C8E8"/>
+          </a:solidFill>
+          <a:ln/>
+        </p:spPr>
       </p:sp>
       <p:sp>
         <p:nvSpPr>
@@ -4110,24 +4846,63 @@
         </p:nvSpPr>
         <p:spPr>
           <a:xfrm>
-            <a:off x="914400" y="1097280"/>
-            <a:ext cx="7315200" cy="640080"/>
-          </a:xfrm>
-          <a:prstGeom prst="rect">
-            <a:avLst/>
-          </a:prstGeom>
-          <a:noFill/>
-          <a:ln/>
-        </p:spPr>
-        <p:txBody>
-          <a:bodyPr wrap="square" lIns="0" tIns="0" rIns="0" bIns="0" rtlCol="0" anchor="ctr"/>
-          <a:lstStyle/>
-          <a:p>
-            <a:pPr algn="ctr" indent="0" marL="0">
-              <a:buNone/>
-            </a:pPr>
-            <a:r>
-              <a:rPr lang="en-US" sz="3400" b="1" dirty="0">
+            <a:off x="365760" y="54864"/>
+            <a:ext cx="8412480" cy="457200"/>
+          </a:xfrm>
+          <a:prstGeom prst="rect">
+            <a:avLst/>
+          </a:prstGeom>
+          <a:noFill/>
+          <a:ln/>
+        </p:spPr>
+        <p:txBody>
+          <a:bodyPr wrap="square" lIns="0" tIns="0" rIns="0" bIns="0" rtlCol="0" anchor="ctr"/>
+          <a:lstStyle/>
+          <a:p>
+            <a:pPr indent="0" marL="0">
+              <a:buNone/>
+            </a:pPr>
+            <a:r>
+              <a:rPr lang="en-US" sz="2200" b="1" dirty="0">
+                <a:solidFill>
+                  <a:srgbClr val="FFFFFF"/>
+                </a:solidFill>
+                <a:latin typeface="Calibri" pitchFamily="34" charset="0"/>
+                <a:ea typeface="Calibri" pitchFamily="34" charset="-122"/>
+                <a:cs typeface="Calibri" pitchFamily="34" charset="-120"/>
+              </a:rPr>
+              <a:t>🗣️  Share Time</a:t>
+            </a:r>
+            <a:endParaRPr lang="en-US" sz="2200" dirty="0"/>
+          </a:p>
+        </p:txBody>
+      </p:sp>
+      <p:sp>
+        <p:nvSpPr>
+          <p:cNvPr id="4" name="Text 2"/>
+          <p:cNvSpPr/>
+          <p:nvPr/>
+        </p:nvSpPr>
+        <p:spPr>
+          <a:xfrm>
+            <a:off x="365760" y="1005840"/>
+            <a:ext cx="8412480" cy="548640"/>
+          </a:xfrm>
+          <a:prstGeom prst="rect">
+            <a:avLst/>
+          </a:prstGeom>
+          <a:noFill/>
+          <a:ln/>
+        </p:spPr>
+        <p:txBody>
+          <a:bodyPr wrap="square" lIns="0" tIns="0" rIns="0" bIns="0" rtlCol="0" anchor="ctr"/>
+          <a:lstStyle/>
+          <a:p>
+            <a:pPr indent="0" marL="0">
+              <a:buNone/>
+            </a:pPr>
+            <a:r>
+              <a:rPr lang="en-US" sz="2600" b="1" dirty="0">
                 <a:solidFill>
                   <a:srgbClr val="0E1C42"/>
                 </a:solidFill>
@@ -4135,191 +4910,48 @@
                 <a:ea typeface="Calibri" pitchFamily="34" charset="-122"/>
                 <a:cs typeface="Calibri" pitchFamily="34" charset="-120"/>
               </a:rPr>
-              <a:t>Share Time</a:t>
-            </a:r>
-            <a:endParaRPr lang="en-US" sz="3400" dirty="0"/>
-          </a:p>
-        </p:txBody>
-      </p:sp>
-      <p:sp>
-        <p:nvSpPr>
-          <p:cNvPr id="4" name="Text 2"/>
-          <p:cNvSpPr/>
-          <p:nvPr/>
-        </p:nvSpPr>
-        <p:spPr>
-          <a:xfrm>
-            <a:off x="914400" y="1737360"/>
-            <a:ext cx="7315200" cy="457200"/>
-          </a:xfrm>
-          <a:prstGeom prst="rect">
-            <a:avLst/>
-          </a:prstGeom>
-          <a:noFill/>
-          <a:ln/>
-        </p:spPr>
-        <p:txBody>
-          <a:bodyPr wrap="square" lIns="0" tIns="0" rIns="0" bIns="0" rtlCol="0" anchor="ctr"/>
-          <a:lstStyle/>
-          <a:p>
-            <a:pPr algn="ctr" indent="0" marL="0">
+              <a:t>3 minutes — let's hear your writing!</a:t>
+            </a:r>
+            <a:endParaRPr lang="en-US" sz="2600" dirty="0"/>
+          </a:p>
+        </p:txBody>
+      </p:sp>
+      <p:sp>
+        <p:nvSpPr>
+          <p:cNvPr id="5" name="Text 3"/>
+          <p:cNvSpPr/>
+          <p:nvPr/>
+        </p:nvSpPr>
+        <p:spPr>
+          <a:xfrm>
+            <a:off x="365760" y="1691640"/>
+            <a:ext cx="8412480" cy="457200"/>
+          </a:xfrm>
+          <a:prstGeom prst="rect">
+            <a:avLst/>
+          </a:prstGeom>
+          <a:noFill/>
+          <a:ln/>
+        </p:spPr>
+        <p:txBody>
+          <a:bodyPr wrap="square" lIns="0" tIns="0" rIns="0" bIns="0" rtlCol="0" anchor="ctr"/>
+          <a:lstStyle/>
+          <a:p>
+            <a:pPr indent="0" marL="0">
               <a:buNone/>
             </a:pPr>
             <a:r>
               <a:rPr lang="en-US" sz="1700" dirty="0">
                 <a:solidFill>
-                  <a:srgbClr val="55C8E8"/>
-                </a:solidFill>
-                <a:latin typeface="Calibri" pitchFamily="34" charset="0"/>
-                <a:ea typeface="Calibri" pitchFamily="34" charset="-122"/>
-                <a:cs typeface="Calibri" pitchFamily="34" charset="-120"/>
-              </a:rPr>
-              <a:t>3 minutes — let's hear your writing!</a:t>
+                  <a:srgbClr val="1E293B"/>
+                </a:solidFill>
+                <a:latin typeface="Calibri" pitchFamily="34" charset="0"/>
+                <a:ea typeface="Calibri" pitchFamily="34" charset="-122"/>
+                <a:cs typeface="Calibri" pitchFamily="34" charset="-120"/>
+              </a:rPr>
+              <a:t>Raise your hand  ·  paste it in the chat  ·  or hold your paper up to the camera</a:t>
             </a:r>
             <a:endParaRPr lang="en-US" sz="1700" dirty="0"/>
-          </a:p>
-        </p:txBody>
-      </p:sp>
-      <p:sp>
-        <p:nvSpPr>
-          <p:cNvPr id="5" name="Shape 3"/>
-          <p:cNvSpPr/>
-          <p:nvPr/>
-        </p:nvSpPr>
-        <p:spPr>
-          <a:xfrm>
-            <a:off x="1828800" y="2468880"/>
-            <a:ext cx="5486400" cy="1645920"/>
-          </a:xfrm>
-          <a:prstGeom prst="roundRect">
-            <a:avLst>
-              <a:gd name="adj" fmla="val 6667"/>
-            </a:avLst>
-          </a:prstGeom>
-          <a:solidFill>
-            <a:srgbClr val="FFFFFF"/>
-          </a:solidFill>
-          <a:ln/>
-          <a:effectLst>
-            <a:outerShdw sx="100000" sy="100000" kx="0" ky="0" algn="bl" rotWithShape="0" blurRad="101600" dist="38100" dir="2700000">
-              <a:srgbClr val="000000">
-                <a:alpha val="12000"/>
-              </a:srgbClr>
-            </a:outerShdw>
-          </a:effectLst>
-        </p:spPr>
-      </p:sp>
-      <p:sp>
-        <p:nvSpPr>
-          <p:cNvPr id="6" name="Text 4"/>
-          <p:cNvSpPr/>
-          <p:nvPr/>
-        </p:nvSpPr>
-        <p:spPr>
-          <a:xfrm>
-            <a:off x="2103120" y="2560320"/>
-            <a:ext cx="4937760" cy="1463040"/>
-          </a:xfrm>
-          <a:prstGeom prst="rect">
-            <a:avLst/>
-          </a:prstGeom>
-          <a:noFill/>
-          <a:ln/>
-        </p:spPr>
-        <p:txBody>
-          <a:bodyPr wrap="square" lIns="0" tIns="0" rIns="0" bIns="0" rtlCol="0" anchor="t"/>
-          <a:lstStyle/>
-          <a:p>
-            <a:pPr indent="0" marL="0">
-              <a:spcAft>
-                <a:spcPts val="200"/>
-              </a:spcAft>
-              <a:buNone/>
-            </a:pPr>
-            <a:r>
-              <a:rPr lang="en-US" sz="1400" b="1" dirty="0">
-                <a:solidFill>
-                  <a:srgbClr val="0E1C42"/>
-                </a:solidFill>
-                <a:latin typeface="Calibri" pitchFamily="34" charset="0"/>
-                <a:ea typeface="Calibri" pitchFamily="34" charset="-122"/>
-                <a:cs typeface="Calibri" pitchFamily="34" charset="-120"/>
-              </a:rPr>
-              <a:t>How to share:
-</a:t>
-            </a:r>
-            <a:pPr indent="0" marL="0">
-              <a:spcAft>
-                <a:spcPts val="200"/>
-              </a:spcAft>
-              <a:buNone/>
-            </a:pPr>
-            <a:r>
-              <a:rPr lang="en-US" sz="1300" dirty="0">
-                <a:solidFill>
-                  <a:srgbClr val="1E293B"/>
-                </a:solidFill>
-                <a:latin typeface="Calibri" pitchFamily="34" charset="0"/>
-                <a:ea typeface="Calibri" pitchFamily="34" charset="-122"/>
-                <a:cs typeface="Calibri" pitchFamily="34" charset="-120"/>
-              </a:rPr>
-              <a:t>✋ Raise your hand if you want to read yours aloud
-</a:t>
-            </a:r>
-            <a:pPr indent="0" marL="0">
-              <a:spcAft>
-                <a:spcPts val="200"/>
-              </a:spcAft>
-              <a:buNone/>
-            </a:pPr>
-            <a:r>
-              <a:rPr lang="en-US" sz="1300" dirty="0">
-                <a:solidFill>
-                  <a:srgbClr val="1E293B"/>
-                </a:solidFill>
-                <a:latin typeface="Calibri" pitchFamily="34" charset="0"/>
-                <a:ea typeface="Calibri" pitchFamily="34" charset="-122"/>
-                <a:cs typeface="Calibri" pitchFamily="34" charset="-120"/>
-              </a:rPr>
-              <a:t>💬 Or paste your writing in the chat
-</a:t>
-            </a:r>
-            <a:pPr indent="0" marL="0">
-              <a:spcAft>
-                <a:spcPts val="200"/>
-              </a:spcAft>
-              <a:buNone/>
-            </a:pPr>
-            <a:r>
-              <a:rPr lang="en-US" sz="1300" dirty="0">
-                <a:solidFill>
-                  <a:srgbClr val="1E293B"/>
-                </a:solidFill>
-                <a:latin typeface="Calibri" pitchFamily="34" charset="0"/>
-                <a:ea typeface="Calibri" pitchFamily="34" charset="-122"/>
-                <a:cs typeface="Calibri" pitchFamily="34" charset="-120"/>
-              </a:rPr>
-              <a:t>👂 Listen respectfully when others share
-</a:t>
-            </a:r>
-            <a:pPr indent="0" marL="0">
-              <a:spcAft>
-                <a:spcPts val="200"/>
-              </a:spcAft>
-              <a:buNone/>
-            </a:pPr>
-            <a:r>
-              <a:rPr lang="en-US" sz="1200" i="1" dirty="0">
-                <a:solidFill>
-                  <a:srgbClr val="64748B"/>
-                </a:solidFill>
-                <a:latin typeface="Calibri" pitchFamily="34" charset="0"/>
-                <a:ea typeface="Calibri" pitchFamily="34" charset="-122"/>
-                <a:cs typeface="Calibri" pitchFamily="34" charset="-120"/>
-              </a:rPr>
-              <a:t>Every writer's ideas matter — there are no wrong answers.</a:t>
-            </a:r>
-            <a:endParaRPr lang="en-US" sz="1400" dirty="0"/>
           </a:p>
         </p:txBody>
       </p:sp>
@@ -4337,7 +4969,7 @@
     <p:bg>
       <p:bgPr>
         <a:solidFill>
-          <a:srgbClr val="E5F7FC"/>
+          <a:srgbClr val="F8FAFC"/>
         </a:solidFill>
       </p:bgPr>
     </p:bg>
@@ -4357,81 +4989,17 @@
       </p:grpSpPr>
       <p:sp>
         <p:nvSpPr>
-          <p:cNvPr id="2" name="Text 0"/>
-          <p:cNvSpPr/>
-          <p:nvPr/>
-        </p:nvSpPr>
-        <p:spPr>
-          <a:xfrm>
-            <a:off x="365760" y="164592"/>
-            <a:ext cx="5943600" cy="566928"/>
-          </a:xfrm>
-          <a:prstGeom prst="rect">
-            <a:avLst/>
-          </a:prstGeom>
-          <a:noFill/>
-          <a:ln/>
-        </p:spPr>
-        <p:txBody>
-          <a:bodyPr wrap="square" lIns="0" tIns="0" rIns="0" bIns="0" rtlCol="0" anchor="ctr"/>
-          <a:lstStyle/>
-          <a:p>
-            <a:pPr algn="l" indent="0" marL="0">
-              <a:buNone/>
-            </a:pPr>
-            <a:r>
-              <a:rPr lang="en-US" sz="2800" b="1" dirty="0">
-                <a:solidFill>
-                  <a:srgbClr val="0E1C42"/>
-                </a:solidFill>
-                <a:latin typeface="Calibri" pitchFamily="34" charset="0"/>
-                <a:ea typeface="Calibri" pitchFamily="34" charset="-122"/>
-                <a:cs typeface="Calibri" pitchFamily="34" charset="-120"/>
-              </a:rPr>
-              <a:t>💡 Today's Focus</a:t>
-            </a:r>
-            <a:endParaRPr lang="en-US" sz="2800" dirty="0"/>
-          </a:p>
-        </p:txBody>
-      </p:sp>
-      <p:sp>
-        <p:nvSpPr>
-          <p:cNvPr id="3" name="Shape 1"/>
-          <p:cNvSpPr/>
-          <p:nvPr/>
-        </p:nvSpPr>
-        <p:spPr>
-          <a:xfrm>
-            <a:off x="365760" y="749808"/>
-            <a:ext cx="8412480" cy="0"/>
-          </a:xfrm>
-          <a:prstGeom prst="line">
-            <a:avLst/>
-          </a:prstGeom>
-          <a:noFill/>
-          <a:ln w="19050">
-            <a:solidFill>
-              <a:srgbClr val="4A90D9"/>
-            </a:solidFill>
-            <a:prstDash val="solid"/>
-          </a:ln>
-        </p:spPr>
-      </p:sp>
-      <p:sp>
-        <p:nvSpPr>
-          <p:cNvPr id="4" name="Shape 2"/>
-          <p:cNvSpPr/>
-          <p:nvPr/>
-        </p:nvSpPr>
-        <p:spPr>
-          <a:xfrm>
-            <a:off x="6492240" y="173736"/>
-            <a:ext cx="2286000" cy="502920"/>
-          </a:xfrm>
-          <a:prstGeom prst="roundRect">
-            <a:avLst>
-              <a:gd name="adj" fmla="val 21818"/>
-            </a:avLst>
+          <p:cNvPr id="2" name="Shape 0"/>
+          <p:cNvSpPr/>
+          <p:nvPr/>
+        </p:nvSpPr>
+        <p:spPr>
+          <a:xfrm>
+            <a:off x="0" y="0"/>
+            <a:ext cx="9144000" cy="566928"/>
+          </a:xfrm>
+          <a:prstGeom prst="rect">
+            <a:avLst/>
           </a:prstGeom>
           <a:solidFill>
             <a:srgbClr val="4A90D9"/>
@@ -4441,30 +5009,108 @@
       </p:sp>
       <p:sp>
         <p:nvSpPr>
+          <p:cNvPr id="3" name="Text 1"/>
+          <p:cNvSpPr/>
+          <p:nvPr/>
+        </p:nvSpPr>
+        <p:spPr>
+          <a:xfrm>
+            <a:off x="365760" y="54864"/>
+            <a:ext cx="8412480" cy="457200"/>
+          </a:xfrm>
+          <a:prstGeom prst="rect">
+            <a:avLst/>
+          </a:prstGeom>
+          <a:noFill/>
+          <a:ln/>
+        </p:spPr>
+        <p:txBody>
+          <a:bodyPr wrap="square" lIns="0" tIns="0" rIns="0" bIns="0" rtlCol="0" anchor="ctr"/>
+          <a:lstStyle/>
+          <a:p>
+            <a:pPr indent="0" marL="0">
+              <a:buNone/>
+            </a:pPr>
+            <a:r>
+              <a:rPr lang="en-US" sz="2200" b="1" dirty="0">
+                <a:solidFill>
+                  <a:srgbClr val="FFFFFF"/>
+                </a:solidFill>
+                <a:latin typeface="Calibri" pitchFamily="34" charset="0"/>
+                <a:ea typeface="Calibri" pitchFamily="34" charset="-122"/>
+                <a:cs typeface="Calibri" pitchFamily="34" charset="-120"/>
+              </a:rPr>
+              <a:t>📖  Today</a:t>
+            </a:r>
+            <a:endParaRPr lang="en-US" sz="2200" dirty="0"/>
+          </a:p>
+        </p:txBody>
+      </p:sp>
+      <p:sp>
+        <p:nvSpPr>
+          <p:cNvPr id="4" name="Text 2"/>
+          <p:cNvSpPr/>
+          <p:nvPr/>
+        </p:nvSpPr>
+        <p:spPr>
+          <a:xfrm>
+            <a:off x="365760" y="777240"/>
+            <a:ext cx="8229600" cy="237744"/>
+          </a:xfrm>
+          <a:prstGeom prst="rect">
+            <a:avLst/>
+          </a:prstGeom>
+          <a:noFill/>
+          <a:ln/>
+        </p:spPr>
+        <p:txBody>
+          <a:bodyPr wrap="square" lIns="0" tIns="0" rIns="0" bIns="0" rtlCol="0" anchor="ctr"/>
+          <a:lstStyle/>
+          <a:p>
+            <a:pPr indent="0" marL="0">
+              <a:buNone/>
+            </a:pPr>
+            <a:r>
+              <a:rPr lang="en-US" sz="1100" b="1" spc="100" kern="0" dirty="0">
+                <a:solidFill>
+                  <a:srgbClr val="8B6FC0"/>
+                </a:solidFill>
+                <a:latin typeface="Calibri" pitchFamily="34" charset="0"/>
+                <a:ea typeface="Calibri" pitchFamily="34" charset="-122"/>
+                <a:cs typeface="Calibri" pitchFamily="34" charset="-120"/>
+              </a:rPr>
+              <a:t>READING</a:t>
+            </a:r>
+            <a:endParaRPr lang="en-US" sz="1100" dirty="0"/>
+          </a:p>
+        </p:txBody>
+      </p:sp>
+      <p:sp>
+        <p:nvSpPr>
           <p:cNvPr id="5" name="Text 3"/>
           <p:cNvSpPr/>
           <p:nvPr/>
         </p:nvSpPr>
         <p:spPr>
           <a:xfrm>
-            <a:off x="6492240" y="173736"/>
-            <a:ext cx="2286000" cy="502920"/>
-          </a:xfrm>
-          <a:prstGeom prst="rect">
-            <a:avLst/>
-          </a:prstGeom>
-          <a:noFill/>
-          <a:ln/>
-        </p:spPr>
-        <p:txBody>
-          <a:bodyPr wrap="square" lIns="0" tIns="0" rIns="0" bIns="0" rtlCol="0" anchor="ctr"/>
-          <a:lstStyle/>
-          <a:p>
-            <a:pPr algn="ctr" indent="0" marL="0">
-              <a:buNone/>
-            </a:pPr>
-            <a:r>
-              <a:rPr lang="en-US" sz="1100" b="1" dirty="0">
+            <a:off x="365760" y="1014984"/>
+            <a:ext cx="8412480" cy="365760"/>
+          </a:xfrm>
+          <a:prstGeom prst="rect">
+            <a:avLst/>
+          </a:prstGeom>
+          <a:noFill/>
+          <a:ln/>
+        </p:spPr>
+        <p:txBody>
+          <a:bodyPr wrap="square" lIns="0" tIns="0" rIns="0" bIns="0" rtlCol="0" anchor="ctr"/>
+          <a:lstStyle/>
+          <a:p>
+            <a:pPr indent="0" marL="0">
+              <a:buNone/>
+            </a:pPr>
+            <a:r>
+              <a:rPr lang="en-US" sz="2000" b="1" dirty="0">
                 <a:solidFill>
                   <a:srgbClr val="0E1C42"/>
                 </a:solidFill>
@@ -4472,7 +5118,46 @@
                 <a:ea typeface="Calibri" pitchFamily="34" charset="-122"/>
                 <a:cs typeface="Calibri" pitchFamily="34" charset="-120"/>
               </a:rPr>
-              <a:t>CHAT PROMPT</a:t>
+              <a:t>Reading: Ch. 10–12</a:t>
+            </a:r>
+            <a:endParaRPr lang="en-US" sz="2000" dirty="0"/>
+          </a:p>
+        </p:txBody>
+      </p:sp>
+      <p:sp>
+        <p:nvSpPr>
+          <p:cNvPr id="6" name="Text 4"/>
+          <p:cNvSpPr/>
+          <p:nvPr/>
+        </p:nvSpPr>
+        <p:spPr>
+          <a:xfrm>
+            <a:off x="365760" y="1508760"/>
+            <a:ext cx="8229600" cy="237744"/>
+          </a:xfrm>
+          <a:prstGeom prst="rect">
+            <a:avLst/>
+          </a:prstGeom>
+          <a:noFill/>
+          <a:ln/>
+        </p:spPr>
+        <p:txBody>
+          <a:bodyPr wrap="square" lIns="0" tIns="0" rIns="0" bIns="0" rtlCol="0" anchor="ctr"/>
+          <a:lstStyle/>
+          <a:p>
+            <a:pPr indent="0" marL="0">
+              <a:buNone/>
+            </a:pPr>
+            <a:r>
+              <a:rPr lang="en-US" sz="1100" b="1" spc="100" kern="0" dirty="0">
+                <a:solidFill>
+                  <a:srgbClr val="C7922C"/>
+                </a:solidFill>
+                <a:latin typeface="Calibri" pitchFamily="34" charset="0"/>
+                <a:ea typeface="Calibri" pitchFamily="34" charset="-122"/>
+                <a:cs typeface="Calibri" pitchFamily="34" charset="-120"/>
+              </a:rPr>
+              <a:t>BIG QUESTION</a:t>
             </a:r>
             <a:endParaRPr lang="en-US" sz="1100" dirty="0"/>
           </a:p>
@@ -4480,63 +5165,24 @@
       </p:sp>
       <p:sp>
         <p:nvSpPr>
-          <p:cNvPr id="6" name="Text 4"/>
-          <p:cNvSpPr/>
-          <p:nvPr/>
-        </p:nvSpPr>
-        <p:spPr>
-          <a:xfrm>
-            <a:off x="457200" y="914400"/>
-            <a:ext cx="8046720" cy="292608"/>
-          </a:xfrm>
-          <a:prstGeom prst="rect">
-            <a:avLst/>
-          </a:prstGeom>
-          <a:noFill/>
-          <a:ln/>
-        </p:spPr>
-        <p:txBody>
-          <a:bodyPr wrap="square" lIns="0" tIns="0" rIns="0" bIns="0" rtlCol="0" anchor="ctr"/>
-          <a:lstStyle/>
-          <a:p>
-            <a:pPr indent="0" marL="0">
-              <a:buNone/>
-            </a:pPr>
-            <a:r>
-              <a:rPr lang="en-US" sz="1100" b="1" spc="200" kern="0" dirty="0">
-                <a:solidFill>
-                  <a:srgbClr val="C7922C"/>
-                </a:solidFill>
-                <a:latin typeface="Calibri" pitchFamily="34" charset="0"/>
-                <a:ea typeface="Calibri" pitchFamily="34" charset="-122"/>
-                <a:cs typeface="Calibri" pitchFamily="34" charset="-120"/>
-              </a:rPr>
-              <a:t>BIG QUESTION</a:t>
-            </a:r>
-            <a:endParaRPr lang="en-US" sz="1100" dirty="0"/>
-          </a:p>
-        </p:txBody>
-      </p:sp>
-      <p:sp>
-        <p:nvSpPr>
           <p:cNvPr id="7" name="Shape 5"/>
           <p:cNvSpPr/>
           <p:nvPr/>
         </p:nvSpPr>
         <p:spPr>
           <a:xfrm>
-            <a:off x="457200" y="1234440"/>
-            <a:ext cx="8229600" cy="640080"/>
+            <a:off x="365760" y="1746504"/>
+            <a:ext cx="8412480" cy="731520"/>
           </a:xfrm>
           <a:prstGeom prst="roundRect">
             <a:avLst>
-              <a:gd name="adj" fmla="val 14286"/>
+              <a:gd name="adj" fmla="val 12500"/>
             </a:avLst>
           </a:prstGeom>
           <a:solidFill>
             <a:srgbClr val="FEF6E8"/>
           </a:solidFill>
-          <a:ln w="12700">
+          <a:ln w="19050">
             <a:solidFill>
               <a:srgbClr val="C7922C"/>
             </a:solidFill>
@@ -4559,24 +5205,24 @@
         </p:nvSpPr>
         <p:spPr>
           <a:xfrm>
-            <a:off x="640080" y="1344168"/>
-            <a:ext cx="7863840" cy="411480"/>
-          </a:xfrm>
-          <a:prstGeom prst="rect">
-            <a:avLst/>
-          </a:prstGeom>
-          <a:noFill/>
-          <a:ln/>
-        </p:spPr>
-        <p:txBody>
-          <a:bodyPr wrap="square" lIns="0" tIns="0" rIns="0" bIns="0" rtlCol="0" anchor="ctr"/>
-          <a:lstStyle/>
-          <a:p>
-            <a:pPr indent="0" marL="0">
-              <a:buNone/>
-            </a:pPr>
-            <a:r>
-              <a:rPr lang="en-US" sz="1800" i="1" dirty="0">
+            <a:off x="594360" y="1874520"/>
+            <a:ext cx="7955280" cy="475488"/>
+          </a:xfrm>
+          <a:prstGeom prst="rect">
+            <a:avLst/>
+          </a:prstGeom>
+          <a:noFill/>
+          <a:ln/>
+        </p:spPr>
+        <p:txBody>
+          <a:bodyPr wrap="square" lIns="0" tIns="0" rIns="0" bIns="0" rtlCol="0" anchor="ctr"/>
+          <a:lstStyle/>
+          <a:p>
+            <a:pPr indent="0" marL="0">
+              <a:buNone/>
+            </a:pPr>
+            <a:r>
+              <a:rPr lang="en-US" sz="1700" dirty="0">
                 <a:solidFill>
                   <a:srgbClr val="1E293B"/>
                 </a:solidFill>
@@ -4586,43 +5232,48 @@
               </a:rPr>
               <a:t>Notice symbolism and repeated ideas.</a:t>
             </a:r>
-            <a:endParaRPr lang="en-US" sz="1800" dirty="0"/>
-          </a:p>
-        </p:txBody>
-      </p:sp>
-      <p:sp>
-        <p:nvSpPr>
-          <p:cNvPr id="9" name="Shape 7"/>
-          <p:cNvSpPr/>
-          <p:nvPr/>
-        </p:nvSpPr>
-        <p:spPr>
-          <a:xfrm>
-            <a:off x="457200" y="1965960"/>
-            <a:ext cx="8229600" cy="640080"/>
-          </a:xfrm>
-          <a:prstGeom prst="roundRect">
-            <a:avLst>
-              <a:gd name="adj" fmla="val 14286"/>
-            </a:avLst>
-          </a:prstGeom>
-          <a:solidFill>
-            <a:srgbClr val="FEF6E8"/>
-          </a:solidFill>
-          <a:ln w="12700">
-            <a:solidFill>
-              <a:srgbClr val="C7922C"/>
-            </a:solidFill>
-            <a:prstDash val="solid"/>
-          </a:ln>
-          <a:effectLst>
-            <a:outerShdw sx="100000" sy="100000" kx="0" ky="0" algn="bl" rotWithShape="0" blurRad="101600" dist="38100" dir="2700000">
-              <a:srgbClr val="000000">
-                <a:alpha val="12000"/>
-              </a:srgbClr>
-            </a:outerShdw>
-          </a:effectLst>
-        </p:spPr>
+            <a:endParaRPr lang="en-US" sz="1700" dirty="0"/>
+          </a:p>
+        </p:txBody>
+      </p:sp>
+      <p:sp>
+        <p:nvSpPr>
+          <p:cNvPr id="9" name="Text 7"/>
+          <p:cNvSpPr/>
+          <p:nvPr/>
+        </p:nvSpPr>
+        <p:spPr>
+          <a:xfrm>
+            <a:off x="365760" y="2606040"/>
+            <a:ext cx="8229600" cy="237744"/>
+          </a:xfrm>
+          <a:prstGeom prst="rect">
+            <a:avLst/>
+          </a:prstGeom>
+          <a:noFill/>
+          <a:ln/>
+        </p:spPr>
+        <p:txBody>
+          <a:bodyPr wrap="square" lIns="0" tIns="0" rIns="0" bIns="0" rtlCol="0" anchor="ctr"/>
+          <a:lstStyle/>
+          <a:p>
+            <a:pPr indent="0" marL="0">
+              <a:buNone/>
+            </a:pPr>
+            <a:r>
+              <a:rPr lang="en-US" sz="1100" b="1" spc="100" kern="0" dirty="0">
+                <a:solidFill>
+                  <a:srgbClr val="55C8E8"/>
+                </a:solidFill>
+                <a:latin typeface="Calibri" pitchFamily="34" charset="0"/>
+                <a:ea typeface="Calibri" pitchFamily="34" charset="-122"/>
+                <a:cs typeface="Calibri" pitchFamily="34" charset="-120"/>
+              </a:rPr>
+              <a:t>READING LENS</a:t>
+            </a:r>
+            <a:endParaRPr lang="en-US" sz="1100" dirty="0"/>
+          </a:p>
+        </p:txBody>
       </p:sp>
       <p:sp>
         <p:nvSpPr>
@@ -4632,159 +5283,8 @@
         </p:nvSpPr>
         <p:spPr>
           <a:xfrm>
-            <a:off x="640080" y="2075688"/>
-            <a:ext cx="7863840" cy="411480"/>
-          </a:xfrm>
-          <a:prstGeom prst="rect">
-            <a:avLst/>
-          </a:prstGeom>
-          <a:noFill/>
-          <a:ln/>
-        </p:spPr>
-        <p:txBody>
-          <a:bodyPr wrap="square" lIns="0" tIns="0" rIns="0" bIns="0" rtlCol="0" anchor="ctr"/>
-          <a:lstStyle/>
-          <a:p>
-            <a:pPr indent="0" marL="0">
-              <a:buNone/>
-            </a:pPr>
-            <a:r>
-              <a:rPr lang="en-US" sz="1800" i="1" dirty="0">
-                <a:solidFill>
-                  <a:srgbClr val="1E293B"/>
-                </a:solidFill>
-                <a:latin typeface="Calibri" pitchFamily="34" charset="0"/>
-                <a:ea typeface="Calibri" pitchFamily="34" charset="-122"/>
-                <a:cs typeface="Calibri" pitchFamily="34" charset="-120"/>
-              </a:rPr>
-              <a:t>As you read today, ask yourself: How do you recognize a symbol — something that stands for more than just itself?</a:t>
-            </a:r>
-            <a:endParaRPr lang="en-US" sz="1800" dirty="0"/>
-          </a:p>
-        </p:txBody>
-      </p:sp>
-      <p:sp>
-        <p:nvSpPr>
-          <p:cNvPr id="11" name="Shape 9"/>
-          <p:cNvSpPr/>
-          <p:nvPr/>
-        </p:nvSpPr>
-        <p:spPr>
-          <a:xfrm>
-            <a:off x="457200" y="2697480"/>
-            <a:ext cx="8229600" cy="640080"/>
-          </a:xfrm>
-          <a:prstGeom prst="roundRect">
-            <a:avLst>
-              <a:gd name="adj" fmla="val 14286"/>
-            </a:avLst>
-          </a:prstGeom>
-          <a:solidFill>
-            <a:srgbClr val="FEF6E8"/>
-          </a:solidFill>
-          <a:ln w="12700">
-            <a:solidFill>
-              <a:srgbClr val="C7922C"/>
-            </a:solidFill>
-            <a:prstDash val="solid"/>
-          </a:ln>
-          <a:effectLst>
-            <a:outerShdw sx="100000" sy="100000" kx="0" ky="0" algn="bl" rotWithShape="0" blurRad="101600" dist="38100" dir="2700000">
-              <a:srgbClr val="000000">
-                <a:alpha val="12000"/>
-              </a:srgbClr>
-            </a:outerShdw>
-          </a:effectLst>
-        </p:spPr>
-      </p:sp>
-      <p:sp>
-        <p:nvSpPr>
-          <p:cNvPr id="12" name="Text 10"/>
-          <p:cNvSpPr/>
-          <p:nvPr/>
-        </p:nvSpPr>
-        <p:spPr>
-          <a:xfrm>
-            <a:off x="640080" y="2807208"/>
-            <a:ext cx="7863840" cy="411480"/>
-          </a:xfrm>
-          <a:prstGeom prst="rect">
-            <a:avLst/>
-          </a:prstGeom>
-          <a:noFill/>
-          <a:ln/>
-        </p:spPr>
-        <p:txBody>
-          <a:bodyPr wrap="square" lIns="0" tIns="0" rIns="0" bIns="0" rtlCol="0" anchor="ctr"/>
-          <a:lstStyle/>
-          <a:p>
-            <a:pPr indent="0" marL="0">
-              <a:buNone/>
-            </a:pPr>
-            <a:r>
-              <a:rPr lang="en-US" sz="1800" i="1" dirty="0">
-                <a:solidFill>
-                  <a:srgbClr val="1E293B"/>
-                </a:solidFill>
-                <a:latin typeface="Calibri" pitchFamily="34" charset="0"/>
-                <a:ea typeface="Calibri" pitchFamily="34" charset="-122"/>
-                <a:cs typeface="Calibri" pitchFamily="34" charset="-120"/>
-              </a:rPr>
-              <a:t>How does the White Witch respond when the snow starts to melt? What does her response tell you about her character?</a:t>
-            </a:r>
-            <a:endParaRPr lang="en-US" sz="1800" dirty="0"/>
-          </a:p>
-        </p:txBody>
-      </p:sp>
-      <p:sp>
-        <p:nvSpPr>
-          <p:cNvPr id="13" name="Text 11"/>
-          <p:cNvSpPr/>
-          <p:nvPr/>
-        </p:nvSpPr>
-        <p:spPr>
-          <a:xfrm>
-            <a:off x="457200" y="3429000"/>
-            <a:ext cx="8046720" cy="292608"/>
-          </a:xfrm>
-          <a:prstGeom prst="rect">
-            <a:avLst/>
-          </a:prstGeom>
-          <a:noFill/>
-          <a:ln/>
-        </p:spPr>
-        <p:txBody>
-          <a:bodyPr wrap="square" lIns="0" tIns="0" rIns="0" bIns="0" rtlCol="0" anchor="ctr"/>
-          <a:lstStyle/>
-          <a:p>
-            <a:pPr indent="0" marL="0">
-              <a:buNone/>
-            </a:pPr>
-            <a:r>
-              <a:rPr lang="en-US" sz="1100" b="1" spc="200" kern="0" dirty="0">
-                <a:solidFill>
-                  <a:srgbClr val="8B6FC0"/>
-                </a:solidFill>
-                <a:latin typeface="Calibri" pitchFamily="34" charset="0"/>
-                <a:ea typeface="Calibri" pitchFamily="34" charset="-122"/>
-                <a:cs typeface="Calibri" pitchFamily="34" charset="-120"/>
-              </a:rPr>
-              <a:t>READING LENS</a:t>
-            </a:r>
-            <a:endParaRPr lang="en-US" sz="1100" dirty="0"/>
-          </a:p>
-        </p:txBody>
-      </p:sp>
-      <p:sp>
-        <p:nvSpPr>
-          <p:cNvPr id="14" name="Text 12"/>
-          <p:cNvSpPr/>
-          <p:nvPr/>
-        </p:nvSpPr>
-        <p:spPr>
-          <a:xfrm>
-            <a:off x="640080" y="3749040"/>
-            <a:ext cx="7863840" cy="731520"/>
+            <a:off x="365760" y="2843784"/>
+            <a:ext cx="8412480" cy="914400"/>
           </a:xfrm>
           <a:prstGeom prst="rect">
             <a:avLst/>
@@ -4848,91 +5348,122 @@
       </p:grpSpPr>
       <p:sp>
         <p:nvSpPr>
-          <p:cNvPr id="2" name="Text 0"/>
-          <p:cNvSpPr/>
-          <p:nvPr/>
-        </p:nvSpPr>
-        <p:spPr>
-          <a:xfrm>
-            <a:off x="365760" y="164592"/>
-            <a:ext cx="8412480" cy="566928"/>
-          </a:xfrm>
-          <a:prstGeom prst="rect">
-            <a:avLst/>
-          </a:prstGeom>
-          <a:noFill/>
-          <a:ln/>
-        </p:spPr>
-        <p:txBody>
-          <a:bodyPr wrap="square" lIns="0" tIns="0" rIns="0" bIns="0" rtlCol="0" anchor="ctr"/>
-          <a:lstStyle/>
-          <a:p>
-            <a:pPr algn="l" indent="0" marL="0">
-              <a:buNone/>
-            </a:pPr>
-            <a:r>
-              <a:rPr lang="en-US" sz="2800" b="1" dirty="0">
-                <a:solidFill>
-                  <a:srgbClr val="0E1C42"/>
-                </a:solidFill>
-                <a:latin typeface="Calibri" pitchFamily="34" charset="0"/>
-                <a:ea typeface="Calibri" pitchFamily="34" charset="-122"/>
-                <a:cs typeface="Calibri" pitchFamily="34" charset="-120"/>
-              </a:rPr>
-              <a:t>✅ Model Sentence — Study What's Right</a:t>
-            </a:r>
-            <a:endParaRPr lang="en-US" sz="2800" dirty="0"/>
-          </a:p>
-        </p:txBody>
-      </p:sp>
-      <p:sp>
-        <p:nvSpPr>
-          <p:cNvPr id="3" name="Shape 1"/>
-          <p:cNvSpPr/>
-          <p:nvPr/>
-        </p:nvSpPr>
-        <p:spPr>
-          <a:xfrm>
-            <a:off x="365760" y="749808"/>
-            <a:ext cx="8412480" cy="0"/>
-          </a:xfrm>
-          <a:prstGeom prst="line">
-            <a:avLst/>
-          </a:prstGeom>
-          <a:noFill/>
-          <a:ln w="19050">
-            <a:solidFill>
-              <a:srgbClr val="34B76F"/>
-            </a:solidFill>
-            <a:prstDash val="solid"/>
-          </a:ln>
-        </p:spPr>
-      </p:sp>
-      <p:sp>
-        <p:nvSpPr>
-          <p:cNvPr id="4" name="Shape 2"/>
-          <p:cNvSpPr/>
-          <p:nvPr/>
-        </p:nvSpPr>
-        <p:spPr>
-          <a:xfrm>
-            <a:off x="457200" y="1097280"/>
-            <a:ext cx="8229600" cy="914400"/>
+          <p:cNvPr id="2" name="Shape 0"/>
+          <p:cNvSpPr/>
+          <p:nvPr/>
+        </p:nvSpPr>
+        <p:spPr>
+          <a:xfrm>
+            <a:off x="0" y="0"/>
+            <a:ext cx="9144000" cy="566928"/>
+          </a:xfrm>
+          <a:prstGeom prst="rect">
+            <a:avLst/>
+          </a:prstGeom>
+          <a:solidFill>
+            <a:srgbClr val="55C8E8"/>
+          </a:solidFill>
+          <a:ln/>
+        </p:spPr>
+      </p:sp>
+      <p:sp>
+        <p:nvSpPr>
+          <p:cNvPr id="3" name="Text 1"/>
+          <p:cNvSpPr/>
+          <p:nvPr/>
+        </p:nvSpPr>
+        <p:spPr>
+          <a:xfrm>
+            <a:off x="365760" y="54864"/>
+            <a:ext cx="8412480" cy="457200"/>
+          </a:xfrm>
+          <a:prstGeom prst="rect">
+            <a:avLst/>
+          </a:prstGeom>
+          <a:noFill/>
+          <a:ln/>
+        </p:spPr>
+        <p:txBody>
+          <a:bodyPr wrap="square" lIns="0" tIns="0" rIns="0" bIns="0" rtlCol="0" anchor="ctr"/>
+          <a:lstStyle/>
+          <a:p>
+            <a:pPr indent="0" marL="0">
+              <a:buNone/>
+            </a:pPr>
+            <a:r>
+              <a:rPr lang="en-US" sz="2200" b="1" dirty="0">
+                <a:solidFill>
+                  <a:srgbClr val="FFFFFF"/>
+                </a:solidFill>
+                <a:latin typeface="Calibri" pitchFamily="34" charset="0"/>
+                <a:ea typeface="Calibri" pitchFamily="34" charset="-122"/>
+                <a:cs typeface="Calibri" pitchFamily="34" charset="-120"/>
+              </a:rPr>
+              <a:t>✏️  Daily Oral Language</a:t>
+            </a:r>
+            <a:endParaRPr lang="en-US" sz="2200" dirty="0"/>
+          </a:p>
+        </p:txBody>
+      </p:sp>
+      <p:sp>
+        <p:nvSpPr>
+          <p:cNvPr id="4" name="Text 2"/>
+          <p:cNvSpPr/>
+          <p:nvPr/>
+        </p:nvSpPr>
+        <p:spPr>
+          <a:xfrm>
+            <a:off x="365760" y="804672"/>
+            <a:ext cx="8229600" cy="237744"/>
+          </a:xfrm>
+          <a:prstGeom prst="rect">
+            <a:avLst/>
+          </a:prstGeom>
+          <a:noFill/>
+          <a:ln/>
+        </p:spPr>
+        <p:txBody>
+          <a:bodyPr wrap="square" lIns="0" tIns="0" rIns="0" bIns="0" rtlCol="0" anchor="ctr"/>
+          <a:lstStyle/>
+          <a:p>
+            <a:pPr indent="0" marL="0">
+              <a:buNone/>
+            </a:pPr>
+            <a:r>
+              <a:rPr lang="en-US" sz="1100" b="1" spc="100" kern="0" dirty="0">
+                <a:solidFill>
+                  <a:srgbClr val="55C8E8"/>
+                </a:solidFill>
+                <a:latin typeface="Calibri" pitchFamily="34" charset="0"/>
+                <a:ea typeface="Calibri" pitchFamily="34" charset="-122"/>
+                <a:cs typeface="Calibri" pitchFamily="34" charset="-120"/>
+              </a:rPr>
+              <a:t>KEY GRAMMAR POINTS IN THE MODEL</a:t>
+            </a:r>
+            <a:endParaRPr lang="en-US" sz="1100" dirty="0"/>
+          </a:p>
+        </p:txBody>
+      </p:sp>
+      <p:sp>
+        <p:nvSpPr>
+          <p:cNvPr id="5" name="Shape 3"/>
+          <p:cNvSpPr/>
+          <p:nvPr/>
+        </p:nvSpPr>
+        <p:spPr>
+          <a:xfrm>
+            <a:off x="365760" y="1097280"/>
+            <a:ext cx="8412480" cy="548640"/>
           </a:xfrm>
           <a:prstGeom prst="roundRect">
             <a:avLst>
-              <a:gd name="adj" fmla="val 10000"/>
+              <a:gd name="adj" fmla="val 16667"/>
             </a:avLst>
           </a:prstGeom>
           <a:solidFill>
-            <a:srgbClr val="E8F8EF"/>
+            <a:srgbClr val="F8FAFC"/>
           </a:solidFill>
-          <a:ln w="12700">
-            <a:solidFill>
-              <a:srgbClr val="34B76F"/>
-            </a:solidFill>
-            <a:prstDash val="solid"/>
-          </a:ln>
+          <a:ln/>
           <a:effectLst>
             <a:outerShdw sx="100000" sy="100000" kx="0" ky="0" algn="bl" rotWithShape="0" blurRad="101600" dist="38100" dir="2700000">
               <a:srgbClr val="000000">
@@ -4944,30 +5475,44 @@
       </p:sp>
       <p:sp>
         <p:nvSpPr>
-          <p:cNvPr id="5" name="Text 3"/>
-          <p:cNvSpPr/>
-          <p:nvPr/>
-        </p:nvSpPr>
-        <p:spPr>
-          <a:xfrm>
-            <a:off x="640080" y="1207008"/>
-            <a:ext cx="7863840" cy="685800"/>
-          </a:xfrm>
-          <a:prstGeom prst="rect">
-            <a:avLst/>
-          </a:prstGeom>
-          <a:noFill/>
-          <a:ln/>
-        </p:spPr>
-        <p:txBody>
-          <a:bodyPr wrap="square" lIns="0" tIns="0" rIns="0" bIns="0" rtlCol="0" anchor="ctr"/>
-          <a:lstStyle/>
-          <a:p>
-            <a:pPr indent="0" marL="0">
-              <a:buNone/>
-            </a:pPr>
-            <a:r>
-              <a:rPr lang="en-US" sz="1800" i="1" dirty="0">
+          <p:cNvPr id="6" name="Text 4"/>
+          <p:cNvSpPr/>
+          <p:nvPr/>
+        </p:nvSpPr>
+        <p:spPr>
+          <a:xfrm>
+            <a:off x="594360" y="1188720"/>
+            <a:ext cx="7863840" cy="365760"/>
+          </a:xfrm>
+          <a:prstGeom prst="rect">
+            <a:avLst/>
+          </a:prstGeom>
+          <a:noFill/>
+          <a:ln/>
+        </p:spPr>
+        <p:txBody>
+          <a:bodyPr wrap="square" lIns="0" tIns="0" rIns="0" bIns="0" rtlCol="0" anchor="ctr"/>
+          <a:lstStyle/>
+          <a:p>
+            <a:pPr indent="0" marL="0">
+              <a:buNone/>
+            </a:pPr>
+            <a:r>
+              <a:rPr lang="en-US" sz="1500" b="1" dirty="0">
+                <a:solidFill>
+                  <a:srgbClr val="0E1C42"/>
+                </a:solidFill>
+                <a:latin typeface="Calibri" pitchFamily="34" charset="0"/>
+                <a:ea typeface="Calibri" pitchFamily="34" charset="-122"/>
+                <a:cs typeface="Calibri" pitchFamily="34" charset="-120"/>
+              </a:rPr>
+              <a:t>Aslan's  </a:t>
+            </a:r>
+            <a:pPr indent="0" marL="0">
+              <a:buNone/>
+            </a:pPr>
+            <a:r>
+              <a:rPr lang="en-US" sz="1300" dirty="0">
                 <a:solidFill>
                   <a:srgbClr val="1E293B"/>
                 </a:solidFill>
@@ -4975,9 +5520,255 @@
                 <a:ea typeface="Calibri" pitchFamily="34" charset="-122"/>
                 <a:cs typeface="Calibri" pitchFamily="34" charset="-120"/>
               </a:rPr>
-              <a:t>Aslan's wasn't Edmund expected.</a:t>
-            </a:r>
-            <a:endParaRPr lang="en-US" sz="1800" dirty="0"/>
+              <a:t>Possessive — the camp belonging to Aslan; apostrophe + s.</a:t>
+            </a:r>
+            <a:endParaRPr lang="en-US" sz="1500" dirty="0"/>
+          </a:p>
+        </p:txBody>
+      </p:sp>
+      <p:sp>
+        <p:nvSpPr>
+          <p:cNvPr id="7" name="Shape 5"/>
+          <p:cNvSpPr/>
+          <p:nvPr/>
+        </p:nvSpPr>
+        <p:spPr>
+          <a:xfrm>
+            <a:off x="365760" y="1719072"/>
+            <a:ext cx="8412480" cy="548640"/>
+          </a:xfrm>
+          <a:prstGeom prst="roundRect">
+            <a:avLst>
+              <a:gd name="adj" fmla="val 16667"/>
+            </a:avLst>
+          </a:prstGeom>
+          <a:solidFill>
+            <a:srgbClr val="FFFFFF"/>
+          </a:solidFill>
+          <a:ln/>
+          <a:effectLst>
+            <a:outerShdw sx="100000" sy="100000" kx="0" ky="0" algn="bl" rotWithShape="0" blurRad="101600" dist="38100" dir="2700000">
+              <a:srgbClr val="000000">
+                <a:alpha val="12000"/>
+              </a:srgbClr>
+            </a:outerShdw>
+          </a:effectLst>
+        </p:spPr>
+      </p:sp>
+      <p:sp>
+        <p:nvSpPr>
+          <p:cNvPr id="8" name="Text 6"/>
+          <p:cNvSpPr/>
+          <p:nvPr/>
+        </p:nvSpPr>
+        <p:spPr>
+          <a:xfrm>
+            <a:off x="594360" y="1810512"/>
+            <a:ext cx="7863840" cy="365760"/>
+          </a:xfrm>
+          <a:prstGeom prst="rect">
+            <a:avLst/>
+          </a:prstGeom>
+          <a:noFill/>
+          <a:ln/>
+        </p:spPr>
+        <p:txBody>
+          <a:bodyPr wrap="square" lIns="0" tIns="0" rIns="0" bIns="0" rtlCol="0" anchor="ctr"/>
+          <a:lstStyle/>
+          <a:p>
+            <a:pPr indent="0" marL="0">
+              <a:buNone/>
+            </a:pPr>
+            <a:r>
+              <a:rPr lang="en-US" sz="1500" b="1" dirty="0">
+                <a:solidFill>
+                  <a:srgbClr val="0E1C42"/>
+                </a:solidFill>
+                <a:latin typeface="Calibri" pitchFamily="34" charset="0"/>
+                <a:ea typeface="Calibri" pitchFamily="34" charset="-122"/>
+                <a:cs typeface="Calibri" pitchFamily="34" charset="-120"/>
+              </a:rPr>
+              <a:t>wasn't  </a:t>
+            </a:r>
+            <a:pPr indent="0" marL="0">
+              <a:buNone/>
+            </a:pPr>
+            <a:r>
+              <a:rPr lang="en-US" sz="1300" dirty="0">
+                <a:solidFill>
+                  <a:srgbClr val="1E293B"/>
+                </a:solidFill>
+                <a:latin typeface="Calibri" pitchFamily="34" charset="0"/>
+                <a:ea typeface="Calibri" pitchFamily="34" charset="-122"/>
+                <a:cs typeface="Calibri" pitchFamily="34" charset="-120"/>
+              </a:rPr>
+              <a:t>Contraction — was + not; apostrophe replaces the o.</a:t>
+            </a:r>
+            <a:endParaRPr lang="en-US" sz="1500" dirty="0"/>
+          </a:p>
+        </p:txBody>
+      </p:sp>
+      <p:sp>
+        <p:nvSpPr>
+          <p:cNvPr id="9" name="Shape 7"/>
+          <p:cNvSpPr/>
+          <p:nvPr/>
+        </p:nvSpPr>
+        <p:spPr>
+          <a:xfrm>
+            <a:off x="365760" y="2340864"/>
+            <a:ext cx="8412480" cy="548640"/>
+          </a:xfrm>
+          <a:prstGeom prst="roundRect">
+            <a:avLst>
+              <a:gd name="adj" fmla="val 16667"/>
+            </a:avLst>
+          </a:prstGeom>
+          <a:solidFill>
+            <a:srgbClr val="F8FAFC"/>
+          </a:solidFill>
+          <a:ln/>
+          <a:effectLst>
+            <a:outerShdw sx="100000" sy="100000" kx="0" ky="0" algn="bl" rotWithShape="0" blurRad="101600" dist="38100" dir="2700000">
+              <a:srgbClr val="000000">
+                <a:alpha val="12000"/>
+              </a:srgbClr>
+            </a:outerShdw>
+          </a:effectLst>
+        </p:spPr>
+      </p:sp>
+      <p:sp>
+        <p:nvSpPr>
+          <p:cNvPr id="10" name="Text 8"/>
+          <p:cNvSpPr/>
+          <p:nvPr/>
+        </p:nvSpPr>
+        <p:spPr>
+          <a:xfrm>
+            <a:off x="594360" y="2432304"/>
+            <a:ext cx="7863840" cy="365760"/>
+          </a:xfrm>
+          <a:prstGeom prst="rect">
+            <a:avLst/>
+          </a:prstGeom>
+          <a:noFill/>
+          <a:ln/>
+        </p:spPr>
+        <p:txBody>
+          <a:bodyPr wrap="square" lIns="0" tIns="0" rIns="0" bIns="0" rtlCol="0" anchor="ctr"/>
+          <a:lstStyle/>
+          <a:p>
+            <a:pPr indent="0" marL="0">
+              <a:buNone/>
+            </a:pPr>
+            <a:r>
+              <a:rPr lang="en-US" sz="1500" b="1" dirty="0">
+                <a:solidFill>
+                  <a:srgbClr val="0E1C42"/>
+                </a:solidFill>
+                <a:latin typeface="Calibri" pitchFamily="34" charset="0"/>
+                <a:ea typeface="Calibri" pitchFamily="34" charset="-122"/>
+                <a:cs typeface="Calibri" pitchFamily="34" charset="-120"/>
+              </a:rPr>
+              <a:t>Edmund  </a:t>
+            </a:r>
+            <a:pPr indent="0" marL="0">
+              <a:buNone/>
+            </a:pPr>
+            <a:r>
+              <a:rPr lang="en-US" sz="1300" dirty="0">
+                <a:solidFill>
+                  <a:srgbClr val="1E293B"/>
+                </a:solidFill>
+                <a:latin typeface="Calibri" pitchFamily="34" charset="0"/>
+                <a:ea typeface="Calibri" pitchFamily="34" charset="-122"/>
+                <a:cs typeface="Calibri" pitchFamily="34" charset="-120"/>
+              </a:rPr>
+              <a:t>Proper noun — capital E.</a:t>
+            </a:r>
+            <a:endParaRPr lang="en-US" sz="1500" dirty="0"/>
+          </a:p>
+        </p:txBody>
+      </p:sp>
+      <p:sp>
+        <p:nvSpPr>
+          <p:cNvPr id="11" name="Shape 9"/>
+          <p:cNvSpPr/>
+          <p:nvPr/>
+        </p:nvSpPr>
+        <p:spPr>
+          <a:xfrm>
+            <a:off x="365760" y="2962656"/>
+            <a:ext cx="8412480" cy="548640"/>
+          </a:xfrm>
+          <a:prstGeom prst="roundRect">
+            <a:avLst>
+              <a:gd name="adj" fmla="val 16667"/>
+            </a:avLst>
+          </a:prstGeom>
+          <a:solidFill>
+            <a:srgbClr val="FFFFFF"/>
+          </a:solidFill>
+          <a:ln/>
+          <a:effectLst>
+            <a:outerShdw sx="100000" sy="100000" kx="0" ky="0" algn="bl" rotWithShape="0" blurRad="101600" dist="38100" dir="2700000">
+              <a:srgbClr val="000000">
+                <a:alpha val="12000"/>
+              </a:srgbClr>
+            </a:outerShdw>
+          </a:effectLst>
+        </p:spPr>
+      </p:sp>
+      <p:sp>
+        <p:nvSpPr>
+          <p:cNvPr id="12" name="Text 10"/>
+          <p:cNvSpPr/>
+          <p:nvPr/>
+        </p:nvSpPr>
+        <p:spPr>
+          <a:xfrm>
+            <a:off x="594360" y="3054096"/>
+            <a:ext cx="7863840" cy="365760"/>
+          </a:xfrm>
+          <a:prstGeom prst="rect">
+            <a:avLst/>
+          </a:prstGeom>
+          <a:noFill/>
+          <a:ln/>
+        </p:spPr>
+        <p:txBody>
+          <a:bodyPr wrap="square" lIns="0" tIns="0" rIns="0" bIns="0" rtlCol="0" anchor="ctr"/>
+          <a:lstStyle/>
+          <a:p>
+            <a:pPr indent="0" marL="0">
+              <a:buNone/>
+            </a:pPr>
+            <a:r>
+              <a:rPr lang="en-US" sz="1500" b="1" dirty="0">
+                <a:solidFill>
+                  <a:srgbClr val="0E1C42"/>
+                </a:solidFill>
+                <a:latin typeface="Calibri" pitchFamily="34" charset="0"/>
+                <a:ea typeface="Calibri" pitchFamily="34" charset="-122"/>
+                <a:cs typeface="Calibri" pitchFamily="34" charset="-120"/>
+              </a:rPr>
+              <a:t>expected.  </a:t>
+            </a:r>
+            <a:pPr indent="0" marL="0">
+              <a:buNone/>
+            </a:pPr>
+            <a:r>
+              <a:rPr lang="en-US" sz="1300" dirty="0">
+                <a:solidFill>
+                  <a:srgbClr val="1E293B"/>
+                </a:solidFill>
+                <a:latin typeface="Calibri" pitchFamily="34" charset="0"/>
+                <a:ea typeface="Calibri" pitchFamily="34" charset="-122"/>
+                <a:cs typeface="Calibri" pitchFamily="34" charset="-120"/>
+              </a:rPr>
+              <a:t>Past-tense verb; period ends the sentence.</a:t>
+            </a:r>
+            <a:endParaRPr lang="en-US" sz="1500" dirty="0"/>
           </a:p>
         </p:txBody>
       </p:sp>
@@ -4995,7 +5786,7 @@
     <p:bg>
       <p:bgPr>
         <a:solidFill>
-          <a:srgbClr val="E5F7FC"/>
+          <a:srgbClr val="F8FAFC"/>
         </a:solidFill>
       </p:bgPr>
     </p:bg>
@@ -5015,149 +5806,124 @@
       </p:grpSpPr>
       <p:sp>
         <p:nvSpPr>
-          <p:cNvPr id="2" name="Text 0"/>
-          <p:cNvSpPr/>
-          <p:nvPr/>
-        </p:nvSpPr>
-        <p:spPr>
-          <a:xfrm>
-            <a:off x="365760" y="164592"/>
-            <a:ext cx="5943600" cy="566928"/>
-          </a:xfrm>
-          <a:prstGeom prst="rect">
-            <a:avLst/>
-          </a:prstGeom>
-          <a:noFill/>
-          <a:ln/>
-        </p:spPr>
-        <p:txBody>
-          <a:bodyPr wrap="square" lIns="0" tIns="0" rIns="0" bIns="0" rtlCol="0" anchor="ctr"/>
-          <a:lstStyle/>
-          <a:p>
-            <a:pPr algn="l" indent="0" marL="0">
-              <a:buNone/>
-            </a:pPr>
-            <a:r>
-              <a:rPr lang="en-US" sz="2800" b="1" dirty="0">
-                <a:solidFill>
-                  <a:srgbClr val="0E1C42"/>
-                </a:solidFill>
-                <a:latin typeface="Calibri" pitchFamily="34" charset="0"/>
-                <a:ea typeface="Calibri" pitchFamily="34" charset="-122"/>
-                <a:cs typeface="Calibri" pitchFamily="34" charset="-120"/>
-              </a:rPr>
-              <a:t>🔧 Fix-It Sentence — Now You Try</a:t>
-            </a:r>
-            <a:endParaRPr lang="en-US" sz="2800" dirty="0"/>
-          </a:p>
-        </p:txBody>
-      </p:sp>
-      <p:sp>
-        <p:nvSpPr>
-          <p:cNvPr id="3" name="Shape 1"/>
+          <p:cNvPr id="2" name="Shape 0"/>
+          <p:cNvSpPr/>
+          <p:nvPr/>
+        </p:nvSpPr>
+        <p:spPr>
+          <a:xfrm>
+            <a:off x="0" y="0"/>
+            <a:ext cx="9144000" cy="566928"/>
+          </a:xfrm>
+          <a:prstGeom prst="rect">
+            <a:avLst/>
+          </a:prstGeom>
+          <a:solidFill>
+            <a:srgbClr val="55C8E8"/>
+          </a:solidFill>
+          <a:ln/>
+        </p:spPr>
+      </p:sp>
+      <p:sp>
+        <p:nvSpPr>
+          <p:cNvPr id="3" name="Text 1"/>
+          <p:cNvSpPr/>
+          <p:nvPr/>
+        </p:nvSpPr>
+        <p:spPr>
+          <a:xfrm>
+            <a:off x="365760" y="54864"/>
+            <a:ext cx="8412480" cy="457200"/>
+          </a:xfrm>
+          <a:prstGeom prst="rect">
+            <a:avLst/>
+          </a:prstGeom>
+          <a:noFill/>
+          <a:ln/>
+        </p:spPr>
+        <p:txBody>
+          <a:bodyPr wrap="square" lIns="0" tIns="0" rIns="0" bIns="0" rtlCol="0" anchor="ctr"/>
+          <a:lstStyle/>
+          <a:p>
+            <a:pPr indent="0" marL="0">
+              <a:buNone/>
+            </a:pPr>
+            <a:r>
+              <a:rPr lang="en-US" sz="2200" b="1" dirty="0">
+                <a:solidFill>
+                  <a:srgbClr val="FFFFFF"/>
+                </a:solidFill>
+                <a:latin typeface="Calibri" pitchFamily="34" charset="0"/>
+                <a:ea typeface="Calibri" pitchFamily="34" charset="-122"/>
+                <a:cs typeface="Calibri" pitchFamily="34" charset="-120"/>
+              </a:rPr>
+              <a:t>✏️  Daily Oral Language</a:t>
+            </a:r>
+            <a:endParaRPr lang="en-US" sz="2200" dirty="0"/>
+          </a:p>
+        </p:txBody>
+      </p:sp>
+      <p:sp>
+        <p:nvSpPr>
+          <p:cNvPr id="4" name="Text 2"/>
           <p:cNvSpPr/>
           <p:nvPr/>
         </p:nvSpPr>
         <p:spPr>
           <a:xfrm>
             <a:off x="365760" y="749808"/>
-            <a:ext cx="8412480" cy="0"/>
-          </a:xfrm>
-          <a:prstGeom prst="line">
-            <a:avLst/>
-          </a:prstGeom>
-          <a:noFill/>
+            <a:ext cx="8229600" cy="237744"/>
+          </a:xfrm>
+          <a:prstGeom prst="rect">
+            <a:avLst/>
+          </a:prstGeom>
+          <a:noFill/>
+          <a:ln/>
+        </p:spPr>
+        <p:txBody>
+          <a:bodyPr wrap="square" lIns="0" tIns="0" rIns="0" bIns="0" rtlCol="0" anchor="ctr"/>
+          <a:lstStyle/>
+          <a:p>
+            <a:pPr indent="0" marL="0">
+              <a:buNone/>
+            </a:pPr>
+            <a:r>
+              <a:rPr lang="en-US" sz="1100" b="1" spc="100" kern="0" dirty="0">
+                <a:solidFill>
+                  <a:srgbClr val="55C8E8"/>
+                </a:solidFill>
+                <a:latin typeface="Calibri" pitchFamily="34" charset="0"/>
+                <a:ea typeface="Calibri" pitchFamily="34" charset="-122"/>
+                <a:cs typeface="Calibri" pitchFamily="34" charset="-120"/>
+              </a:rPr>
+              <a:t>NOW FIX THIS ONE</a:t>
+            </a:r>
+            <a:endParaRPr lang="en-US" sz="1100" dirty="0"/>
+          </a:p>
+        </p:txBody>
+      </p:sp>
+      <p:sp>
+        <p:nvSpPr>
+          <p:cNvPr id="5" name="Shape 3"/>
+          <p:cNvSpPr/>
+          <p:nvPr/>
+        </p:nvSpPr>
+        <p:spPr>
+          <a:xfrm>
+            <a:off x="365760" y="1024128"/>
+            <a:ext cx="8412480" cy="777240"/>
+          </a:xfrm>
+          <a:prstGeom prst="roundRect">
+            <a:avLst>
+              <a:gd name="adj" fmla="val 11765"/>
+            </a:avLst>
+          </a:prstGeom>
+          <a:solidFill>
+            <a:srgbClr val="FFFFFF"/>
+          </a:solidFill>
           <a:ln w="19050">
             <a:solidFill>
-              <a:srgbClr val="4A90D9"/>
-            </a:solidFill>
-            <a:prstDash val="solid"/>
-          </a:ln>
-        </p:spPr>
-      </p:sp>
-      <p:sp>
-        <p:nvSpPr>
-          <p:cNvPr id="4" name="Shape 2"/>
-          <p:cNvSpPr/>
-          <p:nvPr/>
-        </p:nvSpPr>
-        <p:spPr>
-          <a:xfrm>
-            <a:off x="6492240" y="173736"/>
-            <a:ext cx="2286000" cy="502920"/>
-          </a:xfrm>
-          <a:prstGeom prst="roundRect">
-            <a:avLst>
-              <a:gd name="adj" fmla="val 21818"/>
-            </a:avLst>
-          </a:prstGeom>
-          <a:solidFill>
-            <a:srgbClr val="4A90D9"/>
-          </a:solidFill>
-          <a:ln/>
-        </p:spPr>
-      </p:sp>
-      <p:sp>
-        <p:nvSpPr>
-          <p:cNvPr id="5" name="Text 3"/>
-          <p:cNvSpPr/>
-          <p:nvPr/>
-        </p:nvSpPr>
-        <p:spPr>
-          <a:xfrm>
-            <a:off x="6492240" y="173736"/>
-            <a:ext cx="2286000" cy="502920"/>
-          </a:xfrm>
-          <a:prstGeom prst="rect">
-            <a:avLst/>
-          </a:prstGeom>
-          <a:noFill/>
-          <a:ln/>
-        </p:spPr>
-        <p:txBody>
-          <a:bodyPr wrap="square" lIns="0" tIns="0" rIns="0" bIns="0" rtlCol="0" anchor="ctr"/>
-          <a:lstStyle/>
-          <a:p>
-            <a:pPr algn="ctr" indent="0" marL="0">
-              <a:buNone/>
-            </a:pPr>
-            <a:r>
-              <a:rPr lang="en-US" sz="1100" b="1" dirty="0">
-                <a:solidFill>
-                  <a:srgbClr val="0E1C42"/>
-                </a:solidFill>
-                <a:latin typeface="Calibri" pitchFamily="34" charset="0"/>
-                <a:ea typeface="Calibri" pitchFamily="34" charset="-122"/>
-                <a:cs typeface="Calibri" pitchFamily="34" charset="-120"/>
-              </a:rPr>
-              <a:t>CHAT PROMPT</a:t>
-            </a:r>
-            <a:endParaRPr lang="en-US" sz="1100" dirty="0"/>
-          </a:p>
-        </p:txBody>
-      </p:sp>
-      <p:sp>
-        <p:nvSpPr>
-          <p:cNvPr id="6" name="Shape 4"/>
-          <p:cNvSpPr/>
-          <p:nvPr/>
-        </p:nvSpPr>
-        <p:spPr>
-          <a:xfrm>
-            <a:off x="457200" y="1005840"/>
-            <a:ext cx="8229600" cy="640080"/>
-          </a:xfrm>
-          <a:prstGeom prst="roundRect">
-            <a:avLst>
-              <a:gd name="adj" fmla="val 14286"/>
-            </a:avLst>
-          </a:prstGeom>
-          <a:solidFill>
-            <a:srgbClr val="F8FAFC"/>
-          </a:solidFill>
-          <a:ln w="12700">
-            <a:solidFill>
-              <a:srgbClr val="C7922C"/>
+              <a:srgbClr val="55C8E8"/>
             </a:solidFill>
             <a:prstDash val="solid"/>
           </a:ln>
@@ -5172,40 +5938,79 @@
       </p:sp>
       <p:sp>
         <p:nvSpPr>
+          <p:cNvPr id="6" name="Text 4"/>
+          <p:cNvSpPr/>
+          <p:nvPr/>
+        </p:nvSpPr>
+        <p:spPr>
+          <a:xfrm>
+            <a:off x="594360" y="1152144"/>
+            <a:ext cx="7955280" cy="521208"/>
+          </a:xfrm>
+          <a:prstGeom prst="rect">
+            <a:avLst/>
+          </a:prstGeom>
+          <a:noFill/>
+          <a:ln/>
+        </p:spPr>
+        <p:txBody>
+          <a:bodyPr wrap="square" lIns="0" tIns="0" rIns="0" bIns="0" rtlCol="0" anchor="ctr"/>
+          <a:lstStyle/>
+          <a:p>
+            <a:pPr indent="0" marL="0">
+              <a:buNone/>
+            </a:pPr>
+            <a:r>
+              <a:rPr lang="en-US" sz="1700" dirty="0">
+                <a:solidFill>
+                  <a:srgbClr val="1E293B"/>
+                </a:solidFill>
+                <a:latin typeface="Calibri" pitchFamily="34" charset="0"/>
+                <a:ea typeface="Calibri" pitchFamily="34" charset="-122"/>
+                <a:cs typeface="Calibri" pitchFamily="34" charset="-120"/>
+              </a:rPr>
+              <a:t>the witchs sledge couldnt move because the snow had melted and her reindeers hooves sank in the mud</a:t>
+            </a:r>
+            <a:endParaRPr lang="en-US" sz="1700" dirty="0"/>
+          </a:p>
+        </p:txBody>
+      </p:sp>
+      <p:sp>
+        <p:nvSpPr>
           <p:cNvPr id="7" name="Text 5"/>
           <p:cNvSpPr/>
           <p:nvPr/>
         </p:nvSpPr>
         <p:spPr>
           <a:xfrm>
-            <a:off x="640080" y="1115568"/>
-            <a:ext cx="7863840" cy="411480"/>
-          </a:xfrm>
-          <a:prstGeom prst="rect">
-            <a:avLst/>
-          </a:prstGeom>
-          <a:noFill/>
-          <a:ln/>
-        </p:spPr>
-        <p:txBody>
-          <a:bodyPr wrap="square" lIns="0" tIns="0" rIns="0" bIns="0" rtlCol="0" anchor="ctr"/>
-          <a:lstStyle/>
-          <a:p>
-            <a:pPr indent="0" marL="0">
-              <a:buNone/>
-            </a:pPr>
-            <a:r>
-              <a:rPr lang="en-US" sz="1800" i="1" dirty="0">
-                <a:solidFill>
-                  <a:srgbClr val="1E293B"/>
-                </a:solidFill>
-                <a:latin typeface="Calibri" pitchFamily="34" charset="0"/>
-                <a:ea typeface="Calibri" pitchFamily="34" charset="-122"/>
-                <a:cs typeface="Calibri" pitchFamily="34" charset="-120"/>
-              </a:rPr>
-              <a:t>the witchs sledge couldnt move because the snow had melted and her reindeers hooves sank in the mud</a:t>
-            </a:r>
-            <a:endParaRPr lang="en-US" sz="1800" dirty="0"/>
+            <a:off x="365760" y="2788920"/>
+            <a:ext cx="8412480" cy="365760"/>
+          </a:xfrm>
+          <a:prstGeom prst="rect">
+            <a:avLst/>
+          </a:prstGeom>
+          <a:noFill/>
+          <a:ln/>
+        </p:spPr>
+        <p:txBody>
+          <a:bodyPr wrap="square" lIns="0" tIns="0" rIns="0" bIns="0" rtlCol="0" anchor="ctr"/>
+          <a:lstStyle/>
+          <a:p>
+            <a:pPr indent="0" marL="0">
+              <a:buNone/>
+            </a:pPr>
+            <a:r>
+              <a:rPr lang="en-US" sz="1600" b="1" dirty="0">
+                <a:solidFill>
+                  <a:srgbClr val="0E1C42"/>
+                </a:solidFill>
+                <a:latin typeface="Calibri" pitchFamily="34" charset="0"/>
+                <a:ea typeface="Calibri" pitchFamily="34" charset="-122"/>
+                <a:cs typeface="Calibri" pitchFamily="34" charset="-120"/>
+              </a:rPr>
+              <a:t>Rewrite the sentence correctly in your notebook.</a:t>
+            </a:r>
+            <a:endParaRPr lang="en-US" sz="1600" dirty="0"/>
           </a:p>
         </p:txBody>
       </p:sp>
@@ -5223,7 +6028,7 @@
     <p:bg>
       <p:bgPr>
         <a:solidFill>
-          <a:srgbClr val="E5F7FC"/>
+          <a:srgbClr val="F8FAFC"/>
         </a:solidFill>
       </p:bgPr>
     </p:bg>
@@ -5243,149 +6048,124 @@
       </p:grpSpPr>
       <p:sp>
         <p:nvSpPr>
-          <p:cNvPr id="2" name="Text 0"/>
-          <p:cNvSpPr/>
-          <p:nvPr/>
-        </p:nvSpPr>
-        <p:spPr>
-          <a:xfrm>
-            <a:off x="365760" y="164592"/>
-            <a:ext cx="5943600" cy="566928"/>
-          </a:xfrm>
-          <a:prstGeom prst="rect">
-            <a:avLst/>
-          </a:prstGeom>
-          <a:noFill/>
-          <a:ln/>
-        </p:spPr>
-        <p:txBody>
-          <a:bodyPr wrap="square" lIns="0" tIns="0" rIns="0" bIns="0" rtlCol="0" anchor="ctr"/>
-          <a:lstStyle/>
-          <a:p>
-            <a:pPr algn="l" indent="0" marL="0">
-              <a:buNone/>
-            </a:pPr>
-            <a:r>
-              <a:rPr lang="en-US" sz="2800" b="1" dirty="0">
-                <a:solidFill>
-                  <a:srgbClr val="0E1C42"/>
-                </a:solidFill>
-                <a:latin typeface="Calibri" pitchFamily="34" charset="0"/>
-                <a:ea typeface="Calibri" pitchFamily="34" charset="-122"/>
-                <a:cs typeface="Calibri" pitchFamily="34" charset="-120"/>
-              </a:rPr>
-              <a:t>🔧 Fix-It Sentence — Answer Revealed</a:t>
-            </a:r>
-            <a:endParaRPr lang="en-US" sz="2800" dirty="0"/>
-          </a:p>
-        </p:txBody>
-      </p:sp>
-      <p:sp>
-        <p:nvSpPr>
-          <p:cNvPr id="3" name="Shape 1"/>
+          <p:cNvPr id="2" name="Shape 0"/>
+          <p:cNvSpPr/>
+          <p:nvPr/>
+        </p:nvSpPr>
+        <p:spPr>
+          <a:xfrm>
+            <a:off x="0" y="0"/>
+            <a:ext cx="9144000" cy="566928"/>
+          </a:xfrm>
+          <a:prstGeom prst="rect">
+            <a:avLst/>
+          </a:prstGeom>
+          <a:solidFill>
+            <a:srgbClr val="55C8E8"/>
+          </a:solidFill>
+          <a:ln/>
+        </p:spPr>
+      </p:sp>
+      <p:sp>
+        <p:nvSpPr>
+          <p:cNvPr id="3" name="Text 1"/>
+          <p:cNvSpPr/>
+          <p:nvPr/>
+        </p:nvSpPr>
+        <p:spPr>
+          <a:xfrm>
+            <a:off x="365760" y="54864"/>
+            <a:ext cx="8412480" cy="457200"/>
+          </a:xfrm>
+          <a:prstGeom prst="rect">
+            <a:avLst/>
+          </a:prstGeom>
+          <a:noFill/>
+          <a:ln/>
+        </p:spPr>
+        <p:txBody>
+          <a:bodyPr wrap="square" lIns="0" tIns="0" rIns="0" bIns="0" rtlCol="0" anchor="ctr"/>
+          <a:lstStyle/>
+          <a:p>
+            <a:pPr indent="0" marL="0">
+              <a:buNone/>
+            </a:pPr>
+            <a:r>
+              <a:rPr lang="en-US" sz="2200" b="1" dirty="0">
+                <a:solidFill>
+                  <a:srgbClr val="FFFFFF"/>
+                </a:solidFill>
+                <a:latin typeface="Calibri" pitchFamily="34" charset="0"/>
+                <a:ea typeface="Calibri" pitchFamily="34" charset="-122"/>
+                <a:cs typeface="Calibri" pitchFamily="34" charset="-120"/>
+              </a:rPr>
+              <a:t>✏️  Daily Oral Language</a:t>
+            </a:r>
+            <a:endParaRPr lang="en-US" sz="2200" dirty="0"/>
+          </a:p>
+        </p:txBody>
+      </p:sp>
+      <p:sp>
+        <p:nvSpPr>
+          <p:cNvPr id="4" name="Text 2"/>
           <p:cNvSpPr/>
           <p:nvPr/>
         </p:nvSpPr>
         <p:spPr>
           <a:xfrm>
             <a:off x="365760" y="749808"/>
-            <a:ext cx="8412480" cy="0"/>
-          </a:xfrm>
-          <a:prstGeom prst="line">
-            <a:avLst/>
-          </a:prstGeom>
-          <a:noFill/>
+            <a:ext cx="8229600" cy="237744"/>
+          </a:xfrm>
+          <a:prstGeom prst="rect">
+            <a:avLst/>
+          </a:prstGeom>
+          <a:noFill/>
+          <a:ln/>
+        </p:spPr>
+        <p:txBody>
+          <a:bodyPr wrap="square" lIns="0" tIns="0" rIns="0" bIns="0" rtlCol="0" anchor="ctr"/>
+          <a:lstStyle/>
+          <a:p>
+            <a:pPr indent="0" marL="0">
+              <a:buNone/>
+            </a:pPr>
+            <a:r>
+              <a:rPr lang="en-US" sz="1100" b="1" spc="100" kern="0" dirty="0">
+                <a:solidFill>
+                  <a:srgbClr val="55C8E8"/>
+                </a:solidFill>
+                <a:latin typeface="Calibri" pitchFamily="34" charset="0"/>
+                <a:ea typeface="Calibri" pitchFamily="34" charset="-122"/>
+                <a:cs typeface="Calibri" pitchFamily="34" charset="-120"/>
+              </a:rPr>
+              <a:t>NOW FIX THIS ONE</a:t>
+            </a:r>
+            <a:endParaRPr lang="en-US" sz="1100" dirty="0"/>
+          </a:p>
+        </p:txBody>
+      </p:sp>
+      <p:sp>
+        <p:nvSpPr>
+          <p:cNvPr id="5" name="Shape 3"/>
+          <p:cNvSpPr/>
+          <p:nvPr/>
+        </p:nvSpPr>
+        <p:spPr>
+          <a:xfrm>
+            <a:off x="365760" y="1024128"/>
+            <a:ext cx="8412480" cy="777240"/>
+          </a:xfrm>
+          <a:prstGeom prst="roundRect">
+            <a:avLst>
+              <a:gd name="adj" fmla="val 11765"/>
+            </a:avLst>
+          </a:prstGeom>
+          <a:solidFill>
+            <a:srgbClr val="FFFFFF"/>
+          </a:solidFill>
           <a:ln w="19050">
             <a:solidFill>
-              <a:srgbClr val="4A90D9"/>
-            </a:solidFill>
-            <a:prstDash val="solid"/>
-          </a:ln>
-        </p:spPr>
-      </p:sp>
-      <p:sp>
-        <p:nvSpPr>
-          <p:cNvPr id="4" name="Shape 2"/>
-          <p:cNvSpPr/>
-          <p:nvPr/>
-        </p:nvSpPr>
-        <p:spPr>
-          <a:xfrm>
-            <a:off x="6492240" y="173736"/>
-            <a:ext cx="2286000" cy="502920"/>
-          </a:xfrm>
-          <a:prstGeom prst="roundRect">
-            <a:avLst>
-              <a:gd name="adj" fmla="val 21818"/>
-            </a:avLst>
-          </a:prstGeom>
-          <a:solidFill>
-            <a:srgbClr val="4A90D9"/>
-          </a:solidFill>
-          <a:ln/>
-        </p:spPr>
-      </p:sp>
-      <p:sp>
-        <p:nvSpPr>
-          <p:cNvPr id="5" name="Text 3"/>
-          <p:cNvSpPr/>
-          <p:nvPr/>
-        </p:nvSpPr>
-        <p:spPr>
-          <a:xfrm>
-            <a:off x="6492240" y="173736"/>
-            <a:ext cx="2286000" cy="502920"/>
-          </a:xfrm>
-          <a:prstGeom prst="rect">
-            <a:avLst/>
-          </a:prstGeom>
-          <a:noFill/>
-          <a:ln/>
-        </p:spPr>
-        <p:txBody>
-          <a:bodyPr wrap="square" lIns="0" tIns="0" rIns="0" bIns="0" rtlCol="0" anchor="ctr"/>
-          <a:lstStyle/>
-          <a:p>
-            <a:pPr algn="ctr" indent="0" marL="0">
-              <a:buNone/>
-            </a:pPr>
-            <a:r>
-              <a:rPr lang="en-US" sz="1100" b="1" dirty="0">
-                <a:solidFill>
-                  <a:srgbClr val="0E1C42"/>
-                </a:solidFill>
-                <a:latin typeface="Calibri" pitchFamily="34" charset="0"/>
-                <a:ea typeface="Calibri" pitchFamily="34" charset="-122"/>
-                <a:cs typeface="Calibri" pitchFamily="34" charset="-120"/>
-              </a:rPr>
-              <a:t>CHAT PROMPT</a:t>
-            </a:r>
-            <a:endParaRPr lang="en-US" sz="1100" dirty="0"/>
-          </a:p>
-        </p:txBody>
-      </p:sp>
-      <p:sp>
-        <p:nvSpPr>
-          <p:cNvPr id="6" name="Shape 4"/>
-          <p:cNvSpPr/>
-          <p:nvPr/>
-        </p:nvSpPr>
-        <p:spPr>
-          <a:xfrm>
-            <a:off x="457200" y="1005840"/>
-            <a:ext cx="8229600" cy="640080"/>
-          </a:xfrm>
-          <a:prstGeom prst="roundRect">
-            <a:avLst>
-              <a:gd name="adj" fmla="val 14286"/>
-            </a:avLst>
-          </a:prstGeom>
-          <a:solidFill>
-            <a:srgbClr val="F8FAFC"/>
-          </a:solidFill>
-          <a:ln w="12700">
-            <a:solidFill>
-              <a:srgbClr val="C7922C"/>
+              <a:srgbClr val="55C8E8"/>
             </a:solidFill>
             <a:prstDash val="solid"/>
           </a:ln>
@@ -5400,30 +6180,30 @@
       </p:sp>
       <p:sp>
         <p:nvSpPr>
-          <p:cNvPr id="7" name="Text 5"/>
-          <p:cNvSpPr/>
-          <p:nvPr/>
-        </p:nvSpPr>
-        <p:spPr>
-          <a:xfrm>
-            <a:off x="640080" y="1115568"/>
-            <a:ext cx="7863840" cy="411480"/>
-          </a:xfrm>
-          <a:prstGeom prst="rect">
-            <a:avLst/>
-          </a:prstGeom>
-          <a:noFill/>
-          <a:ln/>
-        </p:spPr>
-        <p:txBody>
-          <a:bodyPr wrap="square" lIns="0" tIns="0" rIns="0" bIns="0" rtlCol="0" anchor="ctr"/>
-          <a:lstStyle/>
-          <a:p>
-            <a:pPr indent="0" marL="0">
-              <a:buNone/>
-            </a:pPr>
-            <a:r>
-              <a:rPr lang="en-US" sz="1800" i="1" dirty="0">
+          <p:cNvPr id="6" name="Text 4"/>
+          <p:cNvSpPr/>
+          <p:nvPr/>
+        </p:nvSpPr>
+        <p:spPr>
+          <a:xfrm>
+            <a:off x="594360" y="1152144"/>
+            <a:ext cx="7955280" cy="521208"/>
+          </a:xfrm>
+          <a:prstGeom prst="rect">
+            <a:avLst/>
+          </a:prstGeom>
+          <a:noFill/>
+          <a:ln/>
+        </p:spPr>
+        <p:txBody>
+          <a:bodyPr wrap="square" lIns="0" tIns="0" rIns="0" bIns="0" rtlCol="0" anchor="ctr"/>
+          <a:lstStyle/>
+          <a:p>
+            <a:pPr indent="0" marL="0">
+              <a:buNone/>
+            </a:pPr>
+            <a:r>
+              <a:rPr lang="en-US" sz="1700" dirty="0">
                 <a:solidFill>
                   <a:srgbClr val="1E293B"/>
                 </a:solidFill>
@@ -5433,9 +6213,38 @@
               </a:rPr>
               <a:t>the witchs sledge couldnt move because the snow had melted and her reindeers hooves sank in the mud</a:t>
             </a:r>
-            <a:endParaRPr lang="en-US" sz="1800" dirty="0"/>
-          </a:p>
-        </p:txBody>
+            <a:endParaRPr lang="en-US" sz="1700" dirty="0"/>
+          </a:p>
+        </p:txBody>
+      </p:sp>
+      <p:sp>
+        <p:nvSpPr>
+          <p:cNvPr id="7" name="Shape 5"/>
+          <p:cNvSpPr/>
+          <p:nvPr/>
+        </p:nvSpPr>
+        <p:spPr>
+          <a:xfrm>
+            <a:off x="365760" y="2743200"/>
+            <a:ext cx="8412480" cy="1417320"/>
+          </a:xfrm>
+          <a:prstGeom prst="roundRect">
+            <a:avLst>
+              <a:gd name="adj" fmla="val 6452"/>
+            </a:avLst>
+          </a:prstGeom>
+          <a:solidFill>
+            <a:srgbClr val="E8F8EF"/>
+          </a:solidFill>
+          <a:ln/>
+          <a:effectLst>
+            <a:outerShdw sx="100000" sy="100000" kx="0" ky="0" algn="bl" rotWithShape="0" blurRad="101600" dist="38100" dir="2700000">
+              <a:srgbClr val="000000">
+                <a:alpha val="12000"/>
+              </a:srgbClr>
+            </a:outerShdw>
+          </a:effectLst>
+        </p:spPr>
       </p:sp>
       <p:sp>
         <p:nvSpPr>
@@ -5445,24 +6254,108 @@
         </p:nvSpPr>
         <p:spPr>
           <a:xfrm>
-            <a:off x="457200" y="1737360"/>
-            <a:ext cx="8046720" cy="292608"/>
-          </a:xfrm>
-          <a:prstGeom prst="rect">
-            <a:avLst/>
-          </a:prstGeom>
-          <a:noFill/>
-          <a:ln/>
-        </p:spPr>
-        <p:txBody>
-          <a:bodyPr wrap="square" lIns="0" tIns="0" rIns="0" bIns="0" rtlCol="0" anchor="ctr"/>
-          <a:lstStyle/>
-          <a:p>
-            <a:pPr indent="0" marL="0">
-              <a:buNone/>
-            </a:pPr>
-            <a:r>
-              <a:rPr lang="en-US" sz="1100" b="1" spc="200" kern="0" dirty="0">
+            <a:off x="566928" y="2816352"/>
+            <a:ext cx="8229600" cy="237744"/>
+          </a:xfrm>
+          <a:prstGeom prst="rect">
+            <a:avLst/>
+          </a:prstGeom>
+          <a:noFill/>
+          <a:ln/>
+        </p:spPr>
+        <p:txBody>
+          <a:bodyPr wrap="square" lIns="0" tIns="0" rIns="0" bIns="0" rtlCol="0" anchor="ctr"/>
+          <a:lstStyle/>
+          <a:p>
+            <a:pPr indent="0" marL="0">
+              <a:buNone/>
+            </a:pPr>
+            <a:r>
+              <a:rPr lang="en-US" sz="1100" b="1" spc="100" kern="0" dirty="0">
+                <a:solidFill>
+                  <a:srgbClr val="34B76F"/>
+                </a:solidFill>
+                <a:latin typeface="Calibri" pitchFamily="34" charset="0"/>
+                <a:ea typeface="Calibri" pitchFamily="34" charset="-122"/>
+                <a:cs typeface="Calibri" pitchFamily="34" charset="-120"/>
+              </a:rPr>
+              <a:t>✅  CORRECTED</a:t>
+            </a:r>
+            <a:endParaRPr lang="en-US" sz="1100" dirty="0"/>
+          </a:p>
+        </p:txBody>
+      </p:sp>
+      <p:sp>
+        <p:nvSpPr>
+          <p:cNvPr id="9" name="Text 7"/>
+          <p:cNvSpPr/>
+          <p:nvPr/>
+        </p:nvSpPr>
+        <p:spPr>
+          <a:xfrm>
+            <a:off x="566928" y="3072384"/>
+            <a:ext cx="8010144" cy="685800"/>
+          </a:xfrm>
+          <a:prstGeom prst="rect">
+            <a:avLst/>
+          </a:prstGeom>
+          <a:noFill/>
+          <a:ln/>
+        </p:spPr>
+        <p:txBody>
+          <a:bodyPr wrap="square" lIns="0" tIns="0" rIns="0" bIns="0" rtlCol="0" anchor="ctr"/>
+          <a:lstStyle/>
+          <a:p>
+            <a:pPr indent="0" marL="0">
+              <a:buNone/>
+            </a:pPr>
+            <a:r>
+              <a:rPr lang="en-US" sz="1400" i="1" dirty="0">
+                <a:solidFill>
+                  <a:srgbClr val="1E293B"/>
+                </a:solidFill>
+                <a:latin typeface="Calibri" pitchFamily="34" charset="0"/>
+                <a:ea typeface="Calibri" pitchFamily="34" charset="-122"/>
+                <a:cs typeface="Calibri" pitchFamily="34" charset="-120"/>
+              </a:rPr>
+              <a:t>Corrected: The Witch's sledge couldn't move because the snow had melted, and her reindeer's hooves sank in the mud.</a:t>
+            </a:r>
+            <a:endParaRPr lang="en-US" sz="1400" dirty="0"/>
+          </a:p>
+          <a:p>
+            <a:pPr indent="0" marL="0">
+              <a:buNone/>
+            </a:pPr>
+            <a:endParaRPr lang="en-US" sz="1400" dirty="0"/>
+          </a:p>
+        </p:txBody>
+      </p:sp>
+      <p:sp>
+        <p:nvSpPr>
+          <p:cNvPr id="10" name="Text 8"/>
+          <p:cNvSpPr/>
+          <p:nvPr/>
+        </p:nvSpPr>
+        <p:spPr>
+          <a:xfrm>
+            <a:off x="566928" y="3767328"/>
+            <a:ext cx="8010144" cy="320040"/>
+          </a:xfrm>
+          <a:prstGeom prst="rect">
+            <a:avLst/>
+          </a:prstGeom>
+          <a:noFill/>
+          <a:ln/>
+        </p:spPr>
+        <p:txBody>
+          <a:bodyPr wrap="square" lIns="0" tIns="0" rIns="0" bIns="0" rtlCol="0" anchor="ctr"/>
+          <a:lstStyle/>
+          <a:p>
+            <a:pPr indent="0" marL="0">
+              <a:buNone/>
+            </a:pPr>
+            <a:r>
+              <a:rPr lang="en-US" sz="1200" dirty="0">
                 <a:solidFill>
                   <a:srgbClr val="64748B"/>
                 </a:solidFill>
@@ -5470,48 +6363,9 @@
                 <a:ea typeface="Calibri" pitchFamily="34" charset="-122"/>
                 <a:cs typeface="Calibri" pitchFamily="34" charset="-120"/>
               </a:rPr>
-              <a:t>WHY</a:t>
-            </a:r>
-            <a:endParaRPr lang="en-US" sz="1100" dirty="0"/>
-          </a:p>
-        </p:txBody>
-      </p:sp>
-      <p:sp>
-        <p:nvSpPr>
-          <p:cNvPr id="9" name="Text 7"/>
-          <p:cNvSpPr/>
-          <p:nvPr/>
-        </p:nvSpPr>
-        <p:spPr>
-          <a:xfrm>
-            <a:off x="640080" y="2011680"/>
-            <a:ext cx="7863840" cy="502920"/>
-          </a:xfrm>
-          <a:prstGeom prst="rect">
-            <a:avLst/>
-          </a:prstGeom>
-          <a:noFill/>
-          <a:ln/>
-        </p:spPr>
-        <p:txBody>
-          <a:bodyPr wrap="square" lIns="0" tIns="0" rIns="0" bIns="0" rtlCol="0" anchor="ctr"/>
-          <a:lstStyle/>
-          <a:p>
-            <a:pPr indent="0" marL="0">
-              <a:buNone/>
-            </a:pPr>
-            <a:r>
-              <a:rPr lang="en-US" sz="1300" i="1" dirty="0">
-                <a:solidFill>
-                  <a:srgbClr val="64748B"/>
-                </a:solidFill>
-                <a:latin typeface="Calibri" pitchFamily="34" charset="0"/>
-                <a:ea typeface="Calibri" pitchFamily="34" charset="-122"/>
-                <a:cs typeface="Calibri" pitchFamily="34" charset="-120"/>
-              </a:rPr>
               <a:t>Witch's = possessive; couldn't = contraction (could not); comma before and; reindeer's = possessive; period ends.</a:t>
             </a:r>
-            <a:endParaRPr lang="en-US" sz="1300" dirty="0"/>
+            <a:endParaRPr lang="en-US" sz="1200" dirty="0"/>
           </a:p>
         </p:txBody>
       </p:sp>

--- a/Planning docs/Slides/lesson-28-2-teacher-slides.pptx
+++ b/Planning docs/Slides/lesson-28-2-teacher-slides.pptx
@@ -515,7 +515,7 @@
           <a:p>
             <a:r>
               <a:rPr lang="en-US" dirty="0"/>
-              <a:t>Lesson 28.2. Reading: Reading: Ch. 10–12.</a:t>
+              <a:t>Lesson 28.2. Reading: .</a:t>
             </a:r>
             <a:endParaRPr lang="en-US" dirty="0"/>
           </a:p>
@@ -2143,7 +2143,7 @@
                 <a:ea typeface="Calibri" pitchFamily="34" charset="-122"/>
                 <a:cs typeface="Calibri" pitchFamily="34" charset="-120"/>
               </a:rPr>
-              <a:t>Lesson 28.2  ·  Reading: Ch. 10–12</a:t>
+              <a:t>Lesson 28.2</a:t>
             </a:r>
             <a:endParaRPr lang="en-US" sz="2000" dirty="0"/>
           </a:p>
@@ -3850,121 +3850,9 @@
                 <a:ea typeface="Calibri" pitchFamily="34" charset="-122"/>
                 <a:cs typeface="Calibri" pitchFamily="34" charset="-120"/>
               </a:rPr>
-              <a:t>Reading: Ch. 10–12</a:t>
+              <a:t>Today’s chapters</a:t>
             </a:r>
             <a:endParaRPr lang="en-US" sz="2600" dirty="0"/>
-          </a:p>
-        </p:txBody>
-      </p:sp>
-      <p:sp>
-        <p:nvSpPr>
-          <p:cNvPr id="5" name="Text 3"/>
-          <p:cNvSpPr/>
-          <p:nvPr/>
-        </p:nvSpPr>
-        <p:spPr>
-          <a:xfrm>
-            <a:off x="365760" y="1463040"/>
-            <a:ext cx="8229600" cy="237744"/>
-          </a:xfrm>
-          <a:prstGeom prst="rect">
-            <a:avLst/>
-          </a:prstGeom>
-          <a:noFill/>
-          <a:ln/>
-        </p:spPr>
-        <p:txBody>
-          <a:bodyPr wrap="square" lIns="0" tIns="0" rIns="0" bIns="0" rtlCol="0" anchor="ctr"/>
-          <a:lstStyle/>
-          <a:p>
-            <a:pPr indent="0" marL="0">
-              <a:buNone/>
-            </a:pPr>
-            <a:r>
-              <a:rPr lang="en-US" sz="1100" b="1" spc="100" kern="0" dirty="0">
-                <a:solidFill>
-                  <a:srgbClr val="C7922C"/>
-                </a:solidFill>
-                <a:latin typeface="Calibri" pitchFamily="34" charset="0"/>
-                <a:ea typeface="Calibri" pitchFamily="34" charset="-122"/>
-                <a:cs typeface="Calibri" pitchFamily="34" charset="-120"/>
-              </a:rPr>
-              <a:t>PAUSE &amp; THINK</a:t>
-            </a:r>
-            <a:endParaRPr lang="en-US" sz="1100" dirty="0"/>
-          </a:p>
-        </p:txBody>
-      </p:sp>
-      <p:sp>
-        <p:nvSpPr>
-          <p:cNvPr id="6" name="Text 4"/>
-          <p:cNvSpPr/>
-          <p:nvPr/>
-        </p:nvSpPr>
-        <p:spPr>
-          <a:xfrm>
-            <a:off x="365760" y="1719072"/>
-            <a:ext cx="8412480" cy="914400"/>
-          </a:xfrm>
-          <a:prstGeom prst="rect">
-            <a:avLst/>
-          </a:prstGeom>
-          <a:noFill/>
-          <a:ln/>
-        </p:spPr>
-        <p:txBody>
-          <a:bodyPr wrap="square" lIns="0" tIns="0" rIns="0" bIns="0" rtlCol="0" anchor="ctr"/>
-          <a:lstStyle/>
-          <a:p>
-            <a:pPr indent="0" marL="0">
-              <a:buNone/>
-            </a:pPr>
-            <a:r>
-              <a:rPr lang="en-US" sz="1500" dirty="0">
-                <a:solidFill>
-                  <a:srgbClr val="1E293B"/>
-                </a:solidFill>
-                <a:latin typeface="Calibri" pitchFamily="34" charset="0"/>
-                <a:ea typeface="Calibri" pitchFamily="34" charset="-122"/>
-                <a:cs typeface="Calibri" pitchFamily="34" charset="-120"/>
-              </a:rPr>
-              <a:t>•  Notice symbolism and repeated ideas.</a:t>
-            </a:r>
-            <a:endParaRPr lang="en-US" sz="1500" dirty="0"/>
-          </a:p>
-          <a:p>
-            <a:pPr indent="0" marL="0">
-              <a:buNone/>
-            </a:pPr>
-            <a:r>
-              <a:rPr lang="en-US" sz="1500" dirty="0">
-                <a:solidFill>
-                  <a:srgbClr val="1E293B"/>
-                </a:solidFill>
-                <a:latin typeface="Calibri" pitchFamily="34" charset="0"/>
-                <a:ea typeface="Calibri" pitchFamily="34" charset="-122"/>
-                <a:cs typeface="Calibri" pitchFamily="34" charset="-120"/>
-              </a:rPr>
-              <a:t>•  As you read today, ask yourself: How do you recognize a symbol — something that stands for more than just itself?</a:t>
-            </a:r>
-            <a:endParaRPr lang="en-US" sz="1500" dirty="0"/>
-          </a:p>
-          <a:p>
-            <a:pPr indent="0" marL="0">
-              <a:buNone/>
-            </a:pPr>
-            <a:r>
-              <a:rPr lang="en-US" sz="1500" dirty="0">
-                <a:solidFill>
-                  <a:srgbClr val="1E293B"/>
-                </a:solidFill>
-                <a:latin typeface="Calibri" pitchFamily="34" charset="0"/>
-                <a:ea typeface="Calibri" pitchFamily="34" charset="-122"/>
-                <a:cs typeface="Calibri" pitchFamily="34" charset="-120"/>
-              </a:rPr>
-              <a:t>•  Does this fit the A–A–B–B–A pattern you wrote down last week? Check each line.</a:t>
-            </a:r>
-            <a:endParaRPr lang="en-US" sz="1500" dirty="0"/>
           </a:p>
         </p:txBody>
       </p:sp>
@@ -5073,13 +4961,13 @@
             <a:r>
               <a:rPr lang="en-US" sz="1100" b="1" spc="100" kern="0" dirty="0">
                 <a:solidFill>
-                  <a:srgbClr val="8B6FC0"/>
-                </a:solidFill>
-                <a:latin typeface="Calibri" pitchFamily="34" charset="0"/>
-                <a:ea typeface="Calibri" pitchFamily="34" charset="-122"/>
-                <a:cs typeface="Calibri" pitchFamily="34" charset="-120"/>
-              </a:rPr>
-              <a:t>READING</a:t>
+                  <a:srgbClr val="C7922C"/>
+                </a:solidFill>
+                <a:latin typeface="Calibri" pitchFamily="34" charset="0"/>
+                <a:ea typeface="Calibri" pitchFamily="34" charset="-122"/>
+                <a:cs typeface="Calibri" pitchFamily="34" charset="-120"/>
+              </a:rPr>
+              <a:t>BIG QUESTION</a:t>
             </a:r>
             <a:endParaRPr lang="en-US" sz="1100" dirty="0"/>
           </a:p>
@@ -5087,91 +4975,13 @@
       </p:sp>
       <p:sp>
         <p:nvSpPr>
-          <p:cNvPr id="5" name="Text 3"/>
+          <p:cNvPr id="5" name="Shape 3"/>
           <p:cNvSpPr/>
           <p:nvPr/>
         </p:nvSpPr>
         <p:spPr>
           <a:xfrm>
             <a:off x="365760" y="1014984"/>
-            <a:ext cx="8412480" cy="365760"/>
-          </a:xfrm>
-          <a:prstGeom prst="rect">
-            <a:avLst/>
-          </a:prstGeom>
-          <a:noFill/>
-          <a:ln/>
-        </p:spPr>
-        <p:txBody>
-          <a:bodyPr wrap="square" lIns="0" tIns="0" rIns="0" bIns="0" rtlCol="0" anchor="ctr"/>
-          <a:lstStyle/>
-          <a:p>
-            <a:pPr indent="0" marL="0">
-              <a:buNone/>
-            </a:pPr>
-            <a:r>
-              <a:rPr lang="en-US" sz="2000" b="1" dirty="0">
-                <a:solidFill>
-                  <a:srgbClr val="0E1C42"/>
-                </a:solidFill>
-                <a:latin typeface="Calibri" pitchFamily="34" charset="0"/>
-                <a:ea typeface="Calibri" pitchFamily="34" charset="-122"/>
-                <a:cs typeface="Calibri" pitchFamily="34" charset="-120"/>
-              </a:rPr>
-              <a:t>Reading: Ch. 10–12</a:t>
-            </a:r>
-            <a:endParaRPr lang="en-US" sz="2000" dirty="0"/>
-          </a:p>
-        </p:txBody>
-      </p:sp>
-      <p:sp>
-        <p:nvSpPr>
-          <p:cNvPr id="6" name="Text 4"/>
-          <p:cNvSpPr/>
-          <p:nvPr/>
-        </p:nvSpPr>
-        <p:spPr>
-          <a:xfrm>
-            <a:off x="365760" y="1508760"/>
-            <a:ext cx="8229600" cy="237744"/>
-          </a:xfrm>
-          <a:prstGeom prst="rect">
-            <a:avLst/>
-          </a:prstGeom>
-          <a:noFill/>
-          <a:ln/>
-        </p:spPr>
-        <p:txBody>
-          <a:bodyPr wrap="square" lIns="0" tIns="0" rIns="0" bIns="0" rtlCol="0" anchor="ctr"/>
-          <a:lstStyle/>
-          <a:p>
-            <a:pPr indent="0" marL="0">
-              <a:buNone/>
-            </a:pPr>
-            <a:r>
-              <a:rPr lang="en-US" sz="1100" b="1" spc="100" kern="0" dirty="0">
-                <a:solidFill>
-                  <a:srgbClr val="C7922C"/>
-                </a:solidFill>
-                <a:latin typeface="Calibri" pitchFamily="34" charset="0"/>
-                <a:ea typeface="Calibri" pitchFamily="34" charset="-122"/>
-                <a:cs typeface="Calibri" pitchFamily="34" charset="-120"/>
-              </a:rPr>
-              <a:t>BIG QUESTION</a:t>
-            </a:r>
-            <a:endParaRPr lang="en-US" sz="1100" dirty="0"/>
-          </a:p>
-        </p:txBody>
-      </p:sp>
-      <p:sp>
-        <p:nvSpPr>
-          <p:cNvPr id="7" name="Shape 5"/>
-          <p:cNvSpPr/>
-          <p:nvPr/>
-        </p:nvSpPr>
-        <p:spPr>
-          <a:xfrm>
-            <a:off x="365760" y="1746504"/>
             <a:ext cx="8412480" cy="731520"/>
           </a:xfrm>
           <a:prstGeom prst="roundRect">
@@ -5199,91 +5009,91 @@
       </p:sp>
       <p:sp>
         <p:nvSpPr>
+          <p:cNvPr id="6" name="Text 4"/>
+          <p:cNvSpPr/>
+          <p:nvPr/>
+        </p:nvSpPr>
+        <p:spPr>
+          <a:xfrm>
+            <a:off x="594360" y="1143000"/>
+            <a:ext cx="7955280" cy="475488"/>
+          </a:xfrm>
+          <a:prstGeom prst="rect">
+            <a:avLst/>
+          </a:prstGeom>
+          <a:noFill/>
+          <a:ln/>
+        </p:spPr>
+        <p:txBody>
+          <a:bodyPr wrap="square" lIns="0" tIns="0" rIns="0" bIns="0" rtlCol="0" anchor="ctr"/>
+          <a:lstStyle/>
+          <a:p>
+            <a:pPr indent="0" marL="0">
+              <a:buNone/>
+            </a:pPr>
+            <a:r>
+              <a:rPr lang="en-US" sz="1700" dirty="0">
+                <a:solidFill>
+                  <a:srgbClr val="1E293B"/>
+                </a:solidFill>
+                <a:latin typeface="Calibri" pitchFamily="34" charset="0"/>
+                <a:ea typeface="Calibri" pitchFamily="34" charset="-122"/>
+                <a:cs typeface="Calibri" pitchFamily="34" charset="-120"/>
+              </a:rPr>
+              <a:t>Notice symbolism and repeated ideas.</a:t>
+            </a:r>
+            <a:endParaRPr lang="en-US" sz="1700" dirty="0"/>
+          </a:p>
+        </p:txBody>
+      </p:sp>
+      <p:sp>
+        <p:nvSpPr>
+          <p:cNvPr id="7" name="Text 5"/>
+          <p:cNvSpPr/>
+          <p:nvPr/>
+        </p:nvSpPr>
+        <p:spPr>
+          <a:xfrm>
+            <a:off x="365760" y="1874520"/>
+            <a:ext cx="8229600" cy="237744"/>
+          </a:xfrm>
+          <a:prstGeom prst="rect">
+            <a:avLst/>
+          </a:prstGeom>
+          <a:noFill/>
+          <a:ln/>
+        </p:spPr>
+        <p:txBody>
+          <a:bodyPr wrap="square" lIns="0" tIns="0" rIns="0" bIns="0" rtlCol="0" anchor="ctr"/>
+          <a:lstStyle/>
+          <a:p>
+            <a:pPr indent="0" marL="0">
+              <a:buNone/>
+            </a:pPr>
+            <a:r>
+              <a:rPr lang="en-US" sz="1100" b="1" spc="100" kern="0" dirty="0">
+                <a:solidFill>
+                  <a:srgbClr val="55C8E8"/>
+                </a:solidFill>
+                <a:latin typeface="Calibri" pitchFamily="34" charset="0"/>
+                <a:ea typeface="Calibri" pitchFamily="34" charset="-122"/>
+                <a:cs typeface="Calibri" pitchFamily="34" charset="-120"/>
+              </a:rPr>
+              <a:t>READING LENS</a:t>
+            </a:r>
+            <a:endParaRPr lang="en-US" sz="1100" dirty="0"/>
+          </a:p>
+        </p:txBody>
+      </p:sp>
+      <p:sp>
+        <p:nvSpPr>
           <p:cNvPr id="8" name="Text 6"/>
           <p:cNvSpPr/>
           <p:nvPr/>
         </p:nvSpPr>
         <p:spPr>
           <a:xfrm>
-            <a:off x="594360" y="1874520"/>
-            <a:ext cx="7955280" cy="475488"/>
-          </a:xfrm>
-          <a:prstGeom prst="rect">
-            <a:avLst/>
-          </a:prstGeom>
-          <a:noFill/>
-          <a:ln/>
-        </p:spPr>
-        <p:txBody>
-          <a:bodyPr wrap="square" lIns="0" tIns="0" rIns="0" bIns="0" rtlCol="0" anchor="ctr"/>
-          <a:lstStyle/>
-          <a:p>
-            <a:pPr indent="0" marL="0">
-              <a:buNone/>
-            </a:pPr>
-            <a:r>
-              <a:rPr lang="en-US" sz="1700" dirty="0">
-                <a:solidFill>
-                  <a:srgbClr val="1E293B"/>
-                </a:solidFill>
-                <a:latin typeface="Calibri" pitchFamily="34" charset="0"/>
-                <a:ea typeface="Calibri" pitchFamily="34" charset="-122"/>
-                <a:cs typeface="Calibri" pitchFamily="34" charset="-120"/>
-              </a:rPr>
-              <a:t>Notice symbolism and repeated ideas.</a:t>
-            </a:r>
-            <a:endParaRPr lang="en-US" sz="1700" dirty="0"/>
-          </a:p>
-        </p:txBody>
-      </p:sp>
-      <p:sp>
-        <p:nvSpPr>
-          <p:cNvPr id="9" name="Text 7"/>
-          <p:cNvSpPr/>
-          <p:nvPr/>
-        </p:nvSpPr>
-        <p:spPr>
-          <a:xfrm>
-            <a:off x="365760" y="2606040"/>
-            <a:ext cx="8229600" cy="237744"/>
-          </a:xfrm>
-          <a:prstGeom prst="rect">
-            <a:avLst/>
-          </a:prstGeom>
-          <a:noFill/>
-          <a:ln/>
-        </p:spPr>
-        <p:txBody>
-          <a:bodyPr wrap="square" lIns="0" tIns="0" rIns="0" bIns="0" rtlCol="0" anchor="ctr"/>
-          <a:lstStyle/>
-          <a:p>
-            <a:pPr indent="0" marL="0">
-              <a:buNone/>
-            </a:pPr>
-            <a:r>
-              <a:rPr lang="en-US" sz="1100" b="1" spc="100" kern="0" dirty="0">
-                <a:solidFill>
-                  <a:srgbClr val="55C8E8"/>
-                </a:solidFill>
-                <a:latin typeface="Calibri" pitchFamily="34" charset="0"/>
-                <a:ea typeface="Calibri" pitchFamily="34" charset="-122"/>
-                <a:cs typeface="Calibri" pitchFamily="34" charset="-120"/>
-              </a:rPr>
-              <a:t>READING LENS</a:t>
-            </a:r>
-            <a:endParaRPr lang="en-US" sz="1100" dirty="0"/>
-          </a:p>
-        </p:txBody>
-      </p:sp>
-      <p:sp>
-        <p:nvSpPr>
-          <p:cNvPr id="10" name="Text 8"/>
-          <p:cNvSpPr/>
-          <p:nvPr/>
-        </p:nvSpPr>
-        <p:spPr>
-          <a:xfrm>
-            <a:off x="365760" y="2843784"/>
+            <a:off x="365760" y="2112264"/>
             <a:ext cx="8412480" cy="914400"/>
           </a:xfrm>
           <a:prstGeom prst="rect">
